--- a/docs/MSc_Proposal.pptx
+++ b/docs/MSc_Proposal.pptx
@@ -12,9 +12,6 @@
     <p:sldId id="260" r:id="rId11"/>
     <p:sldId id="261" r:id="rId12"/>
     <p:sldId id="262" r:id="rId13"/>
-    <p:sldId id="263" r:id="rId14"/>
-    <p:sldId id="264" r:id="rId15"/>
-    <p:sldId id="265" r:id="rId16"/>
   </p:sldIdLst>
   <p:sldSz cx="12191695" cy="6858000" type="screen4x3"/>
   <p:notesSz cx="6858000" cy="9144000"/>
@@ -3149,7 +3146,7 @@
         </p:nvSpPr>
         <p:spPr>
           <a:xfrm>
-            <a:off x="822960" y="914400"/>
+            <a:off x="822960" y="960120"/>
             <a:ext cx="109728" cy="1737360"/>
           </a:xfrm>
           <a:prstGeom prst="rect">
@@ -3193,7 +3190,7 @@
         </p:nvSpPr>
         <p:spPr>
           <a:xfrm>
-            <a:off x="1143000" y="960120"/>
+            <a:off x="1143000" y="1005840"/>
             <a:ext cx="10058400" cy="365760"/>
           </a:xfrm>
           <a:prstGeom prst="rect">
@@ -3235,8 +3232,8 @@
         </p:nvSpPr>
         <p:spPr>
           <a:xfrm>
-            <a:off x="1143000" y="1417320"/>
-            <a:ext cx="10241280" cy="1737360"/>
+            <a:off x="1143000" y="1463040"/>
+            <a:ext cx="10424160" cy="1645920"/>
           </a:xfrm>
           <a:prstGeom prst="rect">
             <a:avLst/>
@@ -3258,7 +3255,7 @@
               </a:spcAft>
             </a:pPr>
             <a:r>
-              <a:rPr sz="4000" b="1" i="0">
+              <a:rPr sz="3800" b="1" i="0">
                 <a:solidFill>
                   <a:srgbClr val="FFFFFF"/>
                 </a:solidFill>
@@ -3277,7 +3274,7 @@
               </a:spcAft>
             </a:pPr>
             <a:r>
-              <a:rPr sz="4000" b="1" i="0">
+              <a:rPr sz="3800" b="1" i="0">
                 <a:solidFill>
                   <a:srgbClr val="FFFFFF"/>
                 </a:solidFill>
@@ -3296,7 +3293,7 @@
         </p:nvSpPr>
         <p:spPr>
           <a:xfrm>
-            <a:off x="1143000" y="3200400"/>
+            <a:off x="1143000" y="3154680"/>
             <a:ext cx="10058400" cy="457200"/>
           </a:xfrm>
           <a:prstGeom prst="rect">
@@ -3338,7 +3335,7 @@
         </p:nvSpPr>
         <p:spPr>
           <a:xfrm>
-            <a:off x="1143000" y="4206240"/>
+            <a:off x="1143000" y="4160520"/>
             <a:ext cx="9875520" cy="18288"/>
           </a:xfrm>
           <a:prstGeom prst="rect">
@@ -3382,7 +3379,7 @@
         </p:nvSpPr>
         <p:spPr>
           <a:xfrm>
-            <a:off x="1143000" y="4434840"/>
+            <a:off x="1143000" y="4389120"/>
             <a:ext cx="10058400" cy="822960"/>
           </a:xfrm>
           <a:prstGeom prst="rect">
@@ -3430,720 +3427,7 @@
                 </a:solidFill>
                 <a:latin typeface="Calibri"/>
               </a:rPr>
-              <a:t>[Your name]  ·  Supervisor: [TBC]  ·  [Date]</a:t>
-            </a:r>
-          </a:p>
-        </p:txBody>
-      </p:sp>
-    </p:spTree>
-  </p:cSld>
-  <p:clrMapOvr>
-    <a:masterClrMapping/>
-  </p:clrMapOvr>
-</p:sld>
-</file>
-
-<file path=ppt/slides/slide10.xml><?xml version="1.0" encoding="utf-8"?>
-<p:sld xmlns:a="http://schemas.openxmlformats.org/drawingml/2006/main" xmlns:p="http://schemas.openxmlformats.org/presentationml/2006/main" xmlns:r="http://schemas.openxmlformats.org/officeDocument/2006/relationships">
-  <p:cSld>
-    <p:spTree>
-      <p:nvGrpSpPr>
-        <p:cNvPr id="1" name=""/>
-        <p:cNvGrpSpPr/>
-        <p:nvPr/>
-      </p:nvGrpSpPr>
-      <p:grpSpPr/>
-      <p:sp>
-        <p:nvSpPr>
-          <p:cNvPr id="2" name="Rectangle 1"/>
-          <p:cNvSpPr/>
-          <p:nvPr/>
-        </p:nvSpPr>
-        <p:spPr>
-          <a:xfrm>
-            <a:off x="0" y="0"/>
-            <a:ext cx="12191695" cy="6858000"/>
-          </a:xfrm>
-          <a:prstGeom prst="rect">
-            <a:avLst/>
-          </a:prstGeom>
-          <a:solidFill>
-            <a:srgbClr val="0E1628"/>
-          </a:solidFill>
-          <a:ln>
-            <a:noFill/>
-          </a:ln>
-          <a:effectLst/>
-        </p:spPr>
-        <p:style>
-          <a:lnRef idx="1">
-            <a:schemeClr val="accent1"/>
-          </a:lnRef>
-          <a:fillRef idx="3">
-            <a:schemeClr val="accent1"/>
-          </a:fillRef>
-          <a:effectRef idx="2">
-            <a:schemeClr val="accent1"/>
-          </a:effectRef>
-          <a:fontRef idx="minor">
-            <a:schemeClr val="lt1"/>
-          </a:fontRef>
-        </p:style>
-        <p:txBody>
-          <a:bodyPr rtlCol="0" anchor="ctr"/>
-          <a:lstStyle/>
-          <a:p>
-            <a:pPr algn="ctr"/>
-          </a:p>
-        </p:txBody>
-      </p:sp>
-      <p:sp>
-        <p:nvSpPr>
-          <p:cNvPr id="3" name="TextBox 2"/>
-          <p:cNvSpPr txBox="1"/>
-          <p:nvPr/>
-        </p:nvSpPr>
-        <p:spPr>
-          <a:xfrm>
-            <a:off x="822960" y="731520"/>
-            <a:ext cx="5486400" cy="274320"/>
-          </a:xfrm>
-          <a:prstGeom prst="rect">
-            <a:avLst/>
-          </a:prstGeom>
-          <a:noFill/>
-        </p:spPr>
-        <p:txBody>
-          <a:bodyPr wrap="square" anchor="t" lIns="0" rIns="0" tIns="0" bIns="0">
-            <a:spAutoFit/>
-          </a:bodyPr>
-          <a:lstStyle/>
-          <a:p>
-            <a:pPr algn="l">
-              <a:spcBef>
-                <a:spcPts val="0"/>
-              </a:spcBef>
-              <a:spcAft>
-                <a:spcPts val="400"/>
-              </a:spcAft>
-            </a:pPr>
-            <a:r>
-              <a:rPr sz="1200" b="1" i="0" spc="200">
-                <a:solidFill>
-                  <a:srgbClr val="2DD4BF"/>
-                </a:solidFill>
-                <a:latin typeface="Consolas"/>
-              </a:rPr>
-              <a:t>EXPECTED CONTRIBUTION</a:t>
-            </a:r>
-          </a:p>
-        </p:txBody>
-      </p:sp>
-      <p:sp>
-        <p:nvSpPr>
-          <p:cNvPr id="4" name="TextBox 3"/>
-          <p:cNvSpPr txBox="1"/>
-          <p:nvPr/>
-        </p:nvSpPr>
-        <p:spPr>
-          <a:xfrm>
-            <a:off x="822960" y="1097280"/>
-            <a:ext cx="10058400" cy="822960"/>
-          </a:xfrm>
-          <a:prstGeom prst="rect">
-            <a:avLst/>
-          </a:prstGeom>
-          <a:noFill/>
-        </p:spPr>
-        <p:txBody>
-          <a:bodyPr wrap="square" anchor="t" lIns="0" rIns="0" tIns="0" bIns="0">
-            <a:spAutoFit/>
-          </a:bodyPr>
-          <a:lstStyle/>
-          <a:p>
-            <a:pPr algn="l">
-              <a:spcBef>
-                <a:spcPts val="0"/>
-              </a:spcBef>
-              <a:spcAft>
-                <a:spcPts val="400"/>
-              </a:spcAft>
-            </a:pPr>
-            <a:r>
-              <a:rPr sz="3400" b="1" i="0">
-                <a:solidFill>
-                  <a:srgbClr val="FFFFFF"/>
-                </a:solidFill>
-                <a:latin typeface="Georgia"/>
-              </a:rPr>
-              <a:t>What this adds</a:t>
-            </a:r>
-          </a:p>
-        </p:txBody>
-      </p:sp>
-      <p:sp>
-        <p:nvSpPr>
-          <p:cNvPr id="5" name="Rounded Rectangle 4"/>
-          <p:cNvSpPr/>
-          <p:nvPr/>
-        </p:nvSpPr>
-        <p:spPr>
-          <a:xfrm>
-            <a:off x="822960" y="2286000"/>
-            <a:ext cx="3419856" cy="2468880"/>
-          </a:xfrm>
-          <a:prstGeom prst="roundRect">
-            <a:avLst/>
-          </a:prstGeom>
-          <a:solidFill>
-            <a:srgbClr val="1A2540"/>
-          </a:solidFill>
-          <a:ln>
-            <a:noFill/>
-          </a:ln>
-          <a:effectLst/>
-        </p:spPr>
-        <p:style>
-          <a:lnRef idx="1">
-            <a:schemeClr val="accent1"/>
-          </a:lnRef>
-          <a:fillRef idx="3">
-            <a:schemeClr val="accent1"/>
-          </a:fillRef>
-          <a:effectRef idx="2">
-            <a:schemeClr val="accent1"/>
-          </a:effectRef>
-          <a:fontRef idx="minor">
-            <a:schemeClr val="lt1"/>
-          </a:fontRef>
-        </p:style>
-        <p:txBody>
-          <a:bodyPr rtlCol="0" anchor="ctr"/>
-          <a:lstStyle/>
-          <a:p>
-            <a:pPr algn="ctr"/>
-          </a:p>
-        </p:txBody>
-      </p:sp>
-      <p:sp>
-        <p:nvSpPr>
-          <p:cNvPr id="6" name="Rectangle 5"/>
-          <p:cNvSpPr/>
-          <p:nvPr/>
-        </p:nvSpPr>
-        <p:spPr>
-          <a:xfrm>
-            <a:off x="1188720" y="2651760"/>
-            <a:ext cx="457200" cy="109728"/>
-          </a:xfrm>
-          <a:prstGeom prst="rect">
-            <a:avLst/>
-          </a:prstGeom>
-          <a:solidFill>
-            <a:srgbClr val="14B8A6"/>
-          </a:solidFill>
-          <a:ln>
-            <a:noFill/>
-          </a:ln>
-          <a:effectLst/>
-        </p:spPr>
-        <p:style>
-          <a:lnRef idx="1">
-            <a:schemeClr val="accent1"/>
-          </a:lnRef>
-          <a:fillRef idx="3">
-            <a:schemeClr val="accent1"/>
-          </a:fillRef>
-          <a:effectRef idx="2">
-            <a:schemeClr val="accent1"/>
-          </a:effectRef>
-          <a:fontRef idx="minor">
-            <a:schemeClr val="lt1"/>
-          </a:fontRef>
-        </p:style>
-        <p:txBody>
-          <a:bodyPr rtlCol="0" anchor="ctr"/>
-          <a:lstStyle/>
-          <a:p>
-            <a:pPr algn="ctr"/>
-          </a:p>
-        </p:txBody>
-      </p:sp>
-      <p:sp>
-        <p:nvSpPr>
-          <p:cNvPr id="7" name="TextBox 6"/>
-          <p:cNvSpPr txBox="1"/>
-          <p:nvPr/>
-        </p:nvSpPr>
-        <p:spPr>
-          <a:xfrm>
-            <a:off x="1188720" y="2971800"/>
-            <a:ext cx="2743200" cy="548640"/>
-          </a:xfrm>
-          <a:prstGeom prst="rect">
-            <a:avLst/>
-          </a:prstGeom>
-          <a:noFill/>
-        </p:spPr>
-        <p:txBody>
-          <a:bodyPr wrap="square" anchor="t" lIns="0" rIns="0" tIns="0" bIns="0">
-            <a:spAutoFit/>
-          </a:bodyPr>
-          <a:lstStyle/>
-          <a:p>
-            <a:pPr algn="l">
-              <a:spcBef>
-                <a:spcPts val="0"/>
-              </a:spcBef>
-              <a:spcAft>
-                <a:spcPts val="400"/>
-              </a:spcAft>
-            </a:pPr>
-            <a:r>
-              <a:rPr sz="1900" b="1" i="0">
-                <a:solidFill>
-                  <a:srgbClr val="FFFFFF"/>
-                </a:solidFill>
-                <a:latin typeface="Georgia"/>
-              </a:rPr>
-              <a:t>A working tool</a:t>
-            </a:r>
-          </a:p>
-        </p:txBody>
-      </p:sp>
-      <p:sp>
-        <p:nvSpPr>
-          <p:cNvPr id="8" name="TextBox 7"/>
-          <p:cNvSpPr txBox="1"/>
-          <p:nvPr/>
-        </p:nvSpPr>
-        <p:spPr>
-          <a:xfrm>
-            <a:off x="1188720" y="3520440"/>
-            <a:ext cx="2697480" cy="1097280"/>
-          </a:xfrm>
-          <a:prstGeom prst="rect">
-            <a:avLst/>
-          </a:prstGeom>
-          <a:noFill/>
-        </p:spPr>
-        <p:txBody>
-          <a:bodyPr wrap="square" anchor="t" lIns="0" rIns="0" tIns="0" bIns="0">
-            <a:spAutoFit/>
-          </a:bodyPr>
-          <a:lstStyle/>
-          <a:p>
-            <a:pPr algn="l">
-              <a:spcBef>
-                <a:spcPts val="0"/>
-              </a:spcBef>
-              <a:spcAft>
-                <a:spcPts val="400"/>
-              </a:spcAft>
-            </a:pPr>
-            <a:r>
-              <a:rPr sz="1400" b="0" i="0">
-                <a:solidFill>
-                  <a:srgbClr val="94A3B8"/>
-                </a:solidFill>
-                <a:latin typeface="Calibri"/>
-              </a:rPr>
-              <a:t>An open-source, self-hostable USD asset pipeline built for small teams.</a:t>
-            </a:r>
-          </a:p>
-        </p:txBody>
-      </p:sp>
-      <p:sp>
-        <p:nvSpPr>
-          <p:cNvPr id="9" name="Rounded Rectangle 8"/>
-          <p:cNvSpPr/>
-          <p:nvPr/>
-        </p:nvSpPr>
-        <p:spPr>
-          <a:xfrm>
-            <a:off x="4434840" y="2286000"/>
-            <a:ext cx="3419856" cy="2468880"/>
-          </a:xfrm>
-          <a:prstGeom prst="roundRect">
-            <a:avLst/>
-          </a:prstGeom>
-          <a:solidFill>
-            <a:srgbClr val="1A2540"/>
-          </a:solidFill>
-          <a:ln>
-            <a:noFill/>
-          </a:ln>
-          <a:effectLst/>
-        </p:spPr>
-        <p:style>
-          <a:lnRef idx="1">
-            <a:schemeClr val="accent1"/>
-          </a:lnRef>
-          <a:fillRef idx="3">
-            <a:schemeClr val="accent1"/>
-          </a:fillRef>
-          <a:effectRef idx="2">
-            <a:schemeClr val="accent1"/>
-          </a:effectRef>
-          <a:fontRef idx="minor">
-            <a:schemeClr val="lt1"/>
-          </a:fontRef>
-        </p:style>
-        <p:txBody>
-          <a:bodyPr rtlCol="0" anchor="ctr"/>
-          <a:lstStyle/>
-          <a:p>
-            <a:pPr algn="ctr"/>
-          </a:p>
-        </p:txBody>
-      </p:sp>
-      <p:sp>
-        <p:nvSpPr>
-          <p:cNvPr id="10" name="Rectangle 9"/>
-          <p:cNvSpPr/>
-          <p:nvPr/>
-        </p:nvSpPr>
-        <p:spPr>
-          <a:xfrm>
-            <a:off x="4800600" y="2651760"/>
-            <a:ext cx="457200" cy="109728"/>
-          </a:xfrm>
-          <a:prstGeom prst="rect">
-            <a:avLst/>
-          </a:prstGeom>
-          <a:solidFill>
-            <a:srgbClr val="14B8A6"/>
-          </a:solidFill>
-          <a:ln>
-            <a:noFill/>
-          </a:ln>
-          <a:effectLst/>
-        </p:spPr>
-        <p:style>
-          <a:lnRef idx="1">
-            <a:schemeClr val="accent1"/>
-          </a:lnRef>
-          <a:fillRef idx="3">
-            <a:schemeClr val="accent1"/>
-          </a:fillRef>
-          <a:effectRef idx="2">
-            <a:schemeClr val="accent1"/>
-          </a:effectRef>
-          <a:fontRef idx="minor">
-            <a:schemeClr val="lt1"/>
-          </a:fontRef>
-        </p:style>
-        <p:txBody>
-          <a:bodyPr rtlCol="0" anchor="ctr"/>
-          <a:lstStyle/>
-          <a:p>
-            <a:pPr algn="ctr"/>
-          </a:p>
-        </p:txBody>
-      </p:sp>
-      <p:sp>
-        <p:nvSpPr>
-          <p:cNvPr id="11" name="TextBox 10"/>
-          <p:cNvSpPr txBox="1"/>
-          <p:nvPr/>
-        </p:nvSpPr>
-        <p:spPr>
-          <a:xfrm>
-            <a:off x="4800600" y="2971800"/>
-            <a:ext cx="2743200" cy="548640"/>
-          </a:xfrm>
-          <a:prstGeom prst="rect">
-            <a:avLst/>
-          </a:prstGeom>
-          <a:noFill/>
-        </p:spPr>
-        <p:txBody>
-          <a:bodyPr wrap="square" anchor="t" lIns="0" rIns="0" tIns="0" bIns="0">
-            <a:spAutoFit/>
-          </a:bodyPr>
-          <a:lstStyle/>
-          <a:p>
-            <a:pPr algn="l">
-              <a:spcBef>
-                <a:spcPts val="0"/>
-              </a:spcBef>
-              <a:spcAft>
-                <a:spcPts val="400"/>
-              </a:spcAft>
-            </a:pPr>
-            <a:r>
-              <a:rPr sz="1900" b="1" i="0">
-                <a:solidFill>
-                  <a:srgbClr val="FFFFFF"/>
-                </a:solidFill>
-                <a:latin typeface="Georgia"/>
-              </a:rPr>
-              <a:t>A design analysis</a:t>
-            </a:r>
-          </a:p>
-        </p:txBody>
-      </p:sp>
-      <p:sp>
-        <p:nvSpPr>
-          <p:cNvPr id="12" name="TextBox 11"/>
-          <p:cNvSpPr txBox="1"/>
-          <p:nvPr/>
-        </p:nvSpPr>
-        <p:spPr>
-          <a:xfrm>
-            <a:off x="4800600" y="3520440"/>
-            <a:ext cx="2697480" cy="1097280"/>
-          </a:xfrm>
-          <a:prstGeom prst="rect">
-            <a:avLst/>
-          </a:prstGeom>
-          <a:noFill/>
-        </p:spPr>
-        <p:txBody>
-          <a:bodyPr wrap="square" anchor="t" lIns="0" rIns="0" tIns="0" bIns="0">
-            <a:spAutoFit/>
-          </a:bodyPr>
-          <a:lstStyle/>
-          <a:p>
-            <a:pPr algn="l">
-              <a:spcBef>
-                <a:spcPts val="0"/>
-              </a:spcBef>
-              <a:spcAft>
-                <a:spcPts val="400"/>
-              </a:spcAft>
-            </a:pPr>
-            <a:r>
-              <a:rPr sz="1400" b="0" i="0">
-                <a:solidFill>
-                  <a:srgbClr val="94A3B8"/>
-                </a:solidFill>
-                <a:latin typeface="Calibri"/>
-              </a:rPr>
-              <a:t>What a minimal USD pipeline actually requires, grounded in a review of existing systems.</a:t>
-            </a:r>
-          </a:p>
-        </p:txBody>
-      </p:sp>
-      <p:sp>
-        <p:nvSpPr>
-          <p:cNvPr id="13" name="Rounded Rectangle 12"/>
-          <p:cNvSpPr/>
-          <p:nvPr/>
-        </p:nvSpPr>
-        <p:spPr>
-          <a:xfrm>
-            <a:off x="8046720" y="2286000"/>
-            <a:ext cx="3419856" cy="2468880"/>
-          </a:xfrm>
-          <a:prstGeom prst="roundRect">
-            <a:avLst/>
-          </a:prstGeom>
-          <a:solidFill>
-            <a:srgbClr val="1A2540"/>
-          </a:solidFill>
-          <a:ln>
-            <a:noFill/>
-          </a:ln>
-          <a:effectLst/>
-        </p:spPr>
-        <p:style>
-          <a:lnRef idx="1">
-            <a:schemeClr val="accent1"/>
-          </a:lnRef>
-          <a:fillRef idx="3">
-            <a:schemeClr val="accent1"/>
-          </a:fillRef>
-          <a:effectRef idx="2">
-            <a:schemeClr val="accent1"/>
-          </a:effectRef>
-          <a:fontRef idx="minor">
-            <a:schemeClr val="lt1"/>
-          </a:fontRef>
-        </p:style>
-        <p:txBody>
-          <a:bodyPr rtlCol="0" anchor="ctr"/>
-          <a:lstStyle/>
-          <a:p>
-            <a:pPr algn="ctr"/>
-          </a:p>
-        </p:txBody>
-      </p:sp>
-      <p:sp>
-        <p:nvSpPr>
-          <p:cNvPr id="14" name="Rectangle 13"/>
-          <p:cNvSpPr/>
-          <p:nvPr/>
-        </p:nvSpPr>
-        <p:spPr>
-          <a:xfrm>
-            <a:off x="8412480" y="2651760"/>
-            <a:ext cx="457200" cy="109728"/>
-          </a:xfrm>
-          <a:prstGeom prst="rect">
-            <a:avLst/>
-          </a:prstGeom>
-          <a:solidFill>
-            <a:srgbClr val="14B8A6"/>
-          </a:solidFill>
-          <a:ln>
-            <a:noFill/>
-          </a:ln>
-          <a:effectLst/>
-        </p:spPr>
-        <p:style>
-          <a:lnRef idx="1">
-            <a:schemeClr val="accent1"/>
-          </a:lnRef>
-          <a:fillRef idx="3">
-            <a:schemeClr val="accent1"/>
-          </a:fillRef>
-          <a:effectRef idx="2">
-            <a:schemeClr val="accent1"/>
-          </a:effectRef>
-          <a:fontRef idx="minor">
-            <a:schemeClr val="lt1"/>
-          </a:fontRef>
-        </p:style>
-        <p:txBody>
-          <a:bodyPr rtlCol="0" anchor="ctr"/>
-          <a:lstStyle/>
-          <a:p>
-            <a:pPr algn="ctr"/>
-          </a:p>
-        </p:txBody>
-      </p:sp>
-      <p:sp>
-        <p:nvSpPr>
-          <p:cNvPr id="15" name="TextBox 14"/>
-          <p:cNvSpPr txBox="1"/>
-          <p:nvPr/>
-        </p:nvSpPr>
-        <p:spPr>
-          <a:xfrm>
-            <a:off x="8412480" y="2971800"/>
-            <a:ext cx="2743200" cy="548640"/>
-          </a:xfrm>
-          <a:prstGeom prst="rect">
-            <a:avLst/>
-          </a:prstGeom>
-          <a:noFill/>
-        </p:spPr>
-        <p:txBody>
-          <a:bodyPr wrap="square" anchor="t" lIns="0" rIns="0" tIns="0" bIns="0">
-            <a:spAutoFit/>
-          </a:bodyPr>
-          <a:lstStyle/>
-          <a:p>
-            <a:pPr algn="l">
-              <a:spcBef>
-                <a:spcPts val="0"/>
-              </a:spcBef>
-              <a:spcAft>
-                <a:spcPts val="400"/>
-              </a:spcAft>
-            </a:pPr>
-            <a:r>
-              <a:rPr sz="1900" b="1" i="0">
-                <a:solidFill>
-                  <a:srgbClr val="FFFFFF"/>
-                </a:solidFill>
-                <a:latin typeface="Georgia"/>
-              </a:rPr>
-              <a:t>Empirical evidence</a:t>
-            </a:r>
-          </a:p>
-        </p:txBody>
-      </p:sp>
-      <p:sp>
-        <p:nvSpPr>
-          <p:cNvPr id="16" name="TextBox 15"/>
-          <p:cNvSpPr txBox="1"/>
-          <p:nvPr/>
-        </p:nvSpPr>
-        <p:spPr>
-          <a:xfrm>
-            <a:off x="8412480" y="3520440"/>
-            <a:ext cx="2697480" cy="1097280"/>
-          </a:xfrm>
-          <a:prstGeom prst="rect">
-            <a:avLst/>
-          </a:prstGeom>
-          <a:noFill/>
-        </p:spPr>
-        <p:txBody>
-          <a:bodyPr wrap="square" anchor="t" lIns="0" rIns="0" tIns="0" bIns="0">
-            <a:spAutoFit/>
-          </a:bodyPr>
-          <a:lstStyle/>
-          <a:p>
-            <a:pPr algn="l">
-              <a:spcBef>
-                <a:spcPts val="0"/>
-              </a:spcBef>
-              <a:spcAft>
-                <a:spcPts val="400"/>
-              </a:spcAft>
-            </a:pPr>
-            <a:r>
-              <a:rPr sz="1400" b="0" i="0">
-                <a:solidFill>
-                  <a:srgbClr val="94A3B8"/>
-                </a:solidFill>
-                <a:latin typeface="Calibri"/>
-              </a:rPr>
-              <a:t>Whether it improves usability and reduces errors vs manual workflows.</a:t>
-            </a:r>
-          </a:p>
-        </p:txBody>
-      </p:sp>
-      <p:sp>
-        <p:nvSpPr>
-          <p:cNvPr id="17" name="TextBox 16"/>
-          <p:cNvSpPr txBox="1"/>
-          <p:nvPr/>
-        </p:nvSpPr>
-        <p:spPr>
-          <a:xfrm>
-            <a:off x="822960" y="5303520"/>
-            <a:ext cx="10058400" cy="548640"/>
-          </a:xfrm>
-          <a:prstGeom prst="rect">
-            <a:avLst/>
-          </a:prstGeom>
-          <a:noFill/>
-        </p:spPr>
-        <p:txBody>
-          <a:bodyPr wrap="square" anchor="t" lIns="0" rIns="0" tIns="0" bIns="0">
-            <a:spAutoFit/>
-          </a:bodyPr>
-          <a:lstStyle/>
-          <a:p>
-            <a:pPr algn="l">
-              <a:spcBef>
-                <a:spcPts val="0"/>
-              </a:spcBef>
-              <a:spcAft>
-                <a:spcPts val="400"/>
-              </a:spcAft>
-            </a:pPr>
-            <a:r>
-              <a:rPr sz="2000" b="1" i="0">
-                <a:solidFill>
-                  <a:srgbClr val="FFFFFF"/>
-                </a:solidFill>
-                <a:latin typeface="Georgia"/>
-              </a:rPr>
-              <a:t>Thank you</a:t>
-            </a:r>
-            <a:r>
-              <a:rPr sz="1600" b="0" i="1">
-                <a:solidFill>
-                  <a:srgbClr val="94A3B8"/>
-                </a:solidFill>
-                <a:latin typeface="Calibri"/>
-              </a:rPr>
-              <a:t>    Questions welcome.</a:t>
+              <a:t>Steve Mathew Varghese  ·  Supervisor: [TBC]  ·  [Date]</a:t>
             </a:r>
           </a:p>
         </p:txBody>
@@ -4219,7 +3503,7 @@
         <p:spPr>
           <a:xfrm>
             <a:off x="822960" y="640080"/>
-            <a:ext cx="5486400" cy="274320"/>
+            <a:ext cx="7315200" cy="274320"/>
           </a:xfrm>
           <a:prstGeom prst="rect">
             <a:avLst/>
@@ -4283,7 +3567,7 @@
               </a:spcAft>
             </a:pPr>
             <a:r>
-              <a:rPr sz="3200" b="1" i="0">
+              <a:rPr sz="3100" b="1" i="0">
                 <a:solidFill>
                   <a:srgbClr val="0F172A"/>
                 </a:solidFill>
@@ -4303,7 +3587,7 @@
         <p:spPr>
           <a:xfrm>
             <a:off x="822960" y="1920240"/>
-            <a:ext cx="3419856" cy="3383280"/>
+            <a:ext cx="3419856" cy="3291840"/>
           </a:xfrm>
           <a:prstGeom prst="roundRect">
             <a:avLst/>
@@ -4318,7 +3602,7 @@
           <a:effectLst>
             <a:outerShdw blurRad="90000" dist="40000" dir="5400000" rotWithShape="0">
               <a:srgbClr val="0F172A">
-                <a:alpha val="14000"/>
+                <a:alpha val="16000"/>
               </a:srgbClr>
             </a:outerShdw>
           </a:effectLst>
@@ -4440,7 +3724,7 @@
         <p:spPr>
           <a:xfrm>
             <a:off x="1188720" y="3429000"/>
-            <a:ext cx="2697480" cy="1737360"/>
+            <a:ext cx="2697480" cy="1645920"/>
           </a:xfrm>
           <a:prstGeom prst="rect">
             <a:avLst/>
@@ -4468,7 +3752,7 @@
                 </a:solidFill>
                 <a:latin typeface="Calibri"/>
               </a:rPr>
-              <a:t>Heavyweight systems — ShotGrid/Flow, Perforce, proprietary asset managers. Powerful, but costly and assume dedicated pipeline staff.</a:t>
+              <a:t>Heavyweight systems (ShotGrid, Perforce, proprietary tools). Powerful, but costly and assume dedicated pipeline staff.</a:t>
             </a:r>
           </a:p>
         </p:txBody>
@@ -4482,7 +3766,7 @@
         <p:spPr>
           <a:xfrm>
             <a:off x="4434840" y="1920240"/>
-            <a:ext cx="3419856" cy="3383280"/>
+            <a:ext cx="3419856" cy="3291840"/>
           </a:xfrm>
           <a:prstGeom prst="roundRect">
             <a:avLst/>
@@ -4497,7 +3781,7 @@
           <a:effectLst>
             <a:outerShdw blurRad="90000" dist="40000" dir="5400000" rotWithShape="0">
               <a:srgbClr val="0F172A">
-                <a:alpha val="14000"/>
+                <a:alpha val="16000"/>
               </a:srgbClr>
             </a:outerShdw>
           </a:effectLst>
@@ -4619,7 +3903,7 @@
         <p:spPr>
           <a:xfrm>
             <a:off x="4800600" y="3429000"/>
-            <a:ext cx="2697480" cy="1737360"/>
+            <a:ext cx="2697480" cy="1645920"/>
           </a:xfrm>
           <a:prstGeom prst="rect">
             <a:avLst/>
@@ -4647,7 +3931,7 @@
                 </a:solidFill>
                 <a:latin typeface="Calibri"/>
               </a:rPr>
-              <a:t>Fall back to manual file-sharing: cloud drives, naming conventions, messaging. No versioning, no “approved” state, no cross-app consistency.</a:t>
+              <a:t>Fall back to manual file-sharing: cloud drives, naming conventions, messaging. No versioning, no “approved” state.</a:t>
             </a:r>
           </a:p>
         </p:txBody>
@@ -4661,7 +3945,7 @@
         <p:spPr>
           <a:xfrm>
             <a:off x="8046720" y="1920240"/>
-            <a:ext cx="3419856" cy="3383280"/>
+            <a:ext cx="3419856" cy="3291840"/>
           </a:xfrm>
           <a:prstGeom prst="roundRect">
             <a:avLst/>
@@ -4676,7 +3960,7 @@
           <a:effectLst>
             <a:outerShdw blurRad="90000" dist="40000" dir="5400000" rotWithShape="0">
               <a:srgbClr val="0F172A">
-                <a:alpha val="14000"/>
+                <a:alpha val="16000"/>
               </a:srgbClr>
             </a:outerShdw>
           </a:effectLst>
@@ -4798,7 +4082,7 @@
         <p:spPr>
           <a:xfrm>
             <a:off x="8412480" y="3429000"/>
-            <a:ext cx="2697480" cy="1737360"/>
+            <a:ext cx="2697480" cy="1645920"/>
           </a:xfrm>
           <a:prstGeom prst="rect">
             <a:avLst/>
@@ -4826,7 +4110,7 @@
                 </a:solidFill>
                 <a:latin typeface="Calibri"/>
               </a:rPr>
-              <a:t>Wrong versions used, missing textures, overwritten work, time lost chasing the latest file. Errors that a pipeline is meant to prevent.</a:t>
+              <a:t>Wrong versions used, missing textures, overwritten work, time lost chasing the latest file — the errors a pipeline prevents.</a:t>
             </a:r>
           </a:p>
         </p:txBody>
@@ -4901,8 +4185,8 @@
         </p:nvSpPr>
         <p:spPr>
           <a:xfrm>
-            <a:off x="822960" y="640080"/>
-            <a:ext cx="5486400" cy="274320"/>
+            <a:off x="822960" y="548640"/>
+            <a:ext cx="7315200" cy="274320"/>
           </a:xfrm>
           <a:prstGeom prst="rect">
             <a:avLst/>
@@ -4943,8 +4227,8 @@
         </p:nvSpPr>
         <p:spPr>
           <a:xfrm>
-            <a:off x="822960" y="960120"/>
-            <a:ext cx="10515600" cy="731520"/>
+            <a:off x="822960" y="868680"/>
+            <a:ext cx="10515600" cy="640080"/>
           </a:xfrm>
           <a:prstGeom prst="rect">
             <a:avLst/>
@@ -4966,33 +4250,33 @@
               </a:spcAft>
             </a:pPr>
             <a:r>
-              <a:rPr sz="3000" b="1" i="0">
+              <a:rPr sz="3100" b="1" i="0">
                 <a:solidFill>
                   <a:srgbClr val="0F172A"/>
                 </a:solidFill>
                 <a:latin typeface="Georgia"/>
               </a:rPr>
-              <a:t>I built a prototype — and it showed me the limits</a:t>
-            </a:r>
-          </a:p>
-        </p:txBody>
-      </p:sp>
-      <p:sp>
-        <p:nvSpPr>
-          <p:cNvPr id="5" name="Rounded Rectangle 4"/>
+              <a:t>I built a working prototype</a:t>
+            </a:r>
+          </a:p>
+        </p:txBody>
+      </p:sp>
+      <p:sp>
+        <p:nvSpPr>
+          <p:cNvPr id="5" name="Rectangle 4"/>
           <p:cNvSpPr/>
           <p:nvPr/>
         </p:nvSpPr>
         <p:spPr>
           <a:xfrm>
-            <a:off x="822960" y="1965960"/>
-            <a:ext cx="5029200" cy="3657600"/>
-          </a:xfrm>
-          <a:prstGeom prst="roundRect">
+            <a:off x="777240" y="2115851"/>
+            <a:ext cx="3364992" cy="2534856"/>
+          </a:xfrm>
+          <a:prstGeom prst="rect">
             <a:avLst/>
           </a:prstGeom>
           <a:solidFill>
-            <a:srgbClr val="0E1628"/>
+            <a:srgbClr val="FFFFFF"/>
           </a:solidFill>
           <a:ln>
             <a:noFill/>
@@ -5001,7 +4285,7 @@
           <a:effectLst>
             <a:outerShdw blurRad="90000" dist="40000" dir="5400000" rotWithShape="0">
               <a:srgbClr val="0F172A">
-                <a:alpha val="14000"/>
+                <a:alpha val="16000"/>
               </a:srgbClr>
             </a:outerShdw>
           </a:effectLst>
@@ -5028,16 +4312,40 @@
           </a:p>
         </p:txBody>
       </p:sp>
-      <p:sp>
-        <p:nvSpPr>
-          <p:cNvPr id="6" name="TextBox 5"/>
+      <p:pic>
+        <p:nvPicPr>
+          <p:cNvPr id="6" name="Picture 5" descr="login.png"/>
+          <p:cNvPicPr>
+            <a:picLocks noChangeAspect="1"/>
+          </p:cNvPicPr>
+          <p:nvPr/>
+        </p:nvPicPr>
+        <p:blipFill>
+          <a:blip r:embed="rId2"/>
+          <a:stretch>
+            <a:fillRect/>
+          </a:stretch>
+        </p:blipFill>
+        <p:spPr>
+          <a:xfrm>
+            <a:off x="822960" y="2161571"/>
+            <a:ext cx="3273552" cy="2443416"/>
+          </a:xfrm>
+          <a:prstGeom prst="rect">
+            <a:avLst/>
+          </a:prstGeom>
+        </p:spPr>
+      </p:pic>
+      <p:sp>
+        <p:nvSpPr>
+          <p:cNvPr id="7" name="TextBox 6"/>
           <p:cNvSpPr txBox="1"/>
           <p:nvPr/>
         </p:nvSpPr>
         <p:spPr>
           <a:xfrm>
-            <a:off x="1188720" y="2286000"/>
-            <a:ext cx="4114800" cy="274320"/>
+            <a:off x="822960" y="5074920"/>
+            <a:ext cx="3273552" cy="320040"/>
           </a:xfrm>
           <a:prstGeom prst="rect">
             <a:avLst/>
@@ -5046,6 +4354,326 @@
         </p:spPr>
         <p:txBody>
           <a:bodyPr wrap="square" anchor="t" lIns="0" rIns="0" tIns="0" bIns="0">
+            <a:spAutoFit/>
+          </a:bodyPr>
+          <a:lstStyle/>
+          <a:p>
+            <a:pPr algn="ctr">
+              <a:spcBef>
+                <a:spcPts val="0"/>
+              </a:spcBef>
+              <a:spcAft>
+                <a:spcPts val="400"/>
+              </a:spcAft>
+            </a:pPr>
+            <a:r>
+              <a:rPr sz="1250" b="1" i="0">
+                <a:solidFill>
+                  <a:srgbClr val="64748B"/>
+                </a:solidFill>
+                <a:latin typeface="Calibri"/>
+              </a:rPr>
+              <a:t>Login &amp; accounts</a:t>
+            </a:r>
+          </a:p>
+        </p:txBody>
+      </p:sp>
+      <p:sp>
+        <p:nvSpPr>
+          <p:cNvPr id="8" name="Rectangle 7"/>
+          <p:cNvSpPr/>
+          <p:nvPr/>
+        </p:nvSpPr>
+        <p:spPr>
+          <a:xfrm>
+            <a:off x="4550109" y="1737360"/>
+            <a:ext cx="3097876" cy="3291840"/>
+          </a:xfrm>
+          <a:prstGeom prst="rect">
+            <a:avLst/>
+          </a:prstGeom>
+          <a:solidFill>
+            <a:srgbClr val="FFFFFF"/>
+          </a:solidFill>
+          <a:ln>
+            <a:noFill/>
+          </a:ln>
+          <a:effectLst/>
+          <a:effectLst>
+            <a:outerShdw blurRad="90000" dist="40000" dir="5400000" rotWithShape="0">
+              <a:srgbClr val="0F172A">
+                <a:alpha val="16000"/>
+              </a:srgbClr>
+            </a:outerShdw>
+          </a:effectLst>
+        </p:spPr>
+        <p:style>
+          <a:lnRef idx="1">
+            <a:schemeClr val="accent1"/>
+          </a:lnRef>
+          <a:fillRef idx="3">
+            <a:schemeClr val="accent1"/>
+          </a:fillRef>
+          <a:effectRef idx="2">
+            <a:schemeClr val="accent1"/>
+          </a:effectRef>
+          <a:fontRef idx="minor">
+            <a:schemeClr val="lt1"/>
+          </a:fontRef>
+        </p:style>
+        <p:txBody>
+          <a:bodyPr rtlCol="0" anchor="ctr"/>
+          <a:lstStyle/>
+          <a:p>
+            <a:pPr algn="ctr"/>
+          </a:p>
+        </p:txBody>
+      </p:sp>
+      <p:pic>
+        <p:nvPicPr>
+          <p:cNvPr id="9" name="Picture 8" descr="users.png"/>
+          <p:cNvPicPr>
+            <a:picLocks noChangeAspect="1"/>
+          </p:cNvPicPr>
+          <p:nvPr/>
+        </p:nvPicPr>
+        <p:blipFill>
+          <a:blip r:embed="rId3"/>
+          <a:stretch>
+            <a:fillRect/>
+          </a:stretch>
+        </p:blipFill>
+        <p:spPr>
+          <a:xfrm>
+            <a:off x="4595829" y="1783080"/>
+            <a:ext cx="3006436" cy="3200400"/>
+          </a:xfrm>
+          <a:prstGeom prst="rect">
+            <a:avLst/>
+          </a:prstGeom>
+        </p:spPr>
+      </p:pic>
+      <p:sp>
+        <p:nvSpPr>
+          <p:cNvPr id="10" name="TextBox 9"/>
+          <p:cNvSpPr txBox="1"/>
+          <p:nvPr/>
+        </p:nvSpPr>
+        <p:spPr>
+          <a:xfrm>
+            <a:off x="4462272" y="5074920"/>
+            <a:ext cx="3273552" cy="320040"/>
+          </a:xfrm>
+          <a:prstGeom prst="rect">
+            <a:avLst/>
+          </a:prstGeom>
+          <a:noFill/>
+        </p:spPr>
+        <p:txBody>
+          <a:bodyPr wrap="square" anchor="t" lIns="0" rIns="0" tIns="0" bIns="0">
+            <a:spAutoFit/>
+          </a:bodyPr>
+          <a:lstStyle/>
+          <a:p>
+            <a:pPr algn="ctr">
+              <a:spcBef>
+                <a:spcPts val="0"/>
+              </a:spcBef>
+              <a:spcAft>
+                <a:spcPts val="400"/>
+              </a:spcAft>
+            </a:pPr>
+            <a:r>
+              <a:rPr sz="1250" b="1" i="0">
+                <a:solidFill>
+                  <a:srgbClr val="64748B"/>
+                </a:solidFill>
+                <a:latin typeface="Calibri"/>
+              </a:rPr>
+              <a:t>Multi-user management</a:t>
+            </a:r>
+          </a:p>
+        </p:txBody>
+      </p:sp>
+      <p:sp>
+        <p:nvSpPr>
+          <p:cNvPr id="11" name="Rectangle 10"/>
+          <p:cNvSpPr/>
+          <p:nvPr/>
+        </p:nvSpPr>
+        <p:spPr>
+          <a:xfrm>
+            <a:off x="8194982" y="1737360"/>
+            <a:ext cx="3086755" cy="3291840"/>
+          </a:xfrm>
+          <a:prstGeom prst="rect">
+            <a:avLst/>
+          </a:prstGeom>
+          <a:solidFill>
+            <a:srgbClr val="FFFFFF"/>
+          </a:solidFill>
+          <a:ln>
+            <a:noFill/>
+          </a:ln>
+          <a:effectLst/>
+          <a:effectLst>
+            <a:outerShdw blurRad="90000" dist="40000" dir="5400000" rotWithShape="0">
+              <a:srgbClr val="0F172A">
+                <a:alpha val="16000"/>
+              </a:srgbClr>
+            </a:outerShdw>
+          </a:effectLst>
+        </p:spPr>
+        <p:style>
+          <a:lnRef idx="1">
+            <a:schemeClr val="accent1"/>
+          </a:lnRef>
+          <a:fillRef idx="3">
+            <a:schemeClr val="accent1"/>
+          </a:fillRef>
+          <a:effectRef idx="2">
+            <a:schemeClr val="accent1"/>
+          </a:effectRef>
+          <a:fontRef idx="minor">
+            <a:schemeClr val="lt1"/>
+          </a:fontRef>
+        </p:style>
+        <p:txBody>
+          <a:bodyPr rtlCol="0" anchor="ctr"/>
+          <a:lstStyle/>
+          <a:p>
+            <a:pPr algn="ctr"/>
+          </a:p>
+        </p:txBody>
+      </p:sp>
+      <p:pic>
+        <p:nvPicPr>
+          <p:cNvPr id="12" name="Picture 11" descr="server.png"/>
+          <p:cNvPicPr>
+            <a:picLocks noChangeAspect="1"/>
+          </p:cNvPicPr>
+          <p:nvPr/>
+        </p:nvPicPr>
+        <p:blipFill>
+          <a:blip r:embed="rId4"/>
+          <a:stretch>
+            <a:fillRect/>
+          </a:stretch>
+        </p:blipFill>
+        <p:spPr>
+          <a:xfrm>
+            <a:off x="8240702" y="1783080"/>
+            <a:ext cx="2995315" cy="3200400"/>
+          </a:xfrm>
+          <a:prstGeom prst="rect">
+            <a:avLst/>
+          </a:prstGeom>
+        </p:spPr>
+      </p:pic>
+      <p:sp>
+        <p:nvSpPr>
+          <p:cNvPr id="13" name="TextBox 12"/>
+          <p:cNvSpPr txBox="1"/>
+          <p:nvPr/>
+        </p:nvSpPr>
+        <p:spPr>
+          <a:xfrm>
+            <a:off x="8101583" y="5074920"/>
+            <a:ext cx="3273552" cy="320040"/>
+          </a:xfrm>
+          <a:prstGeom prst="rect">
+            <a:avLst/>
+          </a:prstGeom>
+          <a:noFill/>
+        </p:spPr>
+        <p:txBody>
+          <a:bodyPr wrap="square" anchor="t" lIns="0" rIns="0" tIns="0" bIns="0">
+            <a:spAutoFit/>
+          </a:bodyPr>
+          <a:lstStyle/>
+          <a:p>
+            <a:pPr algn="ctr">
+              <a:spcBef>
+                <a:spcPts val="0"/>
+              </a:spcBef>
+              <a:spcAft>
+                <a:spcPts val="400"/>
+              </a:spcAft>
+            </a:pPr>
+            <a:r>
+              <a:rPr sz="1250" b="1" i="0">
+                <a:solidFill>
+                  <a:srgbClr val="64748B"/>
+                </a:solidFill>
+                <a:latin typeface="Calibri"/>
+              </a:rPr>
+              <a:t>Server control</a:t>
+            </a:r>
+          </a:p>
+        </p:txBody>
+      </p:sp>
+      <p:sp>
+        <p:nvSpPr>
+          <p:cNvPr id="14" name="Rounded Rectangle 13"/>
+          <p:cNvSpPr/>
+          <p:nvPr/>
+        </p:nvSpPr>
+        <p:spPr>
+          <a:xfrm>
+            <a:off x="822960" y="5623560"/>
+            <a:ext cx="10543032" cy="822960"/>
+          </a:xfrm>
+          <a:prstGeom prst="roundRect">
+            <a:avLst/>
+          </a:prstGeom>
+          <a:solidFill>
+            <a:srgbClr val="0E1628"/>
+          </a:solidFill>
+          <a:ln>
+            <a:noFill/>
+          </a:ln>
+          <a:effectLst/>
+        </p:spPr>
+        <p:style>
+          <a:lnRef idx="1">
+            <a:schemeClr val="accent1"/>
+          </a:lnRef>
+          <a:fillRef idx="3">
+            <a:schemeClr val="accent1"/>
+          </a:fillRef>
+          <a:effectRef idx="2">
+            <a:schemeClr val="accent1"/>
+          </a:effectRef>
+          <a:fontRef idx="minor">
+            <a:schemeClr val="lt1"/>
+          </a:fontRef>
+        </p:style>
+        <p:txBody>
+          <a:bodyPr rtlCol="0" anchor="ctr"/>
+          <a:lstStyle/>
+          <a:p>
+            <a:pPr algn="ctr"/>
+          </a:p>
+        </p:txBody>
+      </p:sp>
+      <p:sp>
+        <p:nvSpPr>
+          <p:cNvPr id="15" name="TextBox 14"/>
+          <p:cNvSpPr txBox="1"/>
+          <p:nvPr/>
+        </p:nvSpPr>
+        <p:spPr>
+          <a:xfrm>
+            <a:off x="1143000" y="5623560"/>
+            <a:ext cx="9966960" cy="822960"/>
+          </a:xfrm>
+          <a:prstGeom prst="rect">
+            <a:avLst/>
+          </a:prstGeom>
+          <a:noFill/>
+        </p:spPr>
+        <p:txBody>
+          <a:bodyPr wrap="square" anchor="ctr" lIns="0" rIns="0" tIns="0" bIns="0">
             <a:spAutoFit/>
           </a:bodyPr>
           <a:lstStyle/>
@@ -5059,477 +4687,22 @@
               </a:spcAft>
             </a:pPr>
             <a:r>
-              <a:rPr sz="1200" b="1" i="0" spc="200">
+              <a:rPr sz="1450" b="0" i="0">
+                <a:solidFill>
+                  <a:srgbClr val="E2E8F0"/>
+                </a:solidFill>
+                <a:latin typeface="Calibri"/>
+              </a:rPr>
+              <a:t>FastAPI + MongoDB server, PySide6 GUI, Maya shelf tools — it works, but </a:t>
+            </a:r>
+            <a:r>
+              <a:rPr sz="1450" b="1" i="0">
                 <a:solidFill>
                   <a:srgbClr val="2DD4BF"/>
                 </a:solidFill>
-                <a:latin typeface="Consolas"/>
-              </a:rPr>
-              <a:t>WHAT WORKS</a:t>
-            </a:r>
-          </a:p>
-        </p:txBody>
-      </p:sp>
-      <p:sp>
-        <p:nvSpPr>
-          <p:cNvPr id="7" name="TextBox 6"/>
-          <p:cNvSpPr txBox="1"/>
-          <p:nvPr/>
-        </p:nvSpPr>
-        <p:spPr>
-          <a:xfrm>
-            <a:off x="1188720" y="2743200"/>
-            <a:ext cx="4389120" cy="2743200"/>
-          </a:xfrm>
-          <a:prstGeom prst="rect">
-            <a:avLst/>
-          </a:prstGeom>
-          <a:noFill/>
-        </p:spPr>
-        <p:txBody>
-          <a:bodyPr wrap="square" lIns="0" rIns="0" tIns="0" bIns="0">
-            <a:spAutoFit/>
-          </a:bodyPr>
-          <a:lstStyle/>
-          <a:p>
-            <a:pPr>
-              <a:spcBef>
-                <a:spcPts val="0"/>
-              </a:spcBef>
-              <a:spcAft>
-                <a:spcPts val="1100"/>
-              </a:spcAft>
-            </a:pPr>
-            <a:r>
-              <a:rPr sz="1500" b="1">
-                <a:solidFill>
-                  <a:srgbClr val="2DD4BF"/>
-                </a:solidFill>
                 <a:latin typeface="Calibri"/>
               </a:rPr>
-              <a:t>—  </a:t>
-            </a:r>
-            <a:r>
-              <a:rPr sz="1500">
-                <a:solidFill>
-                  <a:srgbClr val="E2E8F0"/>
-                </a:solidFill>
-                <a:latin typeface="Calibri"/>
-              </a:rPr>
-              <a:t>FastAPI + MongoDB server, DCC-agnostic</a:t>
-            </a:r>
-          </a:p>
-          <a:p>
-            <a:pPr>
-              <a:spcBef>
-                <a:spcPts val="0"/>
-              </a:spcBef>
-              <a:spcAft>
-                <a:spcPts val="1100"/>
-              </a:spcAft>
-            </a:pPr>
-            <a:r>
-              <a:rPr sz="1500" b="1">
-                <a:solidFill>
-                  <a:srgbClr val="2DD4BF"/>
-                </a:solidFill>
-                <a:latin typeface="Calibri"/>
-              </a:rPr>
-              <a:t>—  </a:t>
-            </a:r>
-            <a:r>
-              <a:rPr sz="1500">
-                <a:solidFill>
-                  <a:srgbClr val="E2E8F0"/>
-                </a:solidFill>
-                <a:latin typeface="Calibri"/>
-              </a:rPr>
-              <a:t>Maya client: upload, approve, import</a:t>
-            </a:r>
-          </a:p>
-          <a:p>
-            <a:pPr>
-              <a:spcBef>
-                <a:spcPts val="0"/>
-              </a:spcBef>
-              <a:spcAft>
-                <a:spcPts val="1100"/>
-              </a:spcAft>
-            </a:pPr>
-            <a:r>
-              <a:rPr sz="1500" b="1">
-                <a:solidFill>
-                  <a:srgbClr val="2DD4BF"/>
-                </a:solidFill>
-                <a:latin typeface="Calibri"/>
-              </a:rPr>
-              <a:t>—  </a:t>
-            </a:r>
-            <a:r>
-              <a:rPr sz="1500">
-                <a:solidFill>
-                  <a:srgbClr val="E2E8F0"/>
-                </a:solidFill>
-                <a:latin typeface="Calibri"/>
-              </a:rPr>
-              <a:t>“Ready” state gates what others pull</a:t>
-            </a:r>
-          </a:p>
-          <a:p>
-            <a:pPr>
-              <a:spcBef>
-                <a:spcPts val="0"/>
-              </a:spcBef>
-              <a:spcAft>
-                <a:spcPts val="1100"/>
-              </a:spcAft>
-            </a:pPr>
-            <a:r>
-              <a:rPr sz="1500" b="1">
-                <a:solidFill>
-                  <a:srgbClr val="2DD4BF"/>
-                </a:solidFill>
-                <a:latin typeface="Calibri"/>
-              </a:rPr>
-              <a:t>—  </a:t>
-            </a:r>
-            <a:r>
-              <a:rPr sz="1500">
-                <a:solidFill>
-                  <a:srgbClr val="E2E8F0"/>
-                </a:solidFill>
-                <a:latin typeface="Calibri"/>
-              </a:rPr>
-              <a:t>Auto front/top thumbnails on publish</a:t>
-            </a:r>
-          </a:p>
-          <a:p>
-            <a:pPr>
-              <a:spcBef>
-                <a:spcPts val="0"/>
-              </a:spcBef>
-              <a:spcAft>
-                <a:spcPts val="1100"/>
-              </a:spcAft>
-            </a:pPr>
-            <a:r>
-              <a:rPr sz="1500" b="1">
-                <a:solidFill>
-                  <a:srgbClr val="2DD4BF"/>
-                </a:solidFill>
-                <a:latin typeface="Calibri"/>
-              </a:rPr>
-              <a:t>—  </a:t>
-            </a:r>
-            <a:r>
-              <a:rPr sz="1500">
-                <a:solidFill>
-                  <a:srgbClr val="E2E8F0"/>
-                </a:solidFill>
-                <a:latin typeface="Calibri"/>
-              </a:rPr>
-              <a:t>PySide6 GUI + automated test suite</a:t>
-            </a:r>
-          </a:p>
-        </p:txBody>
-      </p:sp>
-      <p:sp>
-        <p:nvSpPr>
-          <p:cNvPr id="8" name="Rounded Rectangle 7"/>
-          <p:cNvSpPr/>
-          <p:nvPr/>
-        </p:nvSpPr>
-        <p:spPr>
-          <a:xfrm>
-            <a:off x="6126480" y="1965960"/>
-            <a:ext cx="5212080" cy="3657600"/>
-          </a:xfrm>
-          <a:prstGeom prst="roundRect">
-            <a:avLst/>
-          </a:prstGeom>
-          <a:solidFill>
-            <a:srgbClr val="F1F5F9"/>
-          </a:solidFill>
-          <a:ln>
-            <a:noFill/>
-          </a:ln>
-          <a:effectLst/>
-          <a:effectLst>
-            <a:outerShdw blurRad="90000" dist="40000" dir="5400000" rotWithShape="0">
-              <a:srgbClr val="0F172A">
-                <a:alpha val="14000"/>
-              </a:srgbClr>
-            </a:outerShdw>
-          </a:effectLst>
-        </p:spPr>
-        <p:style>
-          <a:lnRef idx="1">
-            <a:schemeClr val="accent1"/>
-          </a:lnRef>
-          <a:fillRef idx="3">
-            <a:schemeClr val="accent1"/>
-          </a:fillRef>
-          <a:effectRef idx="2">
-            <a:schemeClr val="accent1"/>
-          </a:effectRef>
-          <a:fontRef idx="minor">
-            <a:schemeClr val="lt1"/>
-          </a:fontRef>
-        </p:style>
-        <p:txBody>
-          <a:bodyPr rtlCol="0" anchor="ctr"/>
-          <a:lstStyle/>
-          <a:p>
-            <a:pPr algn="ctr"/>
-          </a:p>
-        </p:txBody>
-      </p:sp>
-      <p:sp>
-        <p:nvSpPr>
-          <p:cNvPr id="9" name="TextBox 8"/>
-          <p:cNvSpPr txBox="1"/>
-          <p:nvPr/>
-        </p:nvSpPr>
-        <p:spPr>
-          <a:xfrm>
-            <a:off x="6492240" y="2286000"/>
-            <a:ext cx="4114800" cy="274320"/>
-          </a:xfrm>
-          <a:prstGeom prst="rect">
-            <a:avLst/>
-          </a:prstGeom>
-          <a:noFill/>
-        </p:spPr>
-        <p:txBody>
-          <a:bodyPr wrap="square" anchor="t" lIns="0" rIns="0" tIns="0" bIns="0">
-            <a:spAutoFit/>
-          </a:bodyPr>
-          <a:lstStyle/>
-          <a:p>
-            <a:pPr algn="l">
-              <a:spcBef>
-                <a:spcPts val="0"/>
-              </a:spcBef>
-              <a:spcAft>
-                <a:spcPts val="400"/>
-              </a:spcAft>
-            </a:pPr>
-            <a:r>
-              <a:rPr sz="1200" b="1" i="0" spc="200">
-                <a:solidFill>
-                  <a:srgbClr val="F59E0B"/>
-                </a:solidFill>
-                <a:latin typeface="Consolas"/>
-              </a:rPr>
-              <a:t>WHAT IT REVEALED</a:t>
-            </a:r>
-          </a:p>
-        </p:txBody>
-      </p:sp>
-      <p:sp>
-        <p:nvSpPr>
-          <p:cNvPr id="10" name="TextBox 9"/>
-          <p:cNvSpPr txBox="1"/>
-          <p:nvPr/>
-        </p:nvSpPr>
-        <p:spPr>
-          <a:xfrm>
-            <a:off x="6492240" y="2743200"/>
-            <a:ext cx="4572000" cy="2743200"/>
-          </a:xfrm>
-          <a:prstGeom prst="rect">
-            <a:avLst/>
-          </a:prstGeom>
-          <a:noFill/>
-        </p:spPr>
-        <p:txBody>
-          <a:bodyPr wrap="square" lIns="0" rIns="0" tIns="0" bIns="0">
-            <a:spAutoFit/>
-          </a:bodyPr>
-          <a:lstStyle/>
-          <a:p>
-            <a:pPr>
-              <a:spcBef>
-                <a:spcPts val="0"/>
-              </a:spcBef>
-              <a:spcAft>
-                <a:spcPts val="1100"/>
-              </a:spcAft>
-            </a:pPr>
-            <a:r>
-              <a:rPr sz="1500" b="1">
-                <a:solidFill>
-                  <a:srgbClr val="F59E0B"/>
-                </a:solidFill>
-                <a:latin typeface="Calibri"/>
-              </a:rPr>
-              <a:t>—  </a:t>
-            </a:r>
-            <a:r>
-              <a:rPr sz="1500" b="1">
-                <a:solidFill>
-                  <a:srgbClr val="0F172A"/>
-                </a:solidFill>
-                <a:latin typeface="Calibri"/>
-              </a:rPr>
-              <a:t>.obj is a dead end — </a:t>
-            </a:r>
-            <a:r>
-              <a:rPr sz="1500">
-                <a:solidFill>
-                  <a:srgbClr val="0F172A"/>
-                </a:solidFill>
-                <a:latin typeface="Calibri"/>
-              </a:rPr>
-              <a:t>no materials, hierarchy, or variants</a:t>
-            </a:r>
-          </a:p>
-          <a:p>
-            <a:pPr>
-              <a:spcBef>
-                <a:spcPts val="0"/>
-              </a:spcBef>
-              <a:spcAft>
-                <a:spcPts val="1100"/>
-              </a:spcAft>
-            </a:pPr>
-            <a:r>
-              <a:rPr sz="1500" b="1">
-                <a:solidFill>
-                  <a:srgbClr val="F59E0B"/>
-                </a:solidFill>
-                <a:latin typeface="Calibri"/>
-              </a:rPr>
-              <a:t>—  </a:t>
-            </a:r>
-            <a:r>
-              <a:rPr sz="1500" b="1">
-                <a:solidFill>
-                  <a:srgbClr val="0F172A"/>
-                </a:solidFill>
-                <a:latin typeface="Calibri"/>
-              </a:rPr>
-              <a:t>No versioning — </a:t>
-            </a:r>
-            <a:r>
-              <a:rPr sz="1500">
-                <a:solidFill>
-                  <a:srgbClr val="0F172A"/>
-                </a:solidFill>
-                <a:latin typeface="Calibri"/>
-              </a:rPr>
-              <a:t>re-upload overwrites history</a:t>
-            </a:r>
-          </a:p>
-          <a:p>
-            <a:pPr>
-              <a:spcBef>
-                <a:spcPts val="0"/>
-              </a:spcBef>
-              <a:spcAft>
-                <a:spcPts val="1100"/>
-              </a:spcAft>
-            </a:pPr>
-            <a:r>
-              <a:rPr sz="1500" b="1">
-                <a:solidFill>
-                  <a:srgbClr val="F59E0B"/>
-                </a:solidFill>
-                <a:latin typeface="Calibri"/>
-              </a:rPr>
-              <a:t>—  </a:t>
-            </a:r>
-            <a:r>
-              <a:rPr sz="1500" b="1">
-                <a:solidFill>
-                  <a:srgbClr val="0F172A"/>
-                </a:solidFill>
-                <a:latin typeface="Calibri"/>
-              </a:rPr>
-              <a:t>Weak auth — </a:t>
-            </a:r>
-            <a:r>
-              <a:rPr sz="1500">
-                <a:solidFill>
-                  <a:srgbClr val="0F172A"/>
-                </a:solidFill>
-                <a:latin typeface="Calibri"/>
-              </a:rPr>
-              <a:t>a root password check</a:t>
-            </a:r>
-          </a:p>
-          <a:p>
-            <a:pPr>
-              <a:spcBef>
-                <a:spcPts val="0"/>
-              </a:spcBef>
-              <a:spcAft>
-                <a:spcPts val="1100"/>
-              </a:spcAft>
-            </a:pPr>
-            <a:r>
-              <a:rPr sz="1500" b="1">
-                <a:solidFill>
-                  <a:srgbClr val="F59E0B"/>
-                </a:solidFill>
-                <a:latin typeface="Calibri"/>
-              </a:rPr>
-              <a:t>—  </a:t>
-            </a:r>
-            <a:r>
-              <a:rPr sz="1500" b="1">
-                <a:solidFill>
-                  <a:srgbClr val="0F172A"/>
-                </a:solidFill>
-                <a:latin typeface="Calibri"/>
-              </a:rPr>
-              <a:t>One hard-coded DCC — </a:t>
-            </a:r>
-            <a:r>
-              <a:rPr sz="1500">
-                <a:solidFill>
-                  <a:srgbClr val="0F172A"/>
-                </a:solidFill>
-                <a:latin typeface="Calibri"/>
-              </a:rPr>
-              <a:t>doesn’t generalise</a:t>
-            </a:r>
-          </a:p>
-          <a:p>
-            <a:pPr>
-              <a:spcBef>
-                <a:spcPts val="0"/>
-              </a:spcBef>
-              <a:spcAft>
-                <a:spcPts val="1100"/>
-              </a:spcAft>
-            </a:pPr>
-            <a:r>
-              <a:rPr sz="1500" b="1">
-                <a:solidFill>
-                  <a:srgbClr val="F59E0B"/>
-                </a:solidFill>
-                <a:latin typeface="Calibri"/>
-              </a:rPr>
-              <a:t>—  </a:t>
-            </a:r>
-            <a:r>
-              <a:rPr sz="1500" b="1">
-                <a:solidFill>
-                  <a:srgbClr val="0F172A"/>
-                </a:solidFill>
-                <a:latin typeface="Calibri"/>
-              </a:rPr>
-              <a:t>Localhost only — </a:t>
-            </a:r>
-            <a:r>
-              <a:rPr sz="1500">
-                <a:solidFill>
-                  <a:srgbClr val="0F172A"/>
-                </a:solidFill>
-                <a:latin typeface="Calibri"/>
-              </a:rPr>
-              <a:t>no real deployment story</a:t>
+              <a:t>.obj and the lack of versioning are exactly its limits.</a:t>
             </a:r>
           </a:p>
         </p:txBody>
@@ -5598,58 +4771,14 @@
       </p:sp>
       <p:sp>
         <p:nvSpPr>
-          <p:cNvPr id="3" name="Rectangle 2"/>
-          <p:cNvSpPr/>
-          <p:nvPr/>
-        </p:nvSpPr>
-        <p:spPr>
-          <a:xfrm>
-            <a:off x="822960" y="1371600"/>
-            <a:ext cx="109728" cy="3108960"/>
-          </a:xfrm>
-          <a:prstGeom prst="rect">
-            <a:avLst/>
-          </a:prstGeom>
-          <a:solidFill>
-            <a:srgbClr val="14B8A6"/>
-          </a:solidFill>
-          <a:ln>
-            <a:noFill/>
-          </a:ln>
-          <a:effectLst/>
-        </p:spPr>
-        <p:style>
-          <a:lnRef idx="1">
-            <a:schemeClr val="accent1"/>
-          </a:lnRef>
-          <a:fillRef idx="3">
-            <a:schemeClr val="accent1"/>
-          </a:fillRef>
-          <a:effectRef idx="2">
-            <a:schemeClr val="accent1"/>
-          </a:effectRef>
-          <a:fontRef idx="minor">
-            <a:schemeClr val="lt1"/>
-          </a:fontRef>
-        </p:style>
-        <p:txBody>
-          <a:bodyPr rtlCol="0" anchor="ctr"/>
-          <a:lstStyle/>
-          <a:p>
-            <a:pPr algn="ctr"/>
-          </a:p>
-        </p:txBody>
-      </p:sp>
-      <p:sp>
-        <p:nvSpPr>
-          <p:cNvPr id="4" name="TextBox 3"/>
+          <p:cNvPr id="3" name="TextBox 2"/>
           <p:cNvSpPr txBox="1"/>
           <p:nvPr/>
         </p:nvSpPr>
         <p:spPr>
           <a:xfrm>
-            <a:off x="1143000" y="1417320"/>
-            <a:ext cx="5486400" cy="274320"/>
+            <a:off x="822960" y="594360"/>
+            <a:ext cx="7315200" cy="274320"/>
           </a:xfrm>
           <a:prstGeom prst="rect">
             <a:avLst/>
@@ -5677,21 +4806,144 @@
                 </a:solidFill>
                 <a:latin typeface="Consolas"/>
               </a:rPr>
-              <a:t>RESEARCH QUESTION</a:t>
-            </a:r>
-          </a:p>
-        </p:txBody>
-      </p:sp>
-      <p:sp>
-        <p:nvSpPr>
-          <p:cNvPr id="5" name="TextBox 4"/>
+              <a:t>THE IDEA</a:t>
+            </a:r>
+          </a:p>
+        </p:txBody>
+      </p:sp>
+      <p:sp>
+        <p:nvSpPr>
+          <p:cNvPr id="4" name="TextBox 3"/>
           <p:cNvSpPr txBox="1"/>
           <p:nvPr/>
         </p:nvSpPr>
         <p:spPr>
           <a:xfrm>
-            <a:off x="1143000" y="1965960"/>
-            <a:ext cx="10058400" cy="3108960"/>
+            <a:off x="822960" y="960120"/>
+            <a:ext cx="10515600" cy="1280160"/>
+          </a:xfrm>
+          <a:prstGeom prst="rect">
+            <a:avLst/>
+          </a:prstGeom>
+          <a:noFill/>
+        </p:spPr>
+        <p:txBody>
+          <a:bodyPr wrap="square" anchor="t" lIns="0" rIns="0" tIns="0" bIns="0">
+            <a:spAutoFit/>
+          </a:bodyPr>
+          <a:lstStyle/>
+          <a:p>
+            <a:pPr algn="l">
+              <a:spcBef>
+                <a:spcPts val="0"/>
+              </a:spcBef>
+              <a:spcAft>
+                <a:spcPts val="300"/>
+              </a:spcAft>
+            </a:pPr>
+            <a:r>
+              <a:rPr sz="2600" b="1" i="0">
+                <a:solidFill>
+                  <a:srgbClr val="FFFFFF"/>
+                </a:solidFill>
+                <a:latin typeface="Georgia"/>
+              </a:rPr>
+              <a:t>Can a USD-based system give small teams </a:t>
+            </a:r>
+            <a:r>
+              <a:rPr sz="2600" b="1" i="0">
+                <a:solidFill>
+                  <a:srgbClr val="2DD4BF"/>
+                </a:solidFill>
+                <a:latin typeface="Georgia"/>
+              </a:rPr>
+              <a:t>reliable,</a:t>
+            </a:r>
+          </a:p>
+          <a:p>
+            <a:pPr algn="l">
+              <a:spcBef>
+                <a:spcPts val="0"/>
+              </a:spcBef>
+              <a:spcAft>
+                <a:spcPts val="300"/>
+              </a:spcAft>
+            </a:pPr>
+            <a:r>
+              <a:rPr sz="2600" b="1" i="0">
+                <a:solidFill>
+                  <a:srgbClr val="2DD4BF"/>
+                </a:solidFill>
+                <a:latin typeface="Georgia"/>
+              </a:rPr>
+              <a:t>versioned, cross-DCC</a:t>
+            </a:r>
+            <a:r>
+              <a:rPr sz="2600" b="1" i="0">
+                <a:solidFill>
+                  <a:srgbClr val="FFFFFF"/>
+                </a:solidFill>
+                <a:latin typeface="Georgia"/>
+              </a:rPr>
+              <a:t> asset exchange — and beat manual sharing?</a:t>
+            </a:r>
+          </a:p>
+        </p:txBody>
+      </p:sp>
+      <p:sp>
+        <p:nvSpPr>
+          <p:cNvPr id="5" name="Rounded Rectangle 4"/>
+          <p:cNvSpPr/>
+          <p:nvPr/>
+        </p:nvSpPr>
+        <p:spPr>
+          <a:xfrm>
+            <a:off x="822960" y="2514600"/>
+            <a:ext cx="5120640" cy="3566160"/>
+          </a:xfrm>
+          <a:prstGeom prst="roundRect">
+            <a:avLst/>
+          </a:prstGeom>
+          <a:solidFill>
+            <a:srgbClr val="1A2540"/>
+          </a:solidFill>
+          <a:ln>
+            <a:noFill/>
+          </a:ln>
+          <a:effectLst/>
+        </p:spPr>
+        <p:style>
+          <a:lnRef idx="1">
+            <a:schemeClr val="accent1"/>
+          </a:lnRef>
+          <a:fillRef idx="3">
+            <a:schemeClr val="accent1"/>
+          </a:fillRef>
+          <a:effectRef idx="2">
+            <a:schemeClr val="accent1"/>
+          </a:effectRef>
+          <a:fontRef idx="minor">
+            <a:schemeClr val="lt1"/>
+          </a:fontRef>
+        </p:style>
+        <p:txBody>
+          <a:bodyPr rtlCol="0" anchor="ctr"/>
+          <a:lstStyle/>
+          <a:p>
+            <a:pPr algn="ctr"/>
+          </a:p>
+        </p:txBody>
+      </p:sp>
+      <p:sp>
+        <p:nvSpPr>
+          <p:cNvPr id="6" name="TextBox 5"/>
+          <p:cNvSpPr txBox="1"/>
+          <p:nvPr/>
+        </p:nvSpPr>
+        <p:spPr>
+          <a:xfrm>
+            <a:off x="1188720" y="2834640"/>
+            <a:ext cx="4572000" cy="365760"/>
           </a:xfrm>
           <a:prstGeom prst="rect">
             <a:avLst/>
@@ -5713,15 +4965,217 @@
               </a:spcAft>
             </a:pPr>
             <a:r>
-              <a:rPr sz="3000" b="1" i="0">
-                <a:solidFill>
-                  <a:srgbClr val="FFFFFF"/>
-                </a:solidFill>
-                <a:latin typeface="Georgia"/>
-              </a:rPr>
-              <a:t>Can a lightweight, USD-based asset</a:t>
-            </a:r>
-          </a:p>
+              <a:rPr sz="1600" b="1" i="0">
+                <a:solidFill>
+                  <a:srgbClr val="94A3B8"/>
+                </a:solidFill>
+                <a:latin typeface="Consolas"/>
+              </a:rPr>
+              <a:t>.obj  —  the prototype</a:t>
+            </a:r>
+          </a:p>
+        </p:txBody>
+      </p:sp>
+      <p:sp>
+        <p:nvSpPr>
+          <p:cNvPr id="7" name="TextBox 6"/>
+          <p:cNvSpPr txBox="1"/>
+          <p:nvPr/>
+        </p:nvSpPr>
+        <p:spPr>
+          <a:xfrm>
+            <a:off x="1188720" y="3383280"/>
+            <a:ext cx="4480560" cy="2377440"/>
+          </a:xfrm>
+          <a:prstGeom prst="rect">
+            <a:avLst/>
+          </a:prstGeom>
+          <a:noFill/>
+        </p:spPr>
+        <p:txBody>
+          <a:bodyPr wrap="square" lIns="0" rIns="0" tIns="0" bIns="0">
+            <a:spAutoFit/>
+          </a:bodyPr>
+          <a:lstStyle/>
+          <a:p>
+            <a:pPr>
+              <a:spcBef>
+                <a:spcPts val="0"/>
+              </a:spcBef>
+              <a:spcAft>
+                <a:spcPts val="1100"/>
+              </a:spcAft>
+            </a:pPr>
+            <a:r>
+              <a:rPr sz="1500" b="1">
+                <a:solidFill>
+                  <a:srgbClr val="94A3B8"/>
+                </a:solidFill>
+                <a:latin typeface="Calibri"/>
+              </a:rPr>
+              <a:t>—  </a:t>
+            </a:r>
+            <a:r>
+              <a:rPr sz="1500">
+                <a:solidFill>
+                  <a:srgbClr val="E2E8F0"/>
+                </a:solidFill>
+                <a:latin typeface="Calibri"/>
+              </a:rPr>
+              <a:t>Geometry only</a:t>
+            </a:r>
+          </a:p>
+          <a:p>
+            <a:pPr>
+              <a:spcBef>
+                <a:spcPts val="0"/>
+              </a:spcBef>
+              <a:spcAft>
+                <a:spcPts val="1100"/>
+              </a:spcAft>
+            </a:pPr>
+            <a:r>
+              <a:rPr sz="1500" b="1">
+                <a:solidFill>
+                  <a:srgbClr val="94A3B8"/>
+                </a:solidFill>
+                <a:latin typeface="Calibri"/>
+              </a:rPr>
+              <a:t>—  </a:t>
+            </a:r>
+            <a:r>
+              <a:rPr sz="1500">
+                <a:solidFill>
+                  <a:srgbClr val="E2E8F0"/>
+                </a:solidFill>
+                <a:latin typeface="Calibri"/>
+              </a:rPr>
+              <a:t>No materials or textures</a:t>
+            </a:r>
+          </a:p>
+          <a:p>
+            <a:pPr>
+              <a:spcBef>
+                <a:spcPts val="0"/>
+              </a:spcBef>
+              <a:spcAft>
+                <a:spcPts val="1100"/>
+              </a:spcAft>
+            </a:pPr>
+            <a:r>
+              <a:rPr sz="1500" b="1">
+                <a:solidFill>
+                  <a:srgbClr val="94A3B8"/>
+                </a:solidFill>
+                <a:latin typeface="Calibri"/>
+              </a:rPr>
+              <a:t>—  </a:t>
+            </a:r>
+            <a:r>
+              <a:rPr sz="1500">
+                <a:solidFill>
+                  <a:srgbClr val="E2E8F0"/>
+                </a:solidFill>
+                <a:latin typeface="Calibri"/>
+              </a:rPr>
+              <a:t>No hierarchy or variants</a:t>
+            </a:r>
+          </a:p>
+          <a:p>
+            <a:pPr>
+              <a:spcBef>
+                <a:spcPts val="0"/>
+              </a:spcBef>
+              <a:spcAft>
+                <a:spcPts val="1100"/>
+              </a:spcAft>
+            </a:pPr>
+            <a:r>
+              <a:rPr sz="1500" b="1">
+                <a:solidFill>
+                  <a:srgbClr val="94A3B8"/>
+                </a:solidFill>
+                <a:latin typeface="Calibri"/>
+              </a:rPr>
+              <a:t>—  </a:t>
+            </a:r>
+            <a:r>
+              <a:rPr sz="1500">
+                <a:solidFill>
+                  <a:srgbClr val="E2E8F0"/>
+                </a:solidFill>
+                <a:latin typeface="Calibri"/>
+              </a:rPr>
+              <a:t>Re-upload overwrites history</a:t>
+            </a:r>
+          </a:p>
+        </p:txBody>
+      </p:sp>
+      <p:sp>
+        <p:nvSpPr>
+          <p:cNvPr id="8" name="Rounded Rectangle 7"/>
+          <p:cNvSpPr/>
+          <p:nvPr/>
+        </p:nvSpPr>
+        <p:spPr>
+          <a:xfrm>
+            <a:off x="6263640" y="2514600"/>
+            <a:ext cx="5120640" cy="3566160"/>
+          </a:xfrm>
+          <a:prstGeom prst="roundRect">
+            <a:avLst/>
+          </a:prstGeom>
+          <a:solidFill>
+            <a:srgbClr val="1A2540"/>
+          </a:solidFill>
+          <a:ln>
+            <a:noFill/>
+          </a:ln>
+          <a:effectLst/>
+        </p:spPr>
+        <p:style>
+          <a:lnRef idx="1">
+            <a:schemeClr val="accent1"/>
+          </a:lnRef>
+          <a:fillRef idx="3">
+            <a:schemeClr val="accent1"/>
+          </a:fillRef>
+          <a:effectRef idx="2">
+            <a:schemeClr val="accent1"/>
+          </a:effectRef>
+          <a:fontRef idx="minor">
+            <a:schemeClr val="lt1"/>
+          </a:fontRef>
+        </p:style>
+        <p:txBody>
+          <a:bodyPr rtlCol="0" anchor="ctr"/>
+          <a:lstStyle/>
+          <a:p>
+            <a:pPr algn="ctr"/>
+          </a:p>
+        </p:txBody>
+      </p:sp>
+      <p:sp>
+        <p:nvSpPr>
+          <p:cNvPr id="9" name="TextBox 8"/>
+          <p:cNvSpPr txBox="1"/>
+          <p:nvPr/>
+        </p:nvSpPr>
+        <p:spPr>
+          <a:xfrm>
+            <a:off x="6629400" y="2834640"/>
+            <a:ext cx="4572000" cy="365760"/>
+          </a:xfrm>
+          <a:prstGeom prst="rect">
+            <a:avLst/>
+          </a:prstGeom>
+          <a:noFill/>
+        </p:spPr>
+        <p:txBody>
+          <a:bodyPr wrap="square" anchor="t" lIns="0" rIns="0" tIns="0" bIns="0">
+            <a:spAutoFit/>
+          </a:bodyPr>
+          <a:lstStyle/>
           <a:p>
             <a:pPr algn="l">
               <a:spcBef>
@@ -5732,148 +5186,184 @@
               </a:spcAft>
             </a:pPr>
             <a:r>
-              <a:rPr sz="3000" b="1" i="0">
-                <a:solidFill>
-                  <a:srgbClr val="FFFFFF"/>
-                </a:solidFill>
-                <a:latin typeface="Georgia"/>
-              </a:rPr>
-              <a:t>system provide </a:t>
-            </a:r>
-            <a:r>
-              <a:rPr sz="3000" b="1" i="0">
+              <a:rPr sz="1600" b="1" i="0">
                 <a:solidFill>
                   <a:srgbClr val="2DD4BF"/>
                 </a:solidFill>
-                <a:latin typeface="Georgia"/>
-              </a:rPr>
-              <a:t>reliable, versioned,</a:t>
-            </a:r>
-          </a:p>
-          <a:p>
-            <a:pPr algn="l">
+                <a:latin typeface="Consolas"/>
+              </a:rPr>
+              <a:t>OpenUSD  —  the proposal</a:t>
+            </a:r>
+          </a:p>
+        </p:txBody>
+      </p:sp>
+      <p:sp>
+        <p:nvSpPr>
+          <p:cNvPr id="10" name="TextBox 9"/>
+          <p:cNvSpPr txBox="1"/>
+          <p:nvPr/>
+        </p:nvSpPr>
+        <p:spPr>
+          <a:xfrm>
+            <a:off x="6629400" y="3383280"/>
+            <a:ext cx="4572000" cy="2377440"/>
+          </a:xfrm>
+          <a:prstGeom prst="rect">
+            <a:avLst/>
+          </a:prstGeom>
+          <a:noFill/>
+        </p:spPr>
+        <p:txBody>
+          <a:bodyPr wrap="square" lIns="0" rIns="0" tIns="0" bIns="0">
+            <a:spAutoFit/>
+          </a:bodyPr>
+          <a:lstStyle/>
+          <a:p>
+            <a:pPr>
               <a:spcBef>
                 <a:spcPts val="0"/>
               </a:spcBef>
               <a:spcAft>
-                <a:spcPts val="400"/>
+                <a:spcPts val="1100"/>
               </a:spcAft>
             </a:pPr>
             <a:r>
-              <a:rPr sz="3000" b="1" i="0">
+              <a:rPr sz="1500" b="1">
                 <a:solidFill>
                   <a:srgbClr val="2DD4BF"/>
                 </a:solidFill>
-                <a:latin typeface="Georgia"/>
-              </a:rPr>
-              <a:t>cross-DCC</a:t>
-            </a:r>
-            <a:r>
-              <a:rPr sz="3000" b="1" i="0">
-                <a:solidFill>
-                  <a:srgbClr val="FFFFFF"/>
-                </a:solidFill>
-                <a:latin typeface="Georgia"/>
-              </a:rPr>
-              <a:t> asset exchange for small</a:t>
-            </a:r>
-          </a:p>
-          <a:p>
-            <a:pPr algn="l">
+                <a:latin typeface="Calibri"/>
+              </a:rPr>
+              <a:t>—  </a:t>
+            </a:r>
+            <a:r>
+              <a:rPr sz="1500" b="1">
+                <a:solidFill>
+                  <a:srgbClr val="E2E8F0"/>
+                </a:solidFill>
+                <a:latin typeface="Calibri"/>
+              </a:rPr>
+              <a:t>Versioning </a:t>
+            </a:r>
+            <a:r>
+              <a:rPr sz="1500">
+                <a:solidFill>
+                  <a:srgbClr val="E2E8F0"/>
+                </a:solidFill>
+                <a:latin typeface="Calibri"/>
+              </a:rPr>
+              <a:t>via USD composition / layers</a:t>
+            </a:r>
+          </a:p>
+          <a:p>
+            <a:pPr>
               <a:spcBef>
                 <a:spcPts val="0"/>
               </a:spcBef>
               <a:spcAft>
-                <a:spcPts val="400"/>
+                <a:spcPts val="1100"/>
               </a:spcAft>
             </a:pPr>
             <a:r>
-              <a:rPr sz="3000" b="1" i="0">
-                <a:solidFill>
-                  <a:srgbClr val="FFFFFF"/>
-                </a:solidFill>
-                <a:latin typeface="Georgia"/>
-              </a:rPr>
-              <a:t>studios — and does it </a:t>
-            </a:r>
-            <a:r>
-              <a:rPr sz="3000" b="1" i="0">
+              <a:rPr sz="1500" b="1">
                 <a:solidFill>
                   <a:srgbClr val="2DD4BF"/>
                 </a:solidFill>
-                <a:latin typeface="Georgia"/>
-              </a:rPr>
-              <a:t>measurably</a:t>
-            </a:r>
-          </a:p>
-          <a:p>
-            <a:pPr algn="l">
+                <a:latin typeface="Calibri"/>
+              </a:rPr>
+              <a:t>—  </a:t>
+            </a:r>
+            <a:r>
+              <a:rPr sz="1500" b="1">
+                <a:solidFill>
+                  <a:srgbClr val="E2E8F0"/>
+                </a:solidFill>
+                <a:latin typeface="Calibri"/>
+              </a:rPr>
+              <a:t>Cross-DCC </a:t>
+            </a:r>
+            <a:r>
+              <a:rPr sz="1500">
+                <a:solidFill>
+                  <a:srgbClr val="E2E8F0"/>
+                </a:solidFill>
+                <a:latin typeface="Calibri"/>
+              </a:rPr>
+              <a:t>native in Maya, Houdini, Unreal</a:t>
+            </a:r>
+          </a:p>
+          <a:p>
+            <a:pPr>
               <a:spcBef>
                 <a:spcPts val="0"/>
               </a:spcBef>
               <a:spcAft>
-                <a:spcPts val="400"/>
+                <a:spcPts val="1100"/>
               </a:spcAft>
             </a:pPr>
             <a:r>
-              <a:rPr sz="3000" b="1" i="0">
+              <a:rPr sz="1500" b="1">
                 <a:solidFill>
                   <a:srgbClr val="2DD4BF"/>
                 </a:solidFill>
-                <a:latin typeface="Georgia"/>
-              </a:rPr>
-              <a:t>improve</a:t>
-            </a:r>
-            <a:r>
-              <a:rPr sz="3000" b="1" i="0">
-                <a:solidFill>
-                  <a:srgbClr val="FFFFFF"/>
-                </a:solidFill>
-                <a:latin typeface="Georgia"/>
-              </a:rPr>
-              <a:t> on manual file-sharing?</a:t>
-            </a:r>
-          </a:p>
-        </p:txBody>
-      </p:sp>
-      <p:sp>
-        <p:nvSpPr>
-          <p:cNvPr id="6" name="TextBox 5"/>
-          <p:cNvSpPr txBox="1"/>
-          <p:nvPr/>
-        </p:nvSpPr>
-        <p:spPr>
-          <a:xfrm>
-            <a:off x="1143000" y="5212080"/>
-            <a:ext cx="10058400" cy="457200"/>
-          </a:xfrm>
-          <a:prstGeom prst="rect">
-            <a:avLst/>
-          </a:prstGeom>
-          <a:noFill/>
-        </p:spPr>
-        <p:txBody>
-          <a:bodyPr wrap="square" anchor="t" lIns="0" rIns="0" tIns="0" bIns="0">
-            <a:spAutoFit/>
-          </a:bodyPr>
-          <a:lstStyle/>
-          <a:p>
-            <a:pPr algn="l">
+                <a:latin typeface="Calibri"/>
+              </a:rPr>
+              <a:t>—  </a:t>
+            </a:r>
+            <a:r>
+              <a:rPr sz="1500" b="1">
+                <a:solidFill>
+                  <a:srgbClr val="E2E8F0"/>
+                </a:solidFill>
+                <a:latin typeface="Calibri"/>
+              </a:rPr>
+              <a:t>Rich data </a:t>
+            </a:r>
+            <a:r>
+              <a:rPr sz="1500">
+                <a:solidFill>
+                  <a:srgbClr val="E2E8F0"/>
+                </a:solidFill>
+                <a:latin typeface="Calibri"/>
+              </a:rPr>
+              <a:t>hierarchy + materials travel along</a:t>
+            </a:r>
+          </a:p>
+          <a:p>
+            <a:pPr>
               <a:spcBef>
                 <a:spcPts val="0"/>
               </a:spcBef>
               <a:spcAft>
-                <a:spcPts val="400"/>
+                <a:spcPts val="1100"/>
               </a:spcAft>
             </a:pPr>
             <a:r>
-              <a:rPr sz="1600" b="0" i="1">
-                <a:solidFill>
-                  <a:srgbClr val="94A3B8"/>
+              <a:rPr sz="1500" b="1">
+                <a:solidFill>
+                  <a:srgbClr val="2DD4BF"/>
                 </a:solidFill>
                 <a:latin typeface="Calibri"/>
               </a:rPr>
-              <a:t>Measured on usability and error reduction, with real artists.</a:t>
+              <a:t>—  </a:t>
+            </a:r>
+            <a:r>
+              <a:rPr sz="1500" b="1">
+                <a:solidFill>
+                  <a:srgbClr val="E2E8F0"/>
+                </a:solidFill>
+                <a:latin typeface="Calibri"/>
+              </a:rPr>
+              <a:t>Industry standard </a:t>
+            </a:r>
+            <a:r>
+              <a:rPr sz="1500">
+                <a:solidFill>
+                  <a:srgbClr val="E2E8F0"/>
+                </a:solidFill>
+                <a:latin typeface="Calibri"/>
+              </a:rPr>
+              <a:t>(Pixar, NVIDIA Omniverse)</a:t>
             </a:r>
           </a:p>
         </p:txBody>
@@ -5949,7 +5439,7 @@
         <p:spPr>
           <a:xfrm>
             <a:off x="822960" y="640080"/>
-            <a:ext cx="5486400" cy="274320"/>
+            <a:ext cx="7315200" cy="274320"/>
           </a:xfrm>
           <a:prstGeom prst="rect">
             <a:avLst/>
@@ -5977,7 +5467,7 @@
                 </a:solidFill>
                 <a:latin typeface="Consolas"/>
               </a:rPr>
-              <a:t>WHY USD</a:t>
+              <a:t>OBJECTIVES &amp; IMPLEMENTATION METHODS</a:t>
             </a:r>
           </a:p>
         </p:txBody>
@@ -6013,13 +5503,13 @@
               </a:spcAft>
             </a:pPr>
             <a:r>
-              <a:rPr sz="3200" b="1" i="0">
+              <a:rPr sz="3100" b="1" i="0">
                 <a:solidFill>
                   <a:srgbClr val="0F172A"/>
                 </a:solidFill>
                 <a:latin typeface="Georgia"/>
               </a:rPr>
-              <a:t>The technical spine, not a buzzword</a:t>
+              <a:t>What I'll build, and how</a:t>
             </a:r>
           </a:p>
         </p:txBody>
@@ -6033,7 +5523,7 @@
         <p:spPr>
           <a:xfrm>
             <a:off x="822960" y="1920240"/>
-            <a:ext cx="3200400" cy="3566160"/>
+            <a:ext cx="5120640" cy="4206240"/>
           </a:xfrm>
           <a:prstGeom prst="roundRect">
             <a:avLst/>
@@ -6048,7 +5538,7 @@
           <a:effectLst>
             <a:outerShdw blurRad="90000" dist="40000" dir="5400000" rotWithShape="0">
               <a:srgbClr val="0F172A">
-                <a:alpha val="14000"/>
+                <a:alpha val="16000"/>
               </a:srgbClr>
             </a:outerShdw>
           </a:effectLst>
@@ -6083,8 +5573,8 @@
         </p:nvSpPr>
         <p:spPr>
           <a:xfrm>
-            <a:off x="1143000" y="2240280"/>
-            <a:ext cx="2743200" cy="457200"/>
+            <a:off x="1188720" y="2240280"/>
+            <a:ext cx="4572000" cy="274320"/>
           </a:xfrm>
           <a:prstGeom prst="rect">
             <a:avLst/>
@@ -6106,13 +5596,13 @@
               </a:spcAft>
             </a:pPr>
             <a:r>
-              <a:rPr sz="2200" b="1" i="0">
-                <a:solidFill>
-                  <a:srgbClr val="64748B"/>
+              <a:rPr sz="1200" b="1" i="0" spc="200">
+                <a:solidFill>
+                  <a:srgbClr val="14B8A6"/>
                 </a:solidFill>
                 <a:latin typeface="Consolas"/>
               </a:rPr>
-              <a:t>.obj</a:t>
+              <a:t>OBJECTIVES</a:t>
             </a:r>
           </a:p>
         </p:txBody>
@@ -6125,8 +5615,215 @@
         </p:nvSpPr>
         <p:spPr>
           <a:xfrm>
-            <a:off x="1143000" y="2697480"/>
-            <a:ext cx="2743200" cy="274320"/>
+            <a:off x="1188720" y="2697480"/>
+            <a:ext cx="4480560" cy="3200400"/>
+          </a:xfrm>
+          <a:prstGeom prst="rect">
+            <a:avLst/>
+          </a:prstGeom>
+          <a:noFill/>
+        </p:spPr>
+        <p:txBody>
+          <a:bodyPr wrap="square" lIns="0" rIns="0" tIns="0" bIns="0">
+            <a:spAutoFit/>
+          </a:bodyPr>
+          <a:lstStyle/>
+          <a:p>
+            <a:pPr>
+              <a:spcBef>
+                <a:spcPts val="0"/>
+              </a:spcBef>
+              <a:spcAft>
+                <a:spcPts val="1200"/>
+              </a:spcAft>
+            </a:pPr>
+            <a:r>
+              <a:rPr sz="1450" b="1">
+                <a:solidFill>
+                  <a:srgbClr val="14B8A6"/>
+                </a:solidFill>
+                <a:latin typeface="Calibri"/>
+              </a:rPr>
+              <a:t>—  </a:t>
+            </a:r>
+            <a:r>
+              <a:rPr sz="1450">
+                <a:solidFill>
+                  <a:srgbClr val="0F172A"/>
+                </a:solidFill>
+                <a:latin typeface="Calibri"/>
+              </a:rPr>
+              <a:t>Review existing pipelines (Kitsu, Prism, USD)</a:t>
+            </a:r>
+          </a:p>
+          <a:p>
+            <a:pPr>
+              <a:spcBef>
+                <a:spcPts val="0"/>
+              </a:spcBef>
+              <a:spcAft>
+                <a:spcPts val="1200"/>
+              </a:spcAft>
+            </a:pPr>
+            <a:r>
+              <a:rPr sz="1450" b="1">
+                <a:solidFill>
+                  <a:srgbClr val="14B8A6"/>
+                </a:solidFill>
+                <a:latin typeface="Calibri"/>
+              </a:rPr>
+              <a:t>—  </a:t>
+            </a:r>
+            <a:r>
+              <a:rPr sz="1450">
+                <a:solidFill>
+                  <a:srgbClr val="0F172A"/>
+                </a:solidFill>
+                <a:latin typeface="Calibri"/>
+              </a:rPr>
+              <a:t>Versioned server with an “approved” state</a:t>
+            </a:r>
+          </a:p>
+          <a:p>
+            <a:pPr>
+              <a:spcBef>
+                <a:spcPts val="0"/>
+              </a:spcBef>
+              <a:spcAft>
+                <a:spcPts val="1200"/>
+              </a:spcAft>
+            </a:pPr>
+            <a:r>
+              <a:rPr sz="1450" b="1">
+                <a:solidFill>
+                  <a:srgbClr val="14B8A6"/>
+                </a:solidFill>
+                <a:latin typeface="Calibri"/>
+              </a:rPr>
+              <a:t>—  </a:t>
+            </a:r>
+            <a:r>
+              <a:rPr sz="1450">
+                <a:solidFill>
+                  <a:srgbClr val="0F172A"/>
+                </a:solidFill>
+                <a:latin typeface="Calibri"/>
+              </a:rPr>
+              <a:t>USD publish/consume in Maya + Houdini</a:t>
+            </a:r>
+          </a:p>
+          <a:p>
+            <a:pPr>
+              <a:spcBef>
+                <a:spcPts val="0"/>
+              </a:spcBef>
+              <a:spcAft>
+                <a:spcPts val="1200"/>
+              </a:spcAft>
+            </a:pPr>
+            <a:r>
+              <a:rPr sz="1450" b="1">
+                <a:solidFill>
+                  <a:srgbClr val="14B8A6"/>
+                </a:solidFill>
+                <a:latin typeface="Calibri"/>
+              </a:rPr>
+              <a:t>—  </a:t>
+            </a:r>
+            <a:r>
+              <a:rPr sz="1450">
+                <a:solidFill>
+                  <a:srgbClr val="0F172A"/>
+                </a:solidFill>
+                <a:latin typeface="Calibri"/>
+              </a:rPr>
+              <a:t>Consume “latest approved” or a pinned version</a:t>
+            </a:r>
+          </a:p>
+          <a:p>
+            <a:pPr>
+              <a:spcBef>
+                <a:spcPts val="0"/>
+              </a:spcBef>
+              <a:spcAft>
+                <a:spcPts val="1200"/>
+              </a:spcAft>
+            </a:pPr>
+            <a:r>
+              <a:rPr sz="1450" b="1">
+                <a:solidFill>
+                  <a:srgbClr val="14B8A6"/>
+                </a:solidFill>
+                <a:latin typeface="Calibri"/>
+              </a:rPr>
+              <a:t>—  </a:t>
+            </a:r>
+            <a:r>
+              <a:rPr sz="1450">
+                <a:solidFill>
+                  <a:srgbClr val="0F172A"/>
+                </a:solidFill>
+                <a:latin typeface="Calibri"/>
+              </a:rPr>
+              <a:t>Evaluate with artists (study + SUS survey)</a:t>
+            </a:r>
+          </a:p>
+        </p:txBody>
+      </p:sp>
+      <p:sp>
+        <p:nvSpPr>
+          <p:cNvPr id="8" name="Rounded Rectangle 7"/>
+          <p:cNvSpPr/>
+          <p:nvPr/>
+        </p:nvSpPr>
+        <p:spPr>
+          <a:xfrm>
+            <a:off x="6263640" y="1920240"/>
+            <a:ext cx="5120640" cy="4206240"/>
+          </a:xfrm>
+          <a:prstGeom prst="roundRect">
+            <a:avLst/>
+          </a:prstGeom>
+          <a:solidFill>
+            <a:srgbClr val="0E1628"/>
+          </a:solidFill>
+          <a:ln>
+            <a:noFill/>
+          </a:ln>
+          <a:effectLst/>
+        </p:spPr>
+        <p:style>
+          <a:lnRef idx="1">
+            <a:schemeClr val="accent1"/>
+          </a:lnRef>
+          <a:fillRef idx="3">
+            <a:schemeClr val="accent1"/>
+          </a:fillRef>
+          <a:effectRef idx="2">
+            <a:schemeClr val="accent1"/>
+          </a:effectRef>
+          <a:fontRef idx="minor">
+            <a:schemeClr val="lt1"/>
+          </a:fontRef>
+        </p:style>
+        <p:txBody>
+          <a:bodyPr rtlCol="0" anchor="ctr"/>
+          <a:lstStyle/>
+          <a:p>
+            <a:pPr algn="ctr"/>
+          </a:p>
+        </p:txBody>
+      </p:sp>
+      <p:sp>
+        <p:nvSpPr>
+          <p:cNvPr id="9" name="TextBox 8"/>
+          <p:cNvSpPr txBox="1"/>
+          <p:nvPr/>
+        </p:nvSpPr>
+        <p:spPr>
+          <a:xfrm>
+            <a:off x="6629400" y="2240280"/>
+            <a:ext cx="4572000" cy="274320"/>
           </a:xfrm>
           <a:prstGeom prst="rect">
             <a:avLst/>
@@ -6148,27 +5845,27 @@
               </a:spcAft>
             </a:pPr>
             <a:r>
-              <a:rPr sz="1300" b="0" i="1">
-                <a:solidFill>
-                  <a:srgbClr val="94A3B8"/>
-                </a:solidFill>
-                <a:latin typeface="Calibri"/>
-              </a:rPr>
-              <a:t>the prototype</a:t>
-            </a:r>
-          </a:p>
-        </p:txBody>
-      </p:sp>
-      <p:sp>
-        <p:nvSpPr>
-          <p:cNvPr id="8" name="TextBox 7"/>
+              <a:rPr sz="1200" b="1" i="0" spc="200">
+                <a:solidFill>
+                  <a:srgbClr val="2DD4BF"/>
+                </a:solidFill>
+                <a:latin typeface="Consolas"/>
+              </a:rPr>
+              <a:t>METHODS</a:t>
+            </a:r>
+          </a:p>
+        </p:txBody>
+      </p:sp>
+      <p:sp>
+        <p:nvSpPr>
+          <p:cNvPr id="10" name="TextBox 9"/>
           <p:cNvSpPr txBox="1"/>
           <p:nvPr/>
         </p:nvSpPr>
         <p:spPr>
           <a:xfrm>
-            <a:off x="1143000" y="3200400"/>
-            <a:ext cx="2743200" cy="2103120"/>
+            <a:off x="6629400" y="2697480"/>
+            <a:ext cx="4572000" cy="2377440"/>
           </a:xfrm>
           <a:prstGeom prst="rect">
             <a:avLst/>
@@ -6186,26 +5883,35 @@
                 <a:spcPts val="0"/>
               </a:spcBef>
               <a:spcAft>
-                <a:spcPts val="900"/>
+                <a:spcPts val="1200"/>
               </a:spcAft>
             </a:pPr>
             <a:r>
-              <a:rPr sz="1400" b="1">
-                <a:solidFill>
-                  <a:srgbClr val="94A3B8"/>
+              <a:rPr sz="1450" b="1">
+                <a:solidFill>
+                  <a:srgbClr val="2DD4BF"/>
                 </a:solidFill>
                 <a:latin typeface="Calibri"/>
               </a:rPr>
               <a:t>—  </a:t>
             </a:r>
             <a:r>
-              <a:rPr sz="1400">
-                <a:solidFill>
-                  <a:srgbClr val="64748B"/>
+              <a:rPr sz="1450" b="1">
+                <a:solidFill>
+                  <a:srgbClr val="E2E8F0"/>
                 </a:solidFill>
                 <a:latin typeface="Calibri"/>
               </a:rPr>
-              <a:t>Geometry only</a:t>
+              <a:t>Python + FastAPI </a:t>
+            </a:r>
+            <a:r>
+              <a:rPr sz="1450">
+                <a:solidFill>
+                  <a:srgbClr val="E2E8F0"/>
+                </a:solidFill>
+                <a:latin typeface="Calibri"/>
+              </a:rPr>
+              <a:t>server, USD via pxr bindings</a:t>
             </a:r>
           </a:p>
           <a:p>
@@ -6214,26 +5920,35 @@
                 <a:spcPts val="0"/>
               </a:spcBef>
               <a:spcAft>
-                <a:spcPts val="900"/>
+                <a:spcPts val="1200"/>
               </a:spcAft>
             </a:pPr>
             <a:r>
-              <a:rPr sz="1400" b="1">
-                <a:solidFill>
-                  <a:srgbClr val="94A3B8"/>
+              <a:rPr sz="1450" b="1">
+                <a:solidFill>
+                  <a:srgbClr val="2DD4BF"/>
                 </a:solidFill>
                 <a:latin typeface="Calibri"/>
               </a:rPr>
               <a:t>—  </a:t>
             </a:r>
             <a:r>
-              <a:rPr sz="1400">
-                <a:solidFill>
-                  <a:srgbClr val="64748B"/>
+              <a:rPr sz="1450" b="1">
+                <a:solidFill>
+                  <a:srgbClr val="E2E8F0"/>
                 </a:solidFill>
                 <a:latin typeface="Calibri"/>
               </a:rPr>
-              <a:t>No materials / textures</a:t>
+              <a:t>PySide6 </a:t>
+            </a:r>
+            <a:r>
+              <a:rPr sz="1450">
+                <a:solidFill>
+                  <a:srgbClr val="E2E8F0"/>
+                </a:solidFill>
+                <a:latin typeface="Calibri"/>
+              </a:rPr>
+              <a:t>clients inside Maya &amp; Houdini</a:t>
             </a:r>
           </a:p>
           <a:p>
@@ -6242,26 +5957,35 @@
                 <a:spcPts val="0"/>
               </a:spcBef>
               <a:spcAft>
-                <a:spcPts val="900"/>
+                <a:spcPts val="1200"/>
               </a:spcAft>
             </a:pPr>
             <a:r>
-              <a:rPr sz="1400" b="1">
-                <a:solidFill>
-                  <a:srgbClr val="94A3B8"/>
+              <a:rPr sz="1450" b="1">
+                <a:solidFill>
+                  <a:srgbClr val="2DD4BF"/>
                 </a:solidFill>
                 <a:latin typeface="Calibri"/>
               </a:rPr>
               <a:t>—  </a:t>
             </a:r>
             <a:r>
-              <a:rPr sz="1400">
-                <a:solidFill>
-                  <a:srgbClr val="64748B"/>
+              <a:rPr sz="1450" b="1">
+                <a:solidFill>
+                  <a:srgbClr val="E2E8F0"/>
                 </a:solidFill>
                 <a:latin typeface="Calibri"/>
               </a:rPr>
-              <a:t>No hierarchy or variants</a:t>
+              <a:t>Docker + CI </a:t>
+            </a:r>
+            <a:r>
+              <a:rPr sz="1450">
+                <a:solidFill>
+                  <a:srgbClr val="E2E8F0"/>
+                </a:solidFill>
+                <a:latin typeface="Calibri"/>
+              </a:rPr>
+              <a:t>reproducible deploy &amp; tests</a:t>
             </a:r>
           </a:p>
           <a:p>
@@ -6270,91 +5994,49 @@
                 <a:spcPts val="0"/>
               </a:spcBef>
               <a:spcAft>
-                <a:spcPts val="900"/>
+                <a:spcPts val="1200"/>
               </a:spcAft>
             </a:pPr>
             <a:r>
-              <a:rPr sz="1400" b="1">
-                <a:solidFill>
-                  <a:srgbClr val="94A3B8"/>
+              <a:rPr sz="1450" b="1">
+                <a:solidFill>
+                  <a:srgbClr val="2DD4BF"/>
                 </a:solidFill>
                 <a:latin typeface="Calibri"/>
               </a:rPr>
               <a:t>—  </a:t>
             </a:r>
             <a:r>
-              <a:rPr sz="1400">
-                <a:solidFill>
-                  <a:srgbClr val="64748B"/>
+              <a:rPr sz="1450" b="1">
+                <a:solidFill>
+                  <a:srgbClr val="E2E8F0"/>
                 </a:solidFill>
                 <a:latin typeface="Calibri"/>
               </a:rPr>
-              <a:t>Overwrite = lost history</a:t>
-            </a:r>
-          </a:p>
-        </p:txBody>
-      </p:sp>
-      <p:sp>
-        <p:nvSpPr>
-          <p:cNvPr id="9" name="Rounded Rectangle 8"/>
-          <p:cNvSpPr/>
-          <p:nvPr/>
-        </p:nvSpPr>
-        <p:spPr>
-          <a:xfrm>
-            <a:off x="4297680" y="1920240"/>
-            <a:ext cx="7040880" cy="3566160"/>
-          </a:xfrm>
-          <a:prstGeom prst="roundRect">
-            <a:avLst/>
-          </a:prstGeom>
-          <a:solidFill>
-            <a:srgbClr val="0E1628"/>
-          </a:solidFill>
-          <a:ln>
-            <a:noFill/>
-          </a:ln>
-          <a:effectLst/>
-          <a:effectLst>
-            <a:outerShdw blurRad="90000" dist="40000" dir="5400000" rotWithShape="0">
-              <a:srgbClr val="0F172A">
-                <a:alpha val="14000"/>
-              </a:srgbClr>
-            </a:outerShdw>
-          </a:effectLst>
-        </p:spPr>
-        <p:style>
-          <a:lnRef idx="1">
-            <a:schemeClr val="accent1"/>
-          </a:lnRef>
-          <a:fillRef idx="3">
-            <a:schemeClr val="accent1"/>
-          </a:fillRef>
-          <a:effectRef idx="2">
-            <a:schemeClr val="accent1"/>
-          </a:effectRef>
-          <a:fontRef idx="minor">
-            <a:schemeClr val="lt1"/>
-          </a:fontRef>
-        </p:style>
-        <p:txBody>
-          <a:bodyPr rtlCol="0" anchor="ctr"/>
-          <a:lstStyle/>
-          <a:p>
-            <a:pPr algn="ctr"/>
-          </a:p>
-        </p:txBody>
-      </p:sp>
-      <p:sp>
-        <p:nvSpPr>
-          <p:cNvPr id="10" name="TextBox 9"/>
+              <a:t>Design-and-build </a:t>
+            </a:r>
+            <a:r>
+              <a:rPr sz="1450">
+                <a:solidFill>
+                  <a:srgbClr val="E2E8F0"/>
+                </a:solidFill>
+                <a:latin typeface="Calibri"/>
+              </a:rPr>
+              <a:t>+ empirical user evaluation</a:t>
+            </a:r>
+          </a:p>
+        </p:txBody>
+      </p:sp>
+      <p:sp>
+        <p:nvSpPr>
+          <p:cNvPr id="11" name="TextBox 10"/>
           <p:cNvSpPr txBox="1"/>
           <p:nvPr/>
         </p:nvSpPr>
         <p:spPr>
           <a:xfrm>
-            <a:off x="4617720" y="2240280"/>
-            <a:ext cx="4572000" cy="457200"/>
+            <a:off x="6629400" y="5486400"/>
+            <a:ext cx="4572000" cy="365760"/>
           </a:xfrm>
           <a:prstGeom prst="rect">
             <a:avLst/>
@@ -6376,226 +6058,13 @@
               </a:spcAft>
             </a:pPr>
             <a:r>
-              <a:rPr sz="2200" b="1" i="0">
+              <a:rPr sz="1300" b="1" i="0">
                 <a:solidFill>
                   <a:srgbClr val="2DD4BF"/>
                 </a:solidFill>
                 <a:latin typeface="Consolas"/>
               </a:rPr>
-              <a:t>OpenUSD</a:t>
-            </a:r>
-          </a:p>
-        </p:txBody>
-      </p:sp>
-      <p:sp>
-        <p:nvSpPr>
-          <p:cNvPr id="11" name="TextBox 10"/>
-          <p:cNvSpPr txBox="1"/>
-          <p:nvPr/>
-        </p:nvSpPr>
-        <p:spPr>
-          <a:xfrm>
-            <a:off x="4617720" y="2697480"/>
-            <a:ext cx="6400800" cy="274320"/>
-          </a:xfrm>
-          <a:prstGeom prst="rect">
-            <a:avLst/>
-          </a:prstGeom>
-          <a:noFill/>
-        </p:spPr>
-        <p:txBody>
-          <a:bodyPr wrap="square" anchor="t" lIns="0" rIns="0" tIns="0" bIns="0">
-            <a:spAutoFit/>
-          </a:bodyPr>
-          <a:lstStyle/>
-          <a:p>
-            <a:pPr algn="l">
-              <a:spcBef>
-                <a:spcPts val="0"/>
-              </a:spcBef>
-              <a:spcAft>
-                <a:spcPts val="400"/>
-              </a:spcAft>
-            </a:pPr>
-            <a:r>
-              <a:rPr sz="1300" b="0" i="1">
-                <a:solidFill>
-                  <a:srgbClr val="94A3B8"/>
-                </a:solidFill>
-                <a:latin typeface="Calibri"/>
-              </a:rPr>
-              <a:t>industry interchange standard — native in Maya, Houdini, Unreal, Blender</a:t>
-            </a:r>
-          </a:p>
-        </p:txBody>
-      </p:sp>
-      <p:sp>
-        <p:nvSpPr>
-          <p:cNvPr id="12" name="TextBox 11"/>
-          <p:cNvSpPr txBox="1"/>
-          <p:nvPr/>
-        </p:nvSpPr>
-        <p:spPr>
-          <a:xfrm>
-            <a:off x="4617720" y="3200400"/>
-            <a:ext cx="6400800" cy="2194560"/>
-          </a:xfrm>
-          <a:prstGeom prst="rect">
-            <a:avLst/>
-          </a:prstGeom>
-          <a:noFill/>
-        </p:spPr>
-        <p:txBody>
-          <a:bodyPr wrap="square" lIns="0" rIns="0" tIns="0" bIns="0">
-            <a:spAutoFit/>
-          </a:bodyPr>
-          <a:lstStyle/>
-          <a:p>
-            <a:pPr>
-              <a:spcBef>
-                <a:spcPts val="0"/>
-              </a:spcBef>
-              <a:spcAft>
-                <a:spcPts val="900"/>
-              </a:spcAft>
-            </a:pPr>
-            <a:r>
-              <a:rPr sz="1400" b="1">
-                <a:solidFill>
-                  <a:srgbClr val="2DD4BF"/>
-                </a:solidFill>
-                <a:latin typeface="Calibri"/>
-              </a:rPr>
-              <a:t>—  </a:t>
-            </a:r>
-            <a:r>
-              <a:rPr sz="1400" b="1">
-                <a:solidFill>
-                  <a:srgbClr val="E2E8F0"/>
-                </a:solidFill>
-                <a:latin typeface="Calibri"/>
-              </a:rPr>
-              <a:t>Composition = versioning  </a:t>
-            </a:r>
-            <a:r>
-              <a:rPr sz="1400">
-                <a:solidFill>
-                  <a:srgbClr val="E2E8F0"/>
-                </a:solidFill>
-                <a:latin typeface="Calibri"/>
-              </a:rPr>
-              <a:t>each publish is a new layer; a stable stub references the approved one</a:t>
-            </a:r>
-          </a:p>
-          <a:p>
-            <a:pPr>
-              <a:spcBef>
-                <a:spcPts val="0"/>
-              </a:spcBef>
-              <a:spcAft>
-                <a:spcPts val="900"/>
-              </a:spcAft>
-            </a:pPr>
-            <a:r>
-              <a:rPr sz="1400" b="1">
-                <a:solidFill>
-                  <a:srgbClr val="2DD4BF"/>
-                </a:solidFill>
-                <a:latin typeface="Calibri"/>
-              </a:rPr>
-              <a:t>—  </a:t>
-            </a:r>
-            <a:r>
-              <a:rPr sz="1400" b="1">
-                <a:solidFill>
-                  <a:srgbClr val="E2E8F0"/>
-                </a:solidFill>
-                <a:latin typeface="Calibri"/>
-              </a:rPr>
-              <a:t>Asset resolution  </a:t>
-            </a:r>
-            <a:r>
-              <a:rPr sz="1400">
-                <a:solidFill>
-                  <a:srgbClr val="E2E8F0"/>
-                </a:solidFill>
-                <a:latin typeface="Calibri"/>
-              </a:rPr>
-              <a:t>a logical URI resolves to the right version (Ar 2.0, stretch goal)</a:t>
-            </a:r>
-          </a:p>
-          <a:p>
-            <a:pPr>
-              <a:spcBef>
-                <a:spcPts val="0"/>
-              </a:spcBef>
-              <a:spcAft>
-                <a:spcPts val="900"/>
-              </a:spcAft>
-            </a:pPr>
-            <a:r>
-              <a:rPr sz="1400" b="1">
-                <a:solidFill>
-                  <a:srgbClr val="2DD4BF"/>
-                </a:solidFill>
-                <a:latin typeface="Calibri"/>
-              </a:rPr>
-              <a:t>—  </a:t>
-            </a:r>
-            <a:r>
-              <a:rPr sz="1400" b="1">
-                <a:solidFill>
-                  <a:srgbClr val="E2E8F0"/>
-                </a:solidFill>
-                <a:latin typeface="Calibri"/>
-              </a:rPr>
-              <a:t>Rich data  </a:t>
-            </a:r>
-            <a:r>
-              <a:rPr sz="1400">
-                <a:solidFill>
-                  <a:srgbClr val="E2E8F0"/>
-                </a:solidFill>
-                <a:latin typeface="Calibri"/>
-              </a:rPr>
-              <a:t>hierarchy, materials (MaterialX), metadata travel with the asset</a:t>
-            </a:r>
-          </a:p>
-          <a:p>
-            <a:pPr>
-              <a:spcBef>
-                <a:spcPts val="0"/>
-              </a:spcBef>
-              <a:spcAft>
-                <a:spcPts val="900"/>
-              </a:spcAft>
-            </a:pPr>
-            <a:r>
-              <a:rPr sz="1400" b="1">
-                <a:solidFill>
-                  <a:srgbClr val="2DD4BF"/>
-                </a:solidFill>
-                <a:latin typeface="Calibri"/>
-              </a:rPr>
-              <a:t>—  </a:t>
-            </a:r>
-            <a:r>
-              <a:rPr sz="1400" b="1">
-                <a:solidFill>
-                  <a:srgbClr val="E2E8F0"/>
-                </a:solidFill>
-                <a:latin typeface="Calibri"/>
-              </a:rPr>
-              <a:t>Native per-DCC bridges  </a:t>
-            </a:r>
-            <a:r>
-              <a:rPr sz="1400">
-                <a:solidFill>
-                  <a:srgbClr val="E2E8F0"/>
-                </a:solidFill>
-                <a:latin typeface="Calibri"/>
-              </a:rPr>
-              <a:t>export/import via each tool’s own USD support</a:t>
+              <a:t>DCC clients  →  FastAPI server  →  versioned USD storage</a:t>
             </a:r>
           </a:p>
         </p:txBody>
@@ -6671,7 +6140,7 @@
         <p:spPr>
           <a:xfrm>
             <a:off x="822960" y="640080"/>
-            <a:ext cx="5486400" cy="274320"/>
+            <a:ext cx="7315200" cy="274320"/>
           </a:xfrm>
           <a:prstGeom prst="rect">
             <a:avLst/>
@@ -6695,11 +6164,11 @@
             <a:r>
               <a:rPr sz="1200" b="1" i="0" spc="200">
                 <a:solidFill>
-                  <a:srgbClr val="14B8A6"/>
+                  <a:srgbClr val="F59E0B"/>
                 </a:solidFill>
                 <a:latin typeface="Consolas"/>
               </a:rPr>
-              <a:t>AIMS &amp; OBJECTIVES</a:t>
+              <a:t>KEY CHALLENGES</a:t>
             </a:r>
           </a:p>
         </p:txBody>
@@ -6735,13 +6204,13 @@
               </a:spcAft>
             </a:pPr>
             <a:r>
-              <a:rPr sz="3200" b="1" i="0">
+              <a:rPr sz="3100" b="1" i="0">
                 <a:solidFill>
                   <a:srgbClr val="0F172A"/>
                 </a:solidFill>
                 <a:latin typeface="Georgia"/>
               </a:rPr>
-              <a:t>What the project sets out to do</a:t>
+              <a:t>What could be hard — and the plan</a:t>
             </a:r>
           </a:p>
         </p:txBody>
@@ -6754,8 +6223,8 @@
         </p:nvSpPr>
         <p:spPr>
           <a:xfrm>
-            <a:off x="822960" y="1965960"/>
-            <a:ext cx="3419856" cy="1600200"/>
+            <a:off x="822960" y="1920240"/>
+            <a:ext cx="5120640" cy="2011680"/>
           </a:xfrm>
           <a:prstGeom prst="roundRect">
             <a:avLst/>
@@ -6770,7 +6239,7 @@
           <a:effectLst>
             <a:outerShdw blurRad="90000" dist="40000" dir="5400000" rotWithShape="0">
               <a:srgbClr val="0F172A">
-                <a:alpha val="14000"/>
+                <a:alpha val="16000"/>
               </a:srgbClr>
             </a:outerShdw>
           </a:effectLst>
@@ -6799,14 +6268,58 @@
       </p:sp>
       <p:sp>
         <p:nvSpPr>
-          <p:cNvPr id="6" name="TextBox 5"/>
+          <p:cNvPr id="6" name="Rectangle 5"/>
+          <p:cNvSpPr/>
+          <p:nvPr/>
+        </p:nvSpPr>
+        <p:spPr>
+          <a:xfrm>
+            <a:off x="822960" y="1920240"/>
+            <a:ext cx="109728" cy="2011680"/>
+          </a:xfrm>
+          <a:prstGeom prst="rect">
+            <a:avLst/>
+          </a:prstGeom>
+          <a:solidFill>
+            <a:srgbClr val="F59E0B"/>
+          </a:solidFill>
+          <a:ln>
+            <a:noFill/>
+          </a:ln>
+          <a:effectLst/>
+        </p:spPr>
+        <p:style>
+          <a:lnRef idx="1">
+            <a:schemeClr val="accent1"/>
+          </a:lnRef>
+          <a:fillRef idx="3">
+            <a:schemeClr val="accent1"/>
+          </a:fillRef>
+          <a:effectRef idx="2">
+            <a:schemeClr val="accent1"/>
+          </a:effectRef>
+          <a:fontRef idx="minor">
+            <a:schemeClr val="lt1"/>
+          </a:fontRef>
+        </p:style>
+        <p:txBody>
+          <a:bodyPr rtlCol="0" anchor="ctr"/>
+          <a:lstStyle/>
+          <a:p>
+            <a:pPr algn="ctr"/>
+          </a:p>
+        </p:txBody>
+      </p:sp>
+      <p:sp>
+        <p:nvSpPr>
+          <p:cNvPr id="7" name="TextBox 6"/>
           <p:cNvSpPr txBox="1"/>
           <p:nvPr/>
         </p:nvSpPr>
         <p:spPr>
           <a:xfrm>
-            <a:off x="1143000" y="2194560"/>
-            <a:ext cx="1097280" cy="548640"/>
+            <a:off x="1188720" y="2194560"/>
+            <a:ext cx="4572000" cy="457200"/>
           </a:xfrm>
           <a:prstGeom prst="rect">
             <a:avLst/>
@@ -6828,27 +6341,27 @@
               </a:spcAft>
             </a:pPr>
             <a:r>
-              <a:rPr sz="2600" b="1" i="0">
-                <a:solidFill>
-                  <a:srgbClr val="14B8A6"/>
+              <a:rPr sz="1800" b="1" i="0">
+                <a:solidFill>
+                  <a:srgbClr val="0F172A"/>
                 </a:solidFill>
                 <a:latin typeface="Georgia"/>
               </a:rPr>
-              <a:t>01</a:t>
-            </a:r>
-          </a:p>
-        </p:txBody>
-      </p:sp>
-      <p:sp>
-        <p:nvSpPr>
-          <p:cNvPr id="7" name="TextBox 6"/>
+              <a:t>USD learning curve</a:t>
+            </a:r>
+          </a:p>
+        </p:txBody>
+      </p:sp>
+      <p:sp>
+        <p:nvSpPr>
+          <p:cNvPr id="8" name="TextBox 7"/>
           <p:cNvSpPr txBox="1"/>
           <p:nvPr/>
         </p:nvSpPr>
         <p:spPr>
           <a:xfrm>
-            <a:off x="1965960" y="2221991"/>
-            <a:ext cx="2103120" cy="457200"/>
+            <a:off x="1188720" y="2788920"/>
+            <a:ext cx="4572000" cy="1005840"/>
           </a:xfrm>
           <a:prstGeom prst="rect">
             <a:avLst/>
@@ -6870,55 +6383,13 @@
               </a:spcAft>
             </a:pPr>
             <a:r>
-              <a:rPr sz="1550" b="1" i="0">
-                <a:solidFill>
-                  <a:srgbClr val="0F172A"/>
+              <a:rPr sz="1400" b="0" i="0">
+                <a:solidFill>
+                  <a:srgbClr val="64748B"/>
                 </a:solidFill>
                 <a:latin typeface="Calibri"/>
               </a:rPr>
-              <a:t>Review existing pipelines</a:t>
-            </a:r>
-          </a:p>
-        </p:txBody>
-      </p:sp>
-      <p:sp>
-        <p:nvSpPr>
-          <p:cNvPr id="8" name="TextBox 7"/>
-          <p:cNvSpPr txBox="1"/>
-          <p:nvPr/>
-        </p:nvSpPr>
-        <p:spPr>
-          <a:xfrm>
-            <a:off x="1965960" y="2624328"/>
-            <a:ext cx="2148840" cy="868680"/>
-          </a:xfrm>
-          <a:prstGeom prst="rect">
-            <a:avLst/>
-          </a:prstGeom>
-          <a:noFill/>
-        </p:spPr>
-        <p:txBody>
-          <a:bodyPr wrap="square" anchor="t" lIns="0" rIns="0" tIns="0" bIns="0">
-            <a:spAutoFit/>
-          </a:bodyPr>
-          <a:lstStyle/>
-          <a:p>
-            <a:pPr algn="l">
-              <a:spcBef>
-                <a:spcPts val="0"/>
-              </a:spcBef>
-              <a:spcAft>
-                <a:spcPts val="400"/>
-              </a:spcAft>
-            </a:pPr>
-            <a:r>
-              <a:rPr sz="1250" b="0" i="0">
-                <a:solidFill>
-                  <a:srgbClr val="64748B"/>
-                </a:solidFill>
-                <a:latin typeface="Calibri"/>
-              </a:rPr>
-              <a:t>Large-studio tools, open-source (Kitsu, Prism) and USD pipelines — articulate the gap.</a:t>
+              <a:t>Powerful but complex. Mitigation: use prebuilt usd-core; a focused week-1 spike.</a:t>
             </a:r>
           </a:p>
         </p:txBody>
@@ -6931,8 +6402,8 @@
         </p:nvSpPr>
         <p:spPr>
           <a:xfrm>
-            <a:off x="4434840" y="1965960"/>
-            <a:ext cx="3419856" cy="1600200"/>
+            <a:off x="6263640" y="1920240"/>
+            <a:ext cx="5120640" cy="2011680"/>
           </a:xfrm>
           <a:prstGeom prst="roundRect">
             <a:avLst/>
@@ -6947,7 +6418,7 @@
           <a:effectLst>
             <a:outerShdw blurRad="90000" dist="40000" dir="5400000" rotWithShape="0">
               <a:srgbClr val="0F172A">
-                <a:alpha val="14000"/>
+                <a:alpha val="16000"/>
               </a:srgbClr>
             </a:outerShdw>
           </a:effectLst>
@@ -6976,14 +6447,58 @@
       </p:sp>
       <p:sp>
         <p:nvSpPr>
-          <p:cNvPr id="10" name="TextBox 9"/>
+          <p:cNvPr id="10" name="Rectangle 9"/>
+          <p:cNvSpPr/>
+          <p:nvPr/>
+        </p:nvSpPr>
+        <p:spPr>
+          <a:xfrm>
+            <a:off x="6263640" y="1920240"/>
+            <a:ext cx="109728" cy="2011680"/>
+          </a:xfrm>
+          <a:prstGeom prst="rect">
+            <a:avLst/>
+          </a:prstGeom>
+          <a:solidFill>
+            <a:srgbClr val="F59E0B"/>
+          </a:solidFill>
+          <a:ln>
+            <a:noFill/>
+          </a:ln>
+          <a:effectLst/>
+        </p:spPr>
+        <p:style>
+          <a:lnRef idx="1">
+            <a:schemeClr val="accent1"/>
+          </a:lnRef>
+          <a:fillRef idx="3">
+            <a:schemeClr val="accent1"/>
+          </a:fillRef>
+          <a:effectRef idx="2">
+            <a:schemeClr val="accent1"/>
+          </a:effectRef>
+          <a:fontRef idx="minor">
+            <a:schemeClr val="lt1"/>
+          </a:fontRef>
+        </p:style>
+        <p:txBody>
+          <a:bodyPr rtlCol="0" anchor="ctr"/>
+          <a:lstStyle/>
+          <a:p>
+            <a:pPr algn="ctr"/>
+          </a:p>
+        </p:txBody>
+      </p:sp>
+      <p:sp>
+        <p:nvSpPr>
+          <p:cNvPr id="11" name="TextBox 10"/>
           <p:cNvSpPr txBox="1"/>
           <p:nvPr/>
         </p:nvSpPr>
         <p:spPr>
           <a:xfrm>
-            <a:off x="4754880" y="2194560"/>
-            <a:ext cx="1097280" cy="548640"/>
+            <a:off x="6629400" y="2194560"/>
+            <a:ext cx="4572000" cy="457200"/>
           </a:xfrm>
           <a:prstGeom prst="rect">
             <a:avLst/>
@@ -7005,27 +6520,27 @@
               </a:spcAft>
             </a:pPr>
             <a:r>
-              <a:rPr sz="2600" b="1" i="0">
-                <a:solidFill>
-                  <a:srgbClr val="14B8A6"/>
+              <a:rPr sz="1800" b="1" i="0">
+                <a:solidFill>
+                  <a:srgbClr val="0F172A"/>
                 </a:solidFill>
                 <a:latin typeface="Georgia"/>
               </a:rPr>
-              <a:t>02</a:t>
-            </a:r>
-          </a:p>
-        </p:txBody>
-      </p:sp>
-      <p:sp>
-        <p:nvSpPr>
-          <p:cNvPr id="11" name="TextBox 10"/>
+              <a:t>Version resolution</a:t>
+            </a:r>
+          </a:p>
+        </p:txBody>
+      </p:sp>
+      <p:sp>
+        <p:nvSpPr>
+          <p:cNvPr id="12" name="TextBox 11"/>
           <p:cNvSpPr txBox="1"/>
           <p:nvPr/>
         </p:nvSpPr>
         <p:spPr>
           <a:xfrm>
-            <a:off x="5577840" y="2221991"/>
-            <a:ext cx="2103120" cy="457200"/>
+            <a:off x="6629400" y="2788920"/>
+            <a:ext cx="4572000" cy="1005840"/>
           </a:xfrm>
           <a:prstGeom prst="rect">
             <a:avLst/>
@@ -7047,55 +6562,13 @@
               </a:spcAft>
             </a:pPr>
             <a:r>
-              <a:rPr sz="1550" b="1" i="0">
-                <a:solidFill>
-                  <a:srgbClr val="0F172A"/>
+              <a:rPr sz="1400" b="0" i="0">
+                <a:solidFill>
+                  <a:srgbClr val="64748B"/>
                 </a:solidFill>
                 <a:latin typeface="Calibri"/>
               </a:rPr>
-              <a:t>Build a versioned server</a:t>
-            </a:r>
-          </a:p>
-        </p:txBody>
-      </p:sp>
-      <p:sp>
-        <p:nvSpPr>
-          <p:cNvPr id="12" name="TextBox 11"/>
-          <p:cNvSpPr txBox="1"/>
-          <p:nvPr/>
-        </p:nvSpPr>
-        <p:spPr>
-          <a:xfrm>
-            <a:off x="5577840" y="2624328"/>
-            <a:ext cx="2148840" cy="868680"/>
-          </a:xfrm>
-          <a:prstGeom prst="rect">
-            <a:avLst/>
-          </a:prstGeom>
-          <a:noFill/>
-        </p:spPr>
-        <p:txBody>
-          <a:bodyPr wrap="square" anchor="t" lIns="0" rIns="0" tIns="0" bIns="0">
-            <a:spAutoFit/>
-          </a:bodyPr>
-          <a:lstStyle/>
-          <a:p>
-            <a:pPr algn="l">
-              <a:spcBef>
-                <a:spcPts val="0"/>
-              </a:spcBef>
-              <a:spcAft>
-                <a:spcPts val="400"/>
-              </a:spcAft>
-            </a:pPr>
-            <a:r>
-              <a:rPr sz="1250" b="0" i="0">
-                <a:solidFill>
-                  <a:srgbClr val="64748B"/>
-                </a:solidFill>
-                <a:latin typeface="Calibri"/>
-              </a:rPr>
-              <a:t>Authenticated, versioned USD storage with an “approved” state.</a:t>
+              <a:t>A full custom USD resolver is large. Fallback: resolve versions server-side.</a:t>
             </a:r>
           </a:p>
         </p:txBody>
@@ -7108,8 +6581,8 @@
         </p:nvSpPr>
         <p:spPr>
           <a:xfrm>
-            <a:off x="8046720" y="1965960"/>
-            <a:ext cx="3419856" cy="1600200"/>
+            <a:off x="822960" y="4114800"/>
+            <a:ext cx="5120640" cy="2011680"/>
           </a:xfrm>
           <a:prstGeom prst="roundRect">
             <a:avLst/>
@@ -7124,7 +6597,7 @@
           <a:effectLst>
             <a:outerShdw blurRad="90000" dist="40000" dir="5400000" rotWithShape="0">
               <a:srgbClr val="0F172A">
-                <a:alpha val="14000"/>
+                <a:alpha val="16000"/>
               </a:srgbClr>
             </a:outerShdw>
           </a:effectLst>
@@ -7153,14 +6626,58 @@
       </p:sp>
       <p:sp>
         <p:nvSpPr>
-          <p:cNvPr id="14" name="TextBox 13"/>
+          <p:cNvPr id="14" name="Rectangle 13"/>
+          <p:cNvSpPr/>
+          <p:nvPr/>
+        </p:nvSpPr>
+        <p:spPr>
+          <a:xfrm>
+            <a:off x="822960" y="4114800"/>
+            <a:ext cx="109728" cy="2011680"/>
+          </a:xfrm>
+          <a:prstGeom prst="rect">
+            <a:avLst/>
+          </a:prstGeom>
+          <a:solidFill>
+            <a:srgbClr val="F59E0B"/>
+          </a:solidFill>
+          <a:ln>
+            <a:noFill/>
+          </a:ln>
+          <a:effectLst/>
+        </p:spPr>
+        <p:style>
+          <a:lnRef idx="1">
+            <a:schemeClr val="accent1"/>
+          </a:lnRef>
+          <a:fillRef idx="3">
+            <a:schemeClr val="accent1"/>
+          </a:fillRef>
+          <a:effectRef idx="2">
+            <a:schemeClr val="accent1"/>
+          </a:effectRef>
+          <a:fontRef idx="minor">
+            <a:schemeClr val="lt1"/>
+          </a:fontRef>
+        </p:style>
+        <p:txBody>
+          <a:bodyPr rtlCol="0" anchor="ctr"/>
+          <a:lstStyle/>
+          <a:p>
+            <a:pPr algn="ctr"/>
+          </a:p>
+        </p:txBody>
+      </p:sp>
+      <p:sp>
+        <p:nvSpPr>
+          <p:cNvPr id="15" name="TextBox 14"/>
           <p:cNvSpPr txBox="1"/>
           <p:nvPr/>
         </p:nvSpPr>
         <p:spPr>
           <a:xfrm>
-            <a:off x="8366760" y="2194560"/>
-            <a:ext cx="1097280" cy="548640"/>
+            <a:off x="1188720" y="4389120"/>
+            <a:ext cx="4572000" cy="457200"/>
           </a:xfrm>
           <a:prstGeom prst="rect">
             <a:avLst/>
@@ -7182,27 +6699,27 @@
               </a:spcAft>
             </a:pPr>
             <a:r>
-              <a:rPr sz="2600" b="1" i="0">
-                <a:solidFill>
-                  <a:srgbClr val="14B8A6"/>
+              <a:rPr sz="1800" b="1" i="0">
+                <a:solidFill>
+                  <a:srgbClr val="0F172A"/>
                 </a:solidFill>
                 <a:latin typeface="Georgia"/>
               </a:rPr>
-              <a:t>03</a:t>
-            </a:r>
-          </a:p>
-        </p:txBody>
-      </p:sp>
-      <p:sp>
-        <p:nvSpPr>
-          <p:cNvPr id="15" name="TextBox 14"/>
+              <a:t>Persistent file storage</a:t>
+            </a:r>
+          </a:p>
+        </p:txBody>
+      </p:sp>
+      <p:sp>
+        <p:nvSpPr>
+          <p:cNvPr id="16" name="TextBox 15"/>
           <p:cNvSpPr txBox="1"/>
           <p:nvPr/>
         </p:nvSpPr>
         <p:spPr>
           <a:xfrm>
-            <a:off x="9189720" y="2221991"/>
-            <a:ext cx="2103120" cy="457200"/>
+            <a:off x="1188720" y="4983480"/>
+            <a:ext cx="4572000" cy="1005840"/>
           </a:xfrm>
           <a:prstGeom prst="rect">
             <a:avLst/>
@@ -7224,55 +6741,13 @@
               </a:spcAft>
             </a:pPr>
             <a:r>
-              <a:rPr sz="1550" b="1" i="0">
-                <a:solidFill>
-                  <a:srgbClr val="0F172A"/>
+              <a:rPr sz="1400" b="0" i="0">
+                <a:solidFill>
+                  <a:srgbClr val="64748B"/>
                 </a:solidFill>
                 <a:latin typeface="Calibri"/>
               </a:rPr>
-              <a:t>Two DCC clients</a:t>
-            </a:r>
-          </a:p>
-        </p:txBody>
-      </p:sp>
-      <p:sp>
-        <p:nvSpPr>
-          <p:cNvPr id="16" name="TextBox 15"/>
-          <p:cNvSpPr txBox="1"/>
-          <p:nvPr/>
-        </p:nvSpPr>
-        <p:spPr>
-          <a:xfrm>
-            <a:off x="9189720" y="2624328"/>
-            <a:ext cx="2148840" cy="868680"/>
-          </a:xfrm>
-          <a:prstGeom prst="rect">
-            <a:avLst/>
-          </a:prstGeom>
-          <a:noFill/>
-        </p:spPr>
-        <p:txBody>
-          <a:bodyPr wrap="square" anchor="t" lIns="0" rIns="0" tIns="0" bIns="0">
-            <a:spAutoFit/>
-          </a:bodyPr>
-          <a:lstStyle/>
-          <a:p>
-            <a:pPr algn="l">
-              <a:spcBef>
-                <a:spcPts val="0"/>
-              </a:spcBef>
-              <a:spcAft>
-                <a:spcPts val="400"/>
-              </a:spcAft>
-            </a:pPr>
-            <a:r>
-              <a:rPr sz="1250" b="0" i="0">
-                <a:solidFill>
-                  <a:srgbClr val="64748B"/>
-                </a:solidFill>
-                <a:latin typeface="Calibri"/>
-              </a:rPr>
-              <a:t>USD publish / consume in Maya and Houdini.</a:t>
+              <a:t>Cloud disks are ephemeral. Move assets to object storage (S3 / GridFS).</a:t>
             </a:r>
           </a:p>
         </p:txBody>
@@ -7285,8 +6760,8 @@
         </p:nvSpPr>
         <p:spPr>
           <a:xfrm>
-            <a:off x="822960" y="3749039"/>
-            <a:ext cx="3419856" cy="1600200"/>
+            <a:off x="6263640" y="4114800"/>
+            <a:ext cx="5120640" cy="2011680"/>
           </a:xfrm>
           <a:prstGeom prst="roundRect">
             <a:avLst/>
@@ -7301,7 +6776,7 @@
           <a:effectLst>
             <a:outerShdw blurRad="90000" dist="40000" dir="5400000" rotWithShape="0">
               <a:srgbClr val="0F172A">
-                <a:alpha val="14000"/>
+                <a:alpha val="16000"/>
               </a:srgbClr>
             </a:outerShdw>
           </a:effectLst>
@@ -7330,14 +6805,58 @@
       </p:sp>
       <p:sp>
         <p:nvSpPr>
-          <p:cNvPr id="18" name="TextBox 17"/>
+          <p:cNvPr id="18" name="Rectangle 17"/>
+          <p:cNvSpPr/>
+          <p:nvPr/>
+        </p:nvSpPr>
+        <p:spPr>
+          <a:xfrm>
+            <a:off x="6263640" y="4114800"/>
+            <a:ext cx="109728" cy="2011680"/>
+          </a:xfrm>
+          <a:prstGeom prst="rect">
+            <a:avLst/>
+          </a:prstGeom>
+          <a:solidFill>
+            <a:srgbClr val="F59E0B"/>
+          </a:solidFill>
+          <a:ln>
+            <a:noFill/>
+          </a:ln>
+          <a:effectLst/>
+        </p:spPr>
+        <p:style>
+          <a:lnRef idx="1">
+            <a:schemeClr val="accent1"/>
+          </a:lnRef>
+          <a:fillRef idx="3">
+            <a:schemeClr val="accent1"/>
+          </a:fillRef>
+          <a:effectRef idx="2">
+            <a:schemeClr val="accent1"/>
+          </a:effectRef>
+          <a:fontRef idx="minor">
+            <a:schemeClr val="lt1"/>
+          </a:fontRef>
+        </p:style>
+        <p:txBody>
+          <a:bodyPr rtlCol="0" anchor="ctr"/>
+          <a:lstStyle/>
+          <a:p>
+            <a:pPr algn="ctr"/>
+          </a:p>
+        </p:txBody>
+      </p:sp>
+      <p:sp>
+        <p:nvSpPr>
+          <p:cNvPr id="19" name="TextBox 18"/>
           <p:cNvSpPr txBox="1"/>
           <p:nvPr/>
         </p:nvSpPr>
         <p:spPr>
           <a:xfrm>
-            <a:off x="1143000" y="3977639"/>
-            <a:ext cx="1097280" cy="548640"/>
+            <a:off x="6629400" y="4389120"/>
+            <a:ext cx="4572000" cy="457200"/>
           </a:xfrm>
           <a:prstGeom prst="rect">
             <a:avLst/>
@@ -7359,27 +6878,27 @@
               </a:spcAft>
             </a:pPr>
             <a:r>
-              <a:rPr sz="2600" b="1" i="0">
-                <a:solidFill>
-                  <a:srgbClr val="14B8A6"/>
+              <a:rPr sz="1800" b="1" i="0">
+                <a:solidFill>
+                  <a:srgbClr val="0F172A"/>
                 </a:solidFill>
                 <a:latin typeface="Georgia"/>
               </a:rPr>
-              <a:t>04</a:t>
-            </a:r>
-          </a:p>
-        </p:txBody>
-      </p:sp>
-      <p:sp>
-        <p:nvSpPr>
-          <p:cNvPr id="19" name="TextBox 18"/>
+              <a:t>Recruiting test artists</a:t>
+            </a:r>
+          </a:p>
+        </p:txBody>
+      </p:sp>
+      <p:sp>
+        <p:nvSpPr>
+          <p:cNvPr id="20" name="TextBox 19"/>
           <p:cNvSpPr txBox="1"/>
           <p:nvPr/>
         </p:nvSpPr>
         <p:spPr>
           <a:xfrm>
-            <a:off x="1965960" y="4005072"/>
-            <a:ext cx="2103120" cy="457200"/>
+            <a:off x="6629400" y="4983480"/>
+            <a:ext cx="4572000" cy="1005840"/>
           </a:xfrm>
           <a:prstGeom prst="rect">
             <a:avLst/>
@@ -7401,409 +6920,13 @@
               </a:spcAft>
             </a:pPr>
             <a:r>
-              <a:rPr sz="1550" b="1" i="0">
-                <a:solidFill>
-                  <a:srgbClr val="0F172A"/>
+              <a:rPr sz="1400" b="0" i="0">
+                <a:solidFill>
+                  <a:srgbClr val="64748B"/>
                 </a:solidFill>
                 <a:latin typeface="Calibri"/>
               </a:rPr>
-              <a:t>Real versioning</a:t>
-            </a:r>
-          </a:p>
-        </p:txBody>
-      </p:sp>
-      <p:sp>
-        <p:nvSpPr>
-          <p:cNvPr id="20" name="TextBox 19"/>
-          <p:cNvSpPr txBox="1"/>
-          <p:nvPr/>
-        </p:nvSpPr>
-        <p:spPr>
-          <a:xfrm>
-            <a:off x="1965960" y="4407407"/>
-            <a:ext cx="2148840" cy="868680"/>
-          </a:xfrm>
-          <a:prstGeom prst="rect">
-            <a:avLst/>
-          </a:prstGeom>
-          <a:noFill/>
-        </p:spPr>
-        <p:txBody>
-          <a:bodyPr wrap="square" anchor="t" lIns="0" rIns="0" tIns="0" bIns="0">
-            <a:spAutoFit/>
-          </a:bodyPr>
-          <a:lstStyle/>
-          <a:p>
-            <a:pPr algn="l">
-              <a:spcBef>
-                <a:spcPts val="0"/>
-              </a:spcBef>
-              <a:spcAft>
-                <a:spcPts val="400"/>
-              </a:spcAft>
-            </a:pPr>
-            <a:r>
-              <a:rPr sz="1250" b="0" i="0">
-                <a:solidFill>
-                  <a:srgbClr val="64748B"/>
-                </a:solidFill>
-                <a:latin typeface="Calibri"/>
-              </a:rPr>
-              <a:t>Consume “latest approved” or a pinned version.</a:t>
-            </a:r>
-          </a:p>
-        </p:txBody>
-      </p:sp>
-      <p:sp>
-        <p:nvSpPr>
-          <p:cNvPr id="21" name="Rounded Rectangle 20"/>
-          <p:cNvSpPr/>
-          <p:nvPr/>
-        </p:nvSpPr>
-        <p:spPr>
-          <a:xfrm>
-            <a:off x="4434840" y="3749039"/>
-            <a:ext cx="3419856" cy="1600200"/>
-          </a:xfrm>
-          <a:prstGeom prst="roundRect">
-            <a:avLst/>
-          </a:prstGeom>
-          <a:solidFill>
-            <a:srgbClr val="F1F5F9"/>
-          </a:solidFill>
-          <a:ln>
-            <a:noFill/>
-          </a:ln>
-          <a:effectLst/>
-          <a:effectLst>
-            <a:outerShdw blurRad="90000" dist="40000" dir="5400000" rotWithShape="0">
-              <a:srgbClr val="0F172A">
-                <a:alpha val="14000"/>
-              </a:srgbClr>
-            </a:outerShdw>
-          </a:effectLst>
-        </p:spPr>
-        <p:style>
-          <a:lnRef idx="1">
-            <a:schemeClr val="accent1"/>
-          </a:lnRef>
-          <a:fillRef idx="3">
-            <a:schemeClr val="accent1"/>
-          </a:fillRef>
-          <a:effectRef idx="2">
-            <a:schemeClr val="accent1"/>
-          </a:effectRef>
-          <a:fontRef idx="minor">
-            <a:schemeClr val="lt1"/>
-          </a:fontRef>
-        </p:style>
-        <p:txBody>
-          <a:bodyPr rtlCol="0" anchor="ctr"/>
-          <a:lstStyle/>
-          <a:p>
-            <a:pPr algn="ctr"/>
-          </a:p>
-        </p:txBody>
-      </p:sp>
-      <p:sp>
-        <p:nvSpPr>
-          <p:cNvPr id="22" name="TextBox 21"/>
-          <p:cNvSpPr txBox="1"/>
-          <p:nvPr/>
-        </p:nvSpPr>
-        <p:spPr>
-          <a:xfrm>
-            <a:off x="4754880" y="3977639"/>
-            <a:ext cx="1097280" cy="548640"/>
-          </a:xfrm>
-          <a:prstGeom prst="rect">
-            <a:avLst/>
-          </a:prstGeom>
-          <a:noFill/>
-        </p:spPr>
-        <p:txBody>
-          <a:bodyPr wrap="square" anchor="t" lIns="0" rIns="0" tIns="0" bIns="0">
-            <a:spAutoFit/>
-          </a:bodyPr>
-          <a:lstStyle/>
-          <a:p>
-            <a:pPr algn="l">
-              <a:spcBef>
-                <a:spcPts val="0"/>
-              </a:spcBef>
-              <a:spcAft>
-                <a:spcPts val="400"/>
-              </a:spcAft>
-            </a:pPr>
-            <a:r>
-              <a:rPr sz="2600" b="1" i="0">
-                <a:solidFill>
-                  <a:srgbClr val="14B8A6"/>
-                </a:solidFill>
-                <a:latin typeface="Georgia"/>
-              </a:rPr>
-              <a:t>05</a:t>
-            </a:r>
-          </a:p>
-        </p:txBody>
-      </p:sp>
-      <p:sp>
-        <p:nvSpPr>
-          <p:cNvPr id="23" name="TextBox 22"/>
-          <p:cNvSpPr txBox="1"/>
-          <p:nvPr/>
-        </p:nvSpPr>
-        <p:spPr>
-          <a:xfrm>
-            <a:off x="5577840" y="4005072"/>
-            <a:ext cx="2103120" cy="457200"/>
-          </a:xfrm>
-          <a:prstGeom prst="rect">
-            <a:avLst/>
-          </a:prstGeom>
-          <a:noFill/>
-        </p:spPr>
-        <p:txBody>
-          <a:bodyPr wrap="square" anchor="t" lIns="0" rIns="0" tIns="0" bIns="0">
-            <a:spAutoFit/>
-          </a:bodyPr>
-          <a:lstStyle/>
-          <a:p>
-            <a:pPr algn="l">
-              <a:spcBef>
-                <a:spcPts val="0"/>
-              </a:spcBef>
-              <a:spcAft>
-                <a:spcPts val="400"/>
-              </a:spcAft>
-            </a:pPr>
-            <a:r>
-              <a:rPr sz="1550" b="1" i="0">
-                <a:solidFill>
-                  <a:srgbClr val="0F172A"/>
-                </a:solidFill>
-                <a:latin typeface="Calibri"/>
-              </a:rPr>
-              <a:t>Evaluate with artists</a:t>
-            </a:r>
-          </a:p>
-        </p:txBody>
-      </p:sp>
-      <p:sp>
-        <p:nvSpPr>
-          <p:cNvPr id="24" name="TextBox 23"/>
-          <p:cNvSpPr txBox="1"/>
-          <p:nvPr/>
-        </p:nvSpPr>
-        <p:spPr>
-          <a:xfrm>
-            <a:off x="5577840" y="4407407"/>
-            <a:ext cx="2148840" cy="868680"/>
-          </a:xfrm>
-          <a:prstGeom prst="rect">
-            <a:avLst/>
-          </a:prstGeom>
-          <a:noFill/>
-        </p:spPr>
-        <p:txBody>
-          <a:bodyPr wrap="square" anchor="t" lIns="0" rIns="0" tIns="0" bIns="0">
-            <a:spAutoFit/>
-          </a:bodyPr>
-          <a:lstStyle/>
-          <a:p>
-            <a:pPr algn="l">
-              <a:spcBef>
-                <a:spcPts val="0"/>
-              </a:spcBef>
-              <a:spcAft>
-                <a:spcPts val="400"/>
-              </a:spcAft>
-            </a:pPr>
-            <a:r>
-              <a:rPr sz="1250" b="0" i="0">
-                <a:solidFill>
-                  <a:srgbClr val="64748B"/>
-                </a:solidFill>
-                <a:latin typeface="Calibri"/>
-              </a:rPr>
-              <a:t>Task-based study, SUS questionnaire, comparison vs manual workflow.</a:t>
-            </a:r>
-          </a:p>
-        </p:txBody>
-      </p:sp>
-      <p:sp>
-        <p:nvSpPr>
-          <p:cNvPr id="25" name="Rounded Rectangle 24"/>
-          <p:cNvSpPr/>
-          <p:nvPr/>
-        </p:nvSpPr>
-        <p:spPr>
-          <a:xfrm>
-            <a:off x="8046720" y="3749039"/>
-            <a:ext cx="3419856" cy="1600200"/>
-          </a:xfrm>
-          <a:prstGeom prst="roundRect">
-            <a:avLst/>
-          </a:prstGeom>
-          <a:solidFill>
-            <a:srgbClr val="F1F5F9"/>
-          </a:solidFill>
-          <a:ln>
-            <a:noFill/>
-          </a:ln>
-          <a:effectLst/>
-          <a:effectLst>
-            <a:outerShdw blurRad="90000" dist="40000" dir="5400000" rotWithShape="0">
-              <a:srgbClr val="0F172A">
-                <a:alpha val="14000"/>
-              </a:srgbClr>
-            </a:outerShdw>
-          </a:effectLst>
-        </p:spPr>
-        <p:style>
-          <a:lnRef idx="1">
-            <a:schemeClr val="accent1"/>
-          </a:lnRef>
-          <a:fillRef idx="3">
-            <a:schemeClr val="accent1"/>
-          </a:fillRef>
-          <a:effectRef idx="2">
-            <a:schemeClr val="accent1"/>
-          </a:effectRef>
-          <a:fontRef idx="minor">
-            <a:schemeClr val="lt1"/>
-          </a:fontRef>
-        </p:style>
-        <p:txBody>
-          <a:bodyPr rtlCol="0" anchor="ctr"/>
-          <a:lstStyle/>
-          <a:p>
-            <a:pPr algn="ctr"/>
-          </a:p>
-        </p:txBody>
-      </p:sp>
-      <p:sp>
-        <p:nvSpPr>
-          <p:cNvPr id="26" name="TextBox 25"/>
-          <p:cNvSpPr txBox="1"/>
-          <p:nvPr/>
-        </p:nvSpPr>
-        <p:spPr>
-          <a:xfrm>
-            <a:off x="8366760" y="3977639"/>
-            <a:ext cx="1097280" cy="548640"/>
-          </a:xfrm>
-          <a:prstGeom prst="rect">
-            <a:avLst/>
-          </a:prstGeom>
-          <a:noFill/>
-        </p:spPr>
-        <p:txBody>
-          <a:bodyPr wrap="square" anchor="t" lIns="0" rIns="0" tIns="0" bIns="0">
-            <a:spAutoFit/>
-          </a:bodyPr>
-          <a:lstStyle/>
-          <a:p>
-            <a:pPr algn="l">
-              <a:spcBef>
-                <a:spcPts val="0"/>
-              </a:spcBef>
-              <a:spcAft>
-                <a:spcPts val="400"/>
-              </a:spcAft>
-            </a:pPr>
-            <a:r>
-              <a:rPr sz="2600" b="1" i="0">
-                <a:solidFill>
-                  <a:srgbClr val="14B8A6"/>
-                </a:solidFill>
-                <a:latin typeface="Georgia"/>
-              </a:rPr>
-              <a:t>06</a:t>
-            </a:r>
-          </a:p>
-        </p:txBody>
-      </p:sp>
-      <p:sp>
-        <p:nvSpPr>
-          <p:cNvPr id="27" name="TextBox 26"/>
-          <p:cNvSpPr txBox="1"/>
-          <p:nvPr/>
-        </p:nvSpPr>
-        <p:spPr>
-          <a:xfrm>
-            <a:off x="9189720" y="4005072"/>
-            <a:ext cx="2103120" cy="457200"/>
-          </a:xfrm>
-          <a:prstGeom prst="rect">
-            <a:avLst/>
-          </a:prstGeom>
-          <a:noFill/>
-        </p:spPr>
-        <p:txBody>
-          <a:bodyPr wrap="square" anchor="t" lIns="0" rIns="0" tIns="0" bIns="0">
-            <a:spAutoFit/>
-          </a:bodyPr>
-          <a:lstStyle/>
-          <a:p>
-            <a:pPr algn="l">
-              <a:spcBef>
-                <a:spcPts val="0"/>
-              </a:spcBef>
-              <a:spcAft>
-                <a:spcPts val="400"/>
-              </a:spcAft>
-            </a:pPr>
-            <a:r>
-              <a:rPr sz="1550" b="1" i="0">
-                <a:solidFill>
-                  <a:srgbClr val="0F172A"/>
-                </a:solidFill>
-                <a:latin typeface="Calibri"/>
-              </a:rPr>
-              <a:t>Deploy properly</a:t>
-            </a:r>
-          </a:p>
-        </p:txBody>
-      </p:sp>
-      <p:sp>
-        <p:nvSpPr>
-          <p:cNvPr id="28" name="TextBox 27"/>
-          <p:cNvSpPr txBox="1"/>
-          <p:nvPr/>
-        </p:nvSpPr>
-        <p:spPr>
-          <a:xfrm>
-            <a:off x="9189720" y="4407407"/>
-            <a:ext cx="2148840" cy="868680"/>
-          </a:xfrm>
-          <a:prstGeom prst="rect">
-            <a:avLst/>
-          </a:prstGeom>
-          <a:noFill/>
-        </p:spPr>
-        <p:txBody>
-          <a:bodyPr wrap="square" anchor="t" lIns="0" rIns="0" tIns="0" bIns="0">
-            <a:spAutoFit/>
-          </a:bodyPr>
-          <a:lstStyle/>
-          <a:p>
-            <a:pPr algn="l">
-              <a:spcBef>
-                <a:spcPts val="0"/>
-              </a:spcBef>
-              <a:spcAft>
-                <a:spcPts val="400"/>
-              </a:spcAft>
-            </a:pPr>
-            <a:r>
-              <a:rPr sz="1250" b="0" i="0">
-                <a:solidFill>
-                  <a:srgbClr val="64748B"/>
-                </a:solidFill>
-                <a:latin typeface="Calibri"/>
-              </a:rPr>
-              <a:t>Docker, CI, and a documented setup beyond localhost.</a:t>
+              <a:t>Studies need participants. Recruit from the NCCA cohort; keep tasks short.</a:t>
             </a:r>
           </a:p>
         </p:txBody>
@@ -7841,7 +6964,7 @@
             <a:avLst/>
           </a:prstGeom>
           <a:solidFill>
-            <a:srgbClr val="FFFFFF"/>
+            <a:srgbClr val="0E1628"/>
           </a:solidFill>
           <a:ln>
             <a:noFill/>
@@ -7879,7 +7002,7 @@
         <p:spPr>
           <a:xfrm>
             <a:off x="822960" y="640080"/>
-            <a:ext cx="5486400" cy="274320"/>
+            <a:ext cx="7315200" cy="274320"/>
           </a:xfrm>
           <a:prstGeom prst="rect">
             <a:avLst/>
@@ -7903,11 +7026,11 @@
             <a:r>
               <a:rPr sz="1200" b="1" i="0" spc="200">
                 <a:solidFill>
-                  <a:srgbClr val="14B8A6"/>
+                  <a:srgbClr val="2DD4BF"/>
                 </a:solidFill>
                 <a:latin typeface="Consolas"/>
               </a:rPr>
-              <a:t>METHODOLOGY</a:t>
+              <a:t>REFERENCES &amp; SUPPORTING MATERIAL</a:t>
             </a:r>
           </a:p>
         </p:txBody>
@@ -7921,7 +7044,7 @@
         <p:spPr>
           <a:xfrm>
             <a:off x="822960" y="960120"/>
-            <a:ext cx="10789920" cy="731520"/>
+            <a:ext cx="10515600" cy="731520"/>
           </a:xfrm>
           <a:prstGeom prst="rect">
             <a:avLst/>
@@ -7943,78 +7066,27 @@
               </a:spcAft>
             </a:pPr>
             <a:r>
-              <a:rPr sz="3000" b="1" i="0">
-                <a:solidFill>
-                  <a:srgbClr val="0F172A"/>
+              <a:rPr sz="3100" b="1" i="0">
+                <a:solidFill>
+                  <a:srgbClr val="FFFFFF"/>
                 </a:solidFill>
                 <a:latin typeface="Georgia"/>
               </a:rPr>
-              <a:t>Design-and-build, with an empirical evaluation</a:t>
-            </a:r>
-          </a:p>
-        </p:txBody>
-      </p:sp>
-      <p:sp>
-        <p:nvSpPr>
-          <p:cNvPr id="5" name="Rounded Rectangle 4"/>
-          <p:cNvSpPr/>
-          <p:nvPr/>
-        </p:nvSpPr>
-        <p:spPr>
-          <a:xfrm>
-            <a:off x="822960" y="2148840"/>
-            <a:ext cx="2926080" cy="1691640"/>
-          </a:xfrm>
-          <a:prstGeom prst="roundRect">
-            <a:avLst/>
-          </a:prstGeom>
-          <a:solidFill>
-            <a:srgbClr val="F1F5F9"/>
-          </a:solidFill>
-          <a:ln>
-            <a:noFill/>
-          </a:ln>
-          <a:effectLst/>
-          <a:effectLst>
-            <a:outerShdw blurRad="90000" dist="40000" dir="5400000" rotWithShape="0">
-              <a:srgbClr val="0F172A">
-                <a:alpha val="14000"/>
-              </a:srgbClr>
-            </a:outerShdw>
-          </a:effectLst>
-        </p:spPr>
-        <p:style>
-          <a:lnRef idx="1">
-            <a:schemeClr val="accent1"/>
-          </a:lnRef>
-          <a:fillRef idx="3">
-            <a:schemeClr val="accent1"/>
-          </a:fillRef>
-          <a:effectRef idx="2">
-            <a:schemeClr val="accent1"/>
-          </a:effectRef>
-          <a:fontRef idx="minor">
-            <a:schemeClr val="lt1"/>
-          </a:fontRef>
-        </p:style>
-        <p:txBody>
-          <a:bodyPr rtlCol="0" anchor="ctr"/>
-          <a:lstStyle/>
-          <a:p>
-            <a:pPr algn="ctr"/>
-          </a:p>
-        </p:txBody>
-      </p:sp>
-      <p:sp>
-        <p:nvSpPr>
-          <p:cNvPr id="6" name="TextBox 5"/>
+              <a:t>References</a:t>
+            </a:r>
+          </a:p>
+        </p:txBody>
+      </p:sp>
+      <p:sp>
+        <p:nvSpPr>
+          <p:cNvPr id="5" name="TextBox 4"/>
           <p:cNvSpPr txBox="1"/>
           <p:nvPr/>
         </p:nvSpPr>
         <p:spPr>
           <a:xfrm>
-            <a:off x="822960" y="2532888"/>
-            <a:ext cx="2926080" cy="457200"/>
+            <a:off x="822960" y="2011680"/>
+            <a:ext cx="10607040" cy="3291840"/>
           </a:xfrm>
           <a:prstGeom prst="rect">
             <a:avLst/>
@@ -8022,542 +7094,207 @@
           <a:noFill/>
         </p:spPr>
         <p:txBody>
-          <a:bodyPr wrap="square" anchor="t" lIns="0" rIns="0" tIns="0" bIns="0">
+          <a:bodyPr wrap="square" lIns="0" rIns="0" tIns="0" bIns="0">
             <a:spAutoFit/>
           </a:bodyPr>
           <a:lstStyle/>
           <a:p>
-            <a:pPr algn="ctr">
+            <a:pPr>
               <a:spcBef>
                 <a:spcPts val="0"/>
               </a:spcBef>
               <a:spcAft>
-                <a:spcPts val="400"/>
+                <a:spcPts val="1400"/>
               </a:spcAft>
             </a:pPr>
             <a:r>
-              <a:rPr sz="1600" b="1" i="0">
-                <a:solidFill>
-                  <a:srgbClr val="0F172A"/>
+              <a:rPr sz="1550" b="1">
+                <a:solidFill>
+                  <a:srgbClr val="2DD4BF"/>
                 </a:solidFill>
                 <a:latin typeface="Calibri"/>
               </a:rPr>
-              <a:t>DCC Clients</a:t>
-            </a:r>
-          </a:p>
-        </p:txBody>
-      </p:sp>
-      <p:sp>
-        <p:nvSpPr>
-          <p:cNvPr id="7" name="TextBox 6"/>
-          <p:cNvSpPr txBox="1"/>
-          <p:nvPr/>
-        </p:nvSpPr>
-        <p:spPr>
-          <a:xfrm>
-            <a:off x="822960" y="3017520"/>
-            <a:ext cx="2926080" cy="731520"/>
-          </a:xfrm>
-          <a:prstGeom prst="rect">
-            <a:avLst/>
-          </a:prstGeom>
-          <a:noFill/>
-        </p:spPr>
-        <p:txBody>
-          <a:bodyPr wrap="square" anchor="t" lIns="0" rIns="0" tIns="0" bIns="0">
-            <a:spAutoFit/>
-          </a:bodyPr>
-          <a:lstStyle/>
-          <a:p>
-            <a:pPr algn="ctr">
+              <a:t>—  </a:t>
+            </a:r>
+            <a:r>
+              <a:rPr sz="1550" b="1">
+                <a:solidFill>
+                  <a:srgbClr val="E2E8F0"/>
+                </a:solidFill>
+                <a:latin typeface="Calibri"/>
+              </a:rPr>
+              <a:t>OpenUSD </a:t>
+            </a:r>
+            <a:r>
+              <a:rPr sz="1550">
+                <a:solidFill>
+                  <a:srgbClr val="E2E8F0"/>
+                </a:solidFill>
+                <a:latin typeface="Calibri"/>
+              </a:rPr>
+              <a:t>— Pixar / Alliance for OpenUSD (AOUSD) documentation &amp; specification</a:t>
+            </a:r>
+          </a:p>
+          <a:p>
+            <a:pPr>
               <a:spcBef>
                 <a:spcPts val="0"/>
               </a:spcBef>
               <a:spcAft>
-                <a:spcPts val="200"/>
+                <a:spcPts val="1400"/>
               </a:spcAft>
             </a:pPr>
             <a:r>
-              <a:rPr sz="1200" b="0" i="0">
-                <a:solidFill>
-                  <a:srgbClr val="64748B"/>
+              <a:rPr sz="1550" b="1">
+                <a:solidFill>
+                  <a:srgbClr val="2DD4BF"/>
                 </a:solidFill>
                 <a:latin typeface="Calibri"/>
               </a:rPr>
-              <a:t>Maya + Houdini</a:t>
-            </a:r>
-          </a:p>
-          <a:p>
-            <a:pPr algn="ctr">
+              <a:t>—  </a:t>
+            </a:r>
+            <a:r>
+              <a:rPr sz="1550" b="1">
+                <a:solidFill>
+                  <a:srgbClr val="E2E8F0"/>
+                </a:solidFill>
+                <a:latin typeface="Calibri"/>
+              </a:rPr>
+              <a:t>NVIDIA Omniverse </a:t>
+            </a:r>
+            <a:r>
+              <a:rPr sz="1550">
+                <a:solidFill>
+                  <a:srgbClr val="E2E8F0"/>
+                </a:solidFill>
+                <a:latin typeface="Calibri"/>
+              </a:rPr>
+              <a:t>— OpenUSD pipeline resources and tooling</a:t>
+            </a:r>
+          </a:p>
+          <a:p>
+            <a:pPr>
               <a:spcBef>
                 <a:spcPts val="0"/>
               </a:spcBef>
               <a:spcAft>
-                <a:spcPts val="200"/>
+                <a:spcPts val="1400"/>
               </a:spcAft>
             </a:pPr>
             <a:r>
-              <a:rPr sz="1200" b="0" i="0">
-                <a:solidFill>
-                  <a:srgbClr val="64748B"/>
+              <a:rPr sz="1550" b="1">
+                <a:solidFill>
+                  <a:srgbClr val="2DD4BF"/>
                 </a:solidFill>
                 <a:latin typeface="Calibri"/>
               </a:rPr>
-              <a:t>USD publish / consume</a:t>
-            </a:r>
-          </a:p>
-        </p:txBody>
-      </p:sp>
-      <p:sp>
-        <p:nvSpPr>
-          <p:cNvPr id="8" name="Rounded Rectangle 7"/>
-          <p:cNvSpPr/>
-          <p:nvPr/>
-        </p:nvSpPr>
-        <p:spPr>
-          <a:xfrm>
-            <a:off x="4617720" y="2148840"/>
-            <a:ext cx="2926080" cy="1691640"/>
-          </a:xfrm>
-          <a:prstGeom prst="roundRect">
-            <a:avLst/>
-          </a:prstGeom>
-          <a:solidFill>
-            <a:srgbClr val="0E1628"/>
-          </a:solidFill>
-          <a:ln>
-            <a:noFill/>
-          </a:ln>
-          <a:effectLst/>
-          <a:effectLst>
-            <a:outerShdw blurRad="90000" dist="40000" dir="5400000" rotWithShape="0">
-              <a:srgbClr val="0F172A">
-                <a:alpha val="14000"/>
-              </a:srgbClr>
-            </a:outerShdw>
-          </a:effectLst>
-        </p:spPr>
-        <p:style>
-          <a:lnRef idx="1">
-            <a:schemeClr val="accent1"/>
-          </a:lnRef>
-          <a:fillRef idx="3">
-            <a:schemeClr val="accent1"/>
-          </a:fillRef>
-          <a:effectRef idx="2">
-            <a:schemeClr val="accent1"/>
-          </a:effectRef>
-          <a:fontRef idx="minor">
-            <a:schemeClr val="lt1"/>
-          </a:fontRef>
-        </p:style>
-        <p:txBody>
-          <a:bodyPr rtlCol="0" anchor="ctr"/>
-          <a:lstStyle/>
-          <a:p>
-            <a:pPr algn="ctr"/>
-          </a:p>
-        </p:txBody>
-      </p:sp>
-      <p:sp>
-        <p:nvSpPr>
-          <p:cNvPr id="9" name="TextBox 8"/>
-          <p:cNvSpPr txBox="1"/>
-          <p:nvPr/>
-        </p:nvSpPr>
-        <p:spPr>
-          <a:xfrm>
-            <a:off x="4617720" y="2532888"/>
-            <a:ext cx="2926080" cy="457200"/>
-          </a:xfrm>
-          <a:prstGeom prst="rect">
-            <a:avLst/>
-          </a:prstGeom>
-          <a:noFill/>
-        </p:spPr>
-        <p:txBody>
-          <a:bodyPr wrap="square" anchor="t" lIns="0" rIns="0" tIns="0" bIns="0">
-            <a:spAutoFit/>
-          </a:bodyPr>
-          <a:lstStyle/>
-          <a:p>
-            <a:pPr algn="ctr">
+              <a:t>—  </a:t>
+            </a:r>
+            <a:r>
+              <a:rPr sz="1550" b="1">
+                <a:solidFill>
+                  <a:srgbClr val="E2E8F0"/>
+                </a:solidFill>
+                <a:latin typeface="Calibri"/>
+              </a:rPr>
+              <a:t>Autodesk Maya USD / SideFX Houdini Solaris </a:t>
+            </a:r>
+            <a:r>
+              <a:rPr sz="1550">
+                <a:solidFill>
+                  <a:srgbClr val="E2E8F0"/>
+                </a:solidFill>
+                <a:latin typeface="Calibri"/>
+              </a:rPr>
+              <a:t>— native USD authoring docs</a:t>
+            </a:r>
+          </a:p>
+          <a:p>
+            <a:pPr>
               <a:spcBef>
                 <a:spcPts val="0"/>
               </a:spcBef>
               <a:spcAft>
-                <a:spcPts val="400"/>
+                <a:spcPts val="1400"/>
               </a:spcAft>
             </a:pPr>
             <a:r>
-              <a:rPr sz="1600" b="1" i="0">
-                <a:solidFill>
-                  <a:srgbClr val="FFFFFF"/>
+              <a:rPr sz="1550" b="1">
+                <a:solidFill>
+                  <a:srgbClr val="2DD4BF"/>
                 </a:solidFill>
                 <a:latin typeface="Calibri"/>
               </a:rPr>
-              <a:t>FastAPI Server</a:t>
-            </a:r>
-          </a:p>
-        </p:txBody>
-      </p:sp>
-      <p:sp>
-        <p:nvSpPr>
-          <p:cNvPr id="10" name="TextBox 9"/>
-          <p:cNvSpPr txBox="1"/>
-          <p:nvPr/>
-        </p:nvSpPr>
-        <p:spPr>
-          <a:xfrm>
-            <a:off x="4617720" y="3017520"/>
-            <a:ext cx="2926080" cy="731520"/>
-          </a:xfrm>
-          <a:prstGeom prst="rect">
-            <a:avLst/>
-          </a:prstGeom>
-          <a:noFill/>
-        </p:spPr>
-        <p:txBody>
-          <a:bodyPr wrap="square" anchor="t" lIns="0" rIns="0" tIns="0" bIns="0">
-            <a:spAutoFit/>
-          </a:bodyPr>
-          <a:lstStyle/>
-          <a:p>
-            <a:pPr algn="ctr">
+              <a:t>—  </a:t>
+            </a:r>
+            <a:r>
+              <a:rPr sz="1550" b="1">
+                <a:solidFill>
+                  <a:srgbClr val="E2E8F0"/>
+                </a:solidFill>
+                <a:latin typeface="Calibri"/>
+              </a:rPr>
+              <a:t>Kitsu (CGWire) &amp; Prism Pipeline </a:t>
+            </a:r>
+            <a:r>
+              <a:rPr sz="1550">
+                <a:solidFill>
+                  <a:srgbClr val="E2E8F0"/>
+                </a:solidFill>
+                <a:latin typeface="Calibri"/>
+              </a:rPr>
+              <a:t>— open-source asset/production tools (comparison)</a:t>
+            </a:r>
+          </a:p>
+          <a:p>
+            <a:pPr>
               <a:spcBef>
                 <a:spcPts val="0"/>
               </a:spcBef>
               <a:spcAft>
-                <a:spcPts val="200"/>
+                <a:spcPts val="1400"/>
               </a:spcAft>
             </a:pPr>
             <a:r>
-              <a:rPr sz="1200" b="0" i="0">
-                <a:solidFill>
-                  <a:srgbClr val="94A3B8"/>
+              <a:rPr sz="1550" b="1">
+                <a:solidFill>
+                  <a:srgbClr val="2DD4BF"/>
                 </a:solidFill>
                 <a:latin typeface="Calibri"/>
               </a:rPr>
-              <a:t>auth · versioning</a:t>
-            </a:r>
-          </a:p>
-          <a:p>
-            <a:pPr algn="ctr">
-              <a:spcBef>
-                <a:spcPts val="0"/>
-              </a:spcBef>
-              <a:spcAft>
-                <a:spcPts val="200"/>
-              </a:spcAft>
-            </a:pPr>
-            <a:r>
-              <a:rPr sz="1200" b="0" i="0">
-                <a:solidFill>
-                  <a:srgbClr val="94A3B8"/>
+              <a:t>—  </a:t>
+            </a:r>
+            <a:r>
+              <a:rPr sz="1550" b="1">
+                <a:solidFill>
+                  <a:srgbClr val="E2E8F0"/>
                 </a:solidFill>
                 <a:latin typeface="Calibri"/>
               </a:rPr>
-              <a:t>approved state</a:t>
-            </a:r>
-          </a:p>
-        </p:txBody>
-      </p:sp>
-      <p:sp>
-        <p:nvSpPr>
-          <p:cNvPr id="11" name="Rounded Rectangle 10"/>
-          <p:cNvSpPr/>
-          <p:nvPr/>
-        </p:nvSpPr>
-        <p:spPr>
-          <a:xfrm>
-            <a:off x="8412480" y="2148840"/>
-            <a:ext cx="2926080" cy="1691640"/>
-          </a:xfrm>
-          <a:prstGeom prst="roundRect">
-            <a:avLst/>
-          </a:prstGeom>
-          <a:solidFill>
-            <a:srgbClr val="F1F5F9"/>
-          </a:solidFill>
-          <a:ln>
-            <a:noFill/>
-          </a:ln>
-          <a:effectLst/>
-          <a:effectLst>
-            <a:outerShdw blurRad="90000" dist="40000" dir="5400000" rotWithShape="0">
-              <a:srgbClr val="0F172A">
-                <a:alpha val="14000"/>
-              </a:srgbClr>
-            </a:outerShdw>
-          </a:effectLst>
-        </p:spPr>
-        <p:style>
-          <a:lnRef idx="1">
-            <a:schemeClr val="accent1"/>
-          </a:lnRef>
-          <a:fillRef idx="3">
-            <a:schemeClr val="accent1"/>
-          </a:fillRef>
-          <a:effectRef idx="2">
-            <a:schemeClr val="accent1"/>
-          </a:effectRef>
-          <a:fontRef idx="minor">
-            <a:schemeClr val="lt1"/>
-          </a:fontRef>
-        </p:style>
-        <p:txBody>
-          <a:bodyPr rtlCol="0" anchor="ctr"/>
-          <a:lstStyle/>
-          <a:p>
-            <a:pPr algn="ctr"/>
-          </a:p>
-        </p:txBody>
-      </p:sp>
-      <p:sp>
-        <p:nvSpPr>
-          <p:cNvPr id="12" name="TextBox 11"/>
+              <a:t>Brooke, J. (1996) </a:t>
+            </a:r>
+            <a:r>
+              <a:rPr sz="1550">
+                <a:solidFill>
+                  <a:srgbClr val="E2E8F0"/>
+                </a:solidFill>
+                <a:latin typeface="Calibri"/>
+              </a:rPr>
+              <a:t>— SUS: A 'quick and dirty' usability scale (evaluation method)</a:t>
+            </a:r>
+          </a:p>
+        </p:txBody>
+      </p:sp>
+      <p:sp>
+        <p:nvSpPr>
+          <p:cNvPr id="6" name="TextBox 5"/>
           <p:cNvSpPr txBox="1"/>
           <p:nvPr/>
         </p:nvSpPr>
         <p:spPr>
           <a:xfrm>
-            <a:off x="8412480" y="2532888"/>
-            <a:ext cx="2926080" cy="457200"/>
-          </a:xfrm>
-          <a:prstGeom prst="rect">
-            <a:avLst/>
-          </a:prstGeom>
-          <a:noFill/>
-        </p:spPr>
-        <p:txBody>
-          <a:bodyPr wrap="square" anchor="t" lIns="0" rIns="0" tIns="0" bIns="0">
-            <a:spAutoFit/>
-          </a:bodyPr>
-          <a:lstStyle/>
-          <a:p>
-            <a:pPr algn="ctr">
-              <a:spcBef>
-                <a:spcPts val="0"/>
-              </a:spcBef>
-              <a:spcAft>
-                <a:spcPts val="400"/>
-              </a:spcAft>
-            </a:pPr>
-            <a:r>
-              <a:rPr sz="1600" b="1" i="0">
-                <a:solidFill>
-                  <a:srgbClr val="0F172A"/>
-                </a:solidFill>
-                <a:latin typeface="Calibri"/>
-              </a:rPr>
-              <a:t>USD Storage</a:t>
-            </a:r>
-          </a:p>
-        </p:txBody>
-      </p:sp>
-      <p:sp>
-        <p:nvSpPr>
-          <p:cNvPr id="13" name="TextBox 12"/>
-          <p:cNvSpPr txBox="1"/>
-          <p:nvPr/>
-        </p:nvSpPr>
-        <p:spPr>
-          <a:xfrm>
-            <a:off x="8412480" y="3017520"/>
-            <a:ext cx="2926080" cy="731520"/>
-          </a:xfrm>
-          <a:prstGeom prst="rect">
-            <a:avLst/>
-          </a:prstGeom>
-          <a:noFill/>
-        </p:spPr>
-        <p:txBody>
-          <a:bodyPr wrap="square" anchor="t" lIns="0" rIns="0" tIns="0" bIns="0">
-            <a:spAutoFit/>
-          </a:bodyPr>
-          <a:lstStyle/>
-          <a:p>
-            <a:pPr algn="ctr">
-              <a:spcBef>
-                <a:spcPts val="0"/>
-              </a:spcBef>
-              <a:spcAft>
-                <a:spcPts val="200"/>
-              </a:spcAft>
-            </a:pPr>
-            <a:r>
-              <a:rPr sz="1200" b="0" i="0">
-                <a:solidFill>
-                  <a:srgbClr val="64748B"/>
-                </a:solidFill>
-                <a:latin typeface="Calibri"/>
-              </a:rPr>
-              <a:t>versioned layers</a:t>
-            </a:r>
-          </a:p>
-          <a:p>
-            <a:pPr algn="ctr">
-              <a:spcBef>
-                <a:spcPts val="0"/>
-              </a:spcBef>
-              <a:spcAft>
-                <a:spcPts val="200"/>
-              </a:spcAft>
-            </a:pPr>
-            <a:r>
-              <a:rPr sz="1200" b="0" i="0">
-                <a:solidFill>
-                  <a:srgbClr val="64748B"/>
-                </a:solidFill>
-                <a:latin typeface="Calibri"/>
-              </a:rPr>
-              <a:t>+ asset stubs</a:t>
-            </a:r>
-          </a:p>
-        </p:txBody>
-      </p:sp>
-      <p:sp>
-        <p:nvSpPr>
-          <p:cNvPr id="14" name="Right Arrow 13"/>
-          <p:cNvSpPr/>
-          <p:nvPr/>
-        </p:nvSpPr>
-        <p:spPr>
-          <a:xfrm>
-            <a:off x="3840480" y="2807208"/>
-            <a:ext cx="640080" cy="365760"/>
-          </a:xfrm>
-          <a:prstGeom prst="rightArrow">
-            <a:avLst/>
-          </a:prstGeom>
-          <a:solidFill>
-            <a:srgbClr val="14B8A6"/>
-          </a:solidFill>
-          <a:ln>
-            <a:noFill/>
-          </a:ln>
-          <a:effectLst/>
-        </p:spPr>
-        <p:style>
-          <a:lnRef idx="1">
-            <a:schemeClr val="accent1"/>
-          </a:lnRef>
-          <a:fillRef idx="3">
-            <a:schemeClr val="accent1"/>
-          </a:fillRef>
-          <a:effectRef idx="2">
-            <a:schemeClr val="accent1"/>
-          </a:effectRef>
-          <a:fontRef idx="minor">
-            <a:schemeClr val="lt1"/>
-          </a:fontRef>
-        </p:style>
-        <p:txBody>
-          <a:bodyPr rtlCol="0" anchor="ctr"/>
-          <a:lstStyle/>
-          <a:p>
-            <a:pPr algn="ctr"/>
-          </a:p>
-        </p:txBody>
-      </p:sp>
-      <p:sp>
-        <p:nvSpPr>
-          <p:cNvPr id="15" name="Right Arrow 14"/>
-          <p:cNvSpPr/>
-          <p:nvPr/>
-        </p:nvSpPr>
-        <p:spPr>
-          <a:xfrm>
-            <a:off x="7635240" y="2807208"/>
-            <a:ext cx="640080" cy="365760"/>
-          </a:xfrm>
-          <a:prstGeom prst="rightArrow">
-            <a:avLst/>
-          </a:prstGeom>
-          <a:solidFill>
-            <a:srgbClr val="14B8A6"/>
-          </a:solidFill>
-          <a:ln>
-            <a:noFill/>
-          </a:ln>
-          <a:effectLst/>
-        </p:spPr>
-        <p:style>
-          <a:lnRef idx="1">
-            <a:schemeClr val="accent1"/>
-          </a:lnRef>
-          <a:fillRef idx="3">
-            <a:schemeClr val="accent1"/>
-          </a:fillRef>
-          <a:effectRef idx="2">
-            <a:schemeClr val="accent1"/>
-          </a:effectRef>
-          <a:fontRef idx="minor">
-            <a:schemeClr val="lt1"/>
-          </a:fontRef>
-        </p:style>
-        <p:txBody>
-          <a:bodyPr rtlCol="0" anchor="ctr"/>
-          <a:lstStyle/>
-          <a:p>
-            <a:pPr algn="ctr"/>
-          </a:p>
-        </p:txBody>
-      </p:sp>
-      <p:sp>
-        <p:nvSpPr>
-          <p:cNvPr id="16" name="Rectangle 15"/>
-          <p:cNvSpPr/>
-          <p:nvPr/>
-        </p:nvSpPr>
-        <p:spPr>
-          <a:xfrm>
-            <a:off x="822960" y="4206240"/>
-            <a:ext cx="10515600" cy="16459"/>
-          </a:xfrm>
-          <a:prstGeom prst="rect">
-            <a:avLst/>
-          </a:prstGeom>
-          <a:solidFill>
-            <a:srgbClr val="E2E8F0"/>
-          </a:solidFill>
-          <a:ln>
-            <a:noFill/>
-          </a:ln>
-          <a:effectLst/>
-        </p:spPr>
-        <p:style>
-          <a:lnRef idx="1">
-            <a:schemeClr val="accent1"/>
-          </a:lnRef>
-          <a:fillRef idx="3">
-            <a:schemeClr val="accent1"/>
-          </a:fillRef>
-          <a:effectRef idx="2">
-            <a:schemeClr val="accent1"/>
-          </a:effectRef>
-          <a:fontRef idx="minor">
-            <a:schemeClr val="lt1"/>
-          </a:fontRef>
-        </p:style>
-        <p:txBody>
-          <a:bodyPr rtlCol="0" anchor="ctr"/>
-          <a:lstStyle/>
-          <a:p>
-            <a:pPr algn="ctr"/>
-          </a:p>
-        </p:txBody>
-      </p:sp>
-      <p:sp>
-        <p:nvSpPr>
-          <p:cNvPr id="17" name="TextBox 16"/>
-          <p:cNvSpPr txBox="1"/>
-          <p:nvPr/>
-        </p:nvSpPr>
-        <p:spPr>
-          <a:xfrm>
-            <a:off x="822960" y="4434840"/>
-            <a:ext cx="5486400" cy="274320"/>
+            <a:off x="822960" y="5943600"/>
+            <a:ext cx="10058400" cy="457200"/>
           </a:xfrm>
           <a:prstGeom prst="rect">
             <a:avLst/>
@@ -8579,2352 +7316,13 @@
               </a:spcAft>
             </a:pPr>
             <a:r>
-              <a:rPr sz="1200" b="1" i="0" spc="200">
-                <a:solidFill>
-                  <a:srgbClr val="14B8A6"/>
-                </a:solidFill>
-                <a:latin typeface="Consolas"/>
-              </a:rPr>
-              <a:t>EVALUATION</a:t>
-            </a:r>
-          </a:p>
-        </p:txBody>
-      </p:sp>
-      <p:sp>
-        <p:nvSpPr>
-          <p:cNvPr id="18" name="TextBox 17"/>
-          <p:cNvSpPr txBox="1"/>
-          <p:nvPr/>
-        </p:nvSpPr>
-        <p:spPr>
-          <a:xfrm>
-            <a:off x="822960" y="4800600"/>
-            <a:ext cx="5120640" cy="1463040"/>
-          </a:xfrm>
-          <a:prstGeom prst="rect">
-            <a:avLst/>
-          </a:prstGeom>
-          <a:noFill/>
-        </p:spPr>
-        <p:txBody>
-          <a:bodyPr wrap="square" lIns="0" rIns="0" tIns="0" bIns="0">
-            <a:spAutoFit/>
-          </a:bodyPr>
-          <a:lstStyle/>
-          <a:p>
-            <a:pPr>
-              <a:spcBef>
-                <a:spcPts val="0"/>
-              </a:spcBef>
-              <a:spcAft>
-                <a:spcPts val="1000"/>
-              </a:spcAft>
-            </a:pPr>
-            <a:r>
-              <a:rPr sz="1400" b="1">
-                <a:solidFill>
-                  <a:srgbClr val="14B8A6"/>
+              <a:rPr sz="1600" b="0" i="1">
+                <a:solidFill>
+                  <a:srgbClr val="94A3B8"/>
                 </a:solidFill>
                 <a:latin typeface="Calibri"/>
               </a:rPr>
-              <a:t>—  </a:t>
-            </a:r>
-            <a:r>
-              <a:rPr sz="1400" b="1">
-                <a:solidFill>
-                  <a:srgbClr val="0F172A"/>
-                </a:solidFill>
-                <a:latin typeface="Calibri"/>
-              </a:rPr>
-              <a:t>Usability study  </a:t>
-            </a:r>
-            <a:r>
-              <a:rPr sz="1400">
-                <a:solidFill>
-                  <a:srgbClr val="0F172A"/>
-                </a:solidFill>
-                <a:latin typeface="Calibri"/>
-              </a:rPr>
-              <a:t>6–10 artists, fixed publish/consume tasks; time + success rate</a:t>
-            </a:r>
-          </a:p>
-          <a:p>
-            <a:pPr>
-              <a:spcBef>
-                <a:spcPts val="0"/>
-              </a:spcBef>
-              <a:spcAft>
-                <a:spcPts val="1000"/>
-              </a:spcAft>
-            </a:pPr>
-            <a:r>
-              <a:rPr sz="1400" b="1">
-                <a:solidFill>
-                  <a:srgbClr val="14B8A6"/>
-                </a:solidFill>
-                <a:latin typeface="Calibri"/>
-              </a:rPr>
-              <a:t>—  </a:t>
-            </a:r>
-            <a:r>
-              <a:rPr sz="1400" b="1">
-                <a:solidFill>
-                  <a:srgbClr val="0F172A"/>
-                </a:solidFill>
-                <a:latin typeface="Calibri"/>
-              </a:rPr>
-              <a:t>SUS questionnaire  </a:t>
-            </a:r>
-            <a:r>
-              <a:rPr sz="1400">
-                <a:solidFill>
-                  <a:srgbClr val="0F172A"/>
-                </a:solidFill>
-                <a:latin typeface="Calibri"/>
-              </a:rPr>
-              <a:t>standard, citable usability score</a:t>
-            </a:r>
-          </a:p>
-        </p:txBody>
-      </p:sp>
-      <p:sp>
-        <p:nvSpPr>
-          <p:cNvPr id="19" name="TextBox 18"/>
-          <p:cNvSpPr txBox="1"/>
-          <p:nvPr/>
-        </p:nvSpPr>
-        <p:spPr>
-          <a:xfrm>
-            <a:off x="6217920" y="4800600"/>
-            <a:ext cx="5120640" cy="1463040"/>
-          </a:xfrm>
-          <a:prstGeom prst="rect">
-            <a:avLst/>
-          </a:prstGeom>
-          <a:noFill/>
-        </p:spPr>
-        <p:txBody>
-          <a:bodyPr wrap="square" lIns="0" rIns="0" tIns="0" bIns="0">
-            <a:spAutoFit/>
-          </a:bodyPr>
-          <a:lstStyle/>
-          <a:p>
-            <a:pPr>
-              <a:spcBef>
-                <a:spcPts val="0"/>
-              </a:spcBef>
-              <a:spcAft>
-                <a:spcPts val="1000"/>
-              </a:spcAft>
-            </a:pPr>
-            <a:r>
-              <a:rPr sz="1400" b="1">
-                <a:solidFill>
-                  <a:srgbClr val="14B8A6"/>
-                </a:solidFill>
-                <a:latin typeface="Calibri"/>
-              </a:rPr>
-              <a:t>—  </a:t>
-            </a:r>
-            <a:r>
-              <a:rPr sz="1400" b="1">
-                <a:solidFill>
-                  <a:srgbClr val="0F172A"/>
-                </a:solidFill>
-                <a:latin typeface="Calibri"/>
-              </a:rPr>
-              <a:t>Comparative analysis  </a:t>
-            </a:r>
-            <a:r>
-              <a:rPr sz="1400">
-                <a:solidFill>
-                  <a:srgbClr val="0F172A"/>
-                </a:solidFill>
-                <a:latin typeface="Calibri"/>
-              </a:rPr>
-              <a:t>tool vs manual file-sharing: errors + time</a:t>
-            </a:r>
-          </a:p>
-          <a:p>
-            <a:pPr>
-              <a:spcBef>
-                <a:spcPts val="0"/>
-              </a:spcBef>
-              <a:spcAft>
-                <a:spcPts val="1000"/>
-              </a:spcAft>
-            </a:pPr>
-            <a:r>
-              <a:rPr sz="1400" b="1">
-                <a:solidFill>
-                  <a:srgbClr val="14B8A6"/>
-                </a:solidFill>
-                <a:latin typeface="Calibri"/>
-              </a:rPr>
-              <a:t>—  </a:t>
-            </a:r>
-            <a:r>
-              <a:rPr sz="1400" b="1">
-                <a:solidFill>
-                  <a:srgbClr val="0F172A"/>
-                </a:solidFill>
-                <a:latin typeface="Calibri"/>
-              </a:rPr>
-              <a:t>Technical eval  </a:t>
-            </a:r>
-            <a:r>
-              <a:rPr sz="1400">
-                <a:solidFill>
-                  <a:srgbClr val="0F172A"/>
-                </a:solidFill>
-                <a:latin typeface="Calibri"/>
-              </a:rPr>
-              <a:t>performance as asset count and size scale</a:t>
-            </a:r>
-          </a:p>
-        </p:txBody>
-      </p:sp>
-    </p:spTree>
-  </p:cSld>
-  <p:clrMapOvr>
-    <a:masterClrMapping/>
-  </p:clrMapOvr>
-</p:sld>
-</file>
-
-<file path=ppt/slides/slide8.xml><?xml version="1.0" encoding="utf-8"?>
-<p:sld xmlns:a="http://schemas.openxmlformats.org/drawingml/2006/main" xmlns:p="http://schemas.openxmlformats.org/presentationml/2006/main" xmlns:r="http://schemas.openxmlformats.org/officeDocument/2006/relationships">
-  <p:cSld>
-    <p:spTree>
-      <p:nvGrpSpPr>
-        <p:cNvPr id="1" name=""/>
-        <p:cNvGrpSpPr/>
-        <p:nvPr/>
-      </p:nvGrpSpPr>
-      <p:grpSpPr/>
-      <p:sp>
-        <p:nvSpPr>
-          <p:cNvPr id="2" name="Rectangle 1"/>
-          <p:cNvSpPr/>
-          <p:nvPr/>
-        </p:nvSpPr>
-        <p:spPr>
-          <a:xfrm>
-            <a:off x="0" y="0"/>
-            <a:ext cx="12191695" cy="6858000"/>
-          </a:xfrm>
-          <a:prstGeom prst="rect">
-            <a:avLst/>
-          </a:prstGeom>
-          <a:solidFill>
-            <a:srgbClr val="FFFFFF"/>
-          </a:solidFill>
-          <a:ln>
-            <a:noFill/>
-          </a:ln>
-          <a:effectLst/>
-        </p:spPr>
-        <p:style>
-          <a:lnRef idx="1">
-            <a:schemeClr val="accent1"/>
-          </a:lnRef>
-          <a:fillRef idx="3">
-            <a:schemeClr val="accent1"/>
-          </a:fillRef>
-          <a:effectRef idx="2">
-            <a:schemeClr val="accent1"/>
-          </a:effectRef>
-          <a:fontRef idx="minor">
-            <a:schemeClr val="lt1"/>
-          </a:fontRef>
-        </p:style>
-        <p:txBody>
-          <a:bodyPr rtlCol="0" anchor="ctr"/>
-          <a:lstStyle/>
-          <a:p>
-            <a:pPr algn="ctr"/>
-          </a:p>
-        </p:txBody>
-      </p:sp>
-      <p:sp>
-        <p:nvSpPr>
-          <p:cNvPr id="3" name="TextBox 2"/>
-          <p:cNvSpPr txBox="1"/>
-          <p:nvPr/>
-        </p:nvSpPr>
-        <p:spPr>
-          <a:xfrm>
-            <a:off x="822960" y="640080"/>
-            <a:ext cx="5486400" cy="274320"/>
-          </a:xfrm>
-          <a:prstGeom prst="rect">
-            <a:avLst/>
-          </a:prstGeom>
-          <a:noFill/>
-        </p:spPr>
-        <p:txBody>
-          <a:bodyPr wrap="square" anchor="t" lIns="0" rIns="0" tIns="0" bIns="0">
-            <a:spAutoFit/>
-          </a:bodyPr>
-          <a:lstStyle/>
-          <a:p>
-            <a:pPr algn="l">
-              <a:spcBef>
-                <a:spcPts val="0"/>
-              </a:spcBef>
-              <a:spcAft>
-                <a:spcPts val="400"/>
-              </a:spcAft>
-            </a:pPr>
-            <a:r>
-              <a:rPr sz="1200" b="1" i="0" spc="200">
-                <a:solidFill>
-                  <a:srgbClr val="14B8A6"/>
-                </a:solidFill>
-                <a:latin typeface="Consolas"/>
-              </a:rPr>
-              <a:t>TIMELINE</a:t>
-            </a:r>
-          </a:p>
-        </p:txBody>
-      </p:sp>
-      <p:sp>
-        <p:nvSpPr>
-          <p:cNvPr id="4" name="TextBox 3"/>
-          <p:cNvSpPr txBox="1"/>
-          <p:nvPr/>
-        </p:nvSpPr>
-        <p:spPr>
-          <a:xfrm>
-            <a:off x="822960" y="960120"/>
-            <a:ext cx="10515600" cy="731520"/>
-          </a:xfrm>
-          <a:prstGeom prst="rect">
-            <a:avLst/>
-          </a:prstGeom>
-          <a:noFill/>
-        </p:spPr>
-        <p:txBody>
-          <a:bodyPr wrap="square" anchor="t" lIns="0" rIns="0" tIns="0" bIns="0">
-            <a:spAutoFit/>
-          </a:bodyPr>
-          <a:lstStyle/>
-          <a:p>
-            <a:pPr algn="l">
-              <a:spcBef>
-                <a:spcPts val="0"/>
-              </a:spcBef>
-              <a:spcAft>
-                <a:spcPts val="400"/>
-              </a:spcAft>
-            </a:pPr>
-            <a:r>
-              <a:rPr sz="3200" b="1" i="0">
-                <a:solidFill>
-                  <a:srgbClr val="0F172A"/>
-                </a:solidFill>
-                <a:latin typeface="Georgia"/>
-              </a:rPr>
-              <a:t>~14 weeks, scoped to one summer</a:t>
-            </a:r>
-          </a:p>
-        </p:txBody>
-      </p:sp>
-      <p:sp>
-        <p:nvSpPr>
-          <p:cNvPr id="5" name="Rounded Rectangle 4"/>
-          <p:cNvSpPr/>
-          <p:nvPr/>
-        </p:nvSpPr>
-        <p:spPr>
-          <a:xfrm>
-            <a:off x="822960" y="2011680"/>
-            <a:ext cx="1737360" cy="603504"/>
-          </a:xfrm>
-          <a:prstGeom prst="roundRect">
-            <a:avLst/>
-          </a:prstGeom>
-          <a:solidFill>
-            <a:srgbClr val="0E1628"/>
-          </a:solidFill>
-          <a:ln>
-            <a:noFill/>
-          </a:ln>
-          <a:effectLst/>
-        </p:spPr>
-        <p:style>
-          <a:lnRef idx="1">
-            <a:schemeClr val="accent1"/>
-          </a:lnRef>
-          <a:fillRef idx="3">
-            <a:schemeClr val="accent1"/>
-          </a:fillRef>
-          <a:effectRef idx="2">
-            <a:schemeClr val="accent1"/>
-          </a:effectRef>
-          <a:fontRef idx="minor">
-            <a:schemeClr val="lt1"/>
-          </a:fontRef>
-        </p:style>
-        <p:txBody>
-          <a:bodyPr rtlCol="0" anchor="ctr"/>
-          <a:lstStyle/>
-          <a:p>
-            <a:pPr algn="ctr"/>
-          </a:p>
-        </p:txBody>
-      </p:sp>
-      <p:sp>
-        <p:nvSpPr>
-          <p:cNvPr id="6" name="TextBox 5"/>
-          <p:cNvSpPr txBox="1"/>
-          <p:nvPr/>
-        </p:nvSpPr>
-        <p:spPr>
-          <a:xfrm>
-            <a:off x="822960" y="2011680"/>
-            <a:ext cx="1737360" cy="603504"/>
-          </a:xfrm>
-          <a:prstGeom prst="rect">
-            <a:avLst/>
-          </a:prstGeom>
-          <a:noFill/>
-        </p:spPr>
-        <p:txBody>
-          <a:bodyPr wrap="square" anchor="ctr" lIns="0" rIns="0" tIns="0" bIns="0">
-            <a:spAutoFit/>
-          </a:bodyPr>
-          <a:lstStyle/>
-          <a:p>
-            <a:pPr algn="ctr">
-              <a:spcBef>
-                <a:spcPts val="0"/>
-              </a:spcBef>
-              <a:spcAft>
-                <a:spcPts val="400"/>
-              </a:spcAft>
-            </a:pPr>
-            <a:r>
-              <a:rPr sz="1400" b="1" i="0">
-                <a:solidFill>
-                  <a:srgbClr val="2DD4BF"/>
-                </a:solidFill>
-                <a:latin typeface="Consolas"/>
-              </a:rPr>
-              <a:t>Wk 1–2</a:t>
-            </a:r>
-          </a:p>
-        </p:txBody>
-      </p:sp>
-      <p:sp>
-        <p:nvSpPr>
-          <p:cNvPr id="7" name="Rounded Rectangle 6"/>
-          <p:cNvSpPr/>
-          <p:nvPr/>
-        </p:nvSpPr>
-        <p:spPr>
-          <a:xfrm>
-            <a:off x="2743200" y="2011680"/>
-            <a:ext cx="8595360" cy="603504"/>
-          </a:xfrm>
-          <a:prstGeom prst="roundRect">
-            <a:avLst/>
-          </a:prstGeom>
-          <a:solidFill>
-            <a:srgbClr val="F1F5F9"/>
-          </a:solidFill>
-          <a:ln>
-            <a:noFill/>
-          </a:ln>
-          <a:effectLst/>
-        </p:spPr>
-        <p:style>
-          <a:lnRef idx="1">
-            <a:schemeClr val="accent1"/>
-          </a:lnRef>
-          <a:fillRef idx="3">
-            <a:schemeClr val="accent1"/>
-          </a:fillRef>
-          <a:effectRef idx="2">
-            <a:schemeClr val="accent1"/>
-          </a:effectRef>
-          <a:fontRef idx="minor">
-            <a:schemeClr val="lt1"/>
-          </a:fontRef>
-        </p:style>
-        <p:txBody>
-          <a:bodyPr rtlCol="0" anchor="ctr"/>
-          <a:lstStyle/>
-          <a:p>
-            <a:pPr algn="ctr"/>
-          </a:p>
-        </p:txBody>
-      </p:sp>
-      <p:sp>
-        <p:nvSpPr>
-          <p:cNvPr id="8" name="TextBox 7"/>
-          <p:cNvSpPr txBox="1"/>
-          <p:nvPr/>
-        </p:nvSpPr>
-        <p:spPr>
-          <a:xfrm>
-            <a:off x="3063240" y="2011680"/>
-            <a:ext cx="8138160" cy="603504"/>
-          </a:xfrm>
-          <a:prstGeom prst="rect">
-            <a:avLst/>
-          </a:prstGeom>
-          <a:noFill/>
-        </p:spPr>
-        <p:txBody>
-          <a:bodyPr wrap="square" anchor="ctr" lIns="0" rIns="0" tIns="0" bIns="0">
-            <a:spAutoFit/>
-          </a:bodyPr>
-          <a:lstStyle/>
-          <a:p>
-            <a:pPr algn="l">
-              <a:spcBef>
-                <a:spcPts val="0"/>
-              </a:spcBef>
-              <a:spcAft>
-                <a:spcPts val="400"/>
-              </a:spcAft>
-            </a:pPr>
-            <a:r>
-              <a:rPr sz="1500" b="1" i="0">
-                <a:solidFill>
-                  <a:srgbClr val="0F172A"/>
-                </a:solidFill>
-                <a:latin typeface="Calibri"/>
-              </a:rPr>
-              <a:t>Review &amp; scope   </a:t>
-            </a:r>
-            <a:r>
-              <a:rPr sz="1350" b="0" i="0">
-                <a:solidFill>
-                  <a:srgbClr val="64748B"/>
-                </a:solidFill>
-                <a:latin typeface="Calibri"/>
-              </a:rPr>
-              <a:t>Literature + tools review; lock the question with supervisor</a:t>
-            </a:r>
-          </a:p>
-        </p:txBody>
-      </p:sp>
-      <p:sp>
-        <p:nvSpPr>
-          <p:cNvPr id="9" name="Rounded Rectangle 8"/>
-          <p:cNvSpPr/>
-          <p:nvPr/>
-        </p:nvSpPr>
-        <p:spPr>
-          <a:xfrm>
-            <a:off x="822960" y="2770632"/>
-            <a:ext cx="1737360" cy="603504"/>
-          </a:xfrm>
-          <a:prstGeom prst="roundRect">
-            <a:avLst/>
-          </a:prstGeom>
-          <a:solidFill>
-            <a:srgbClr val="0E1628"/>
-          </a:solidFill>
-          <a:ln>
-            <a:noFill/>
-          </a:ln>
-          <a:effectLst/>
-        </p:spPr>
-        <p:style>
-          <a:lnRef idx="1">
-            <a:schemeClr val="accent1"/>
-          </a:lnRef>
-          <a:fillRef idx="3">
-            <a:schemeClr val="accent1"/>
-          </a:fillRef>
-          <a:effectRef idx="2">
-            <a:schemeClr val="accent1"/>
-          </a:effectRef>
-          <a:fontRef idx="minor">
-            <a:schemeClr val="lt1"/>
-          </a:fontRef>
-        </p:style>
-        <p:txBody>
-          <a:bodyPr rtlCol="0" anchor="ctr"/>
-          <a:lstStyle/>
-          <a:p>
-            <a:pPr algn="ctr"/>
-          </a:p>
-        </p:txBody>
-      </p:sp>
-      <p:sp>
-        <p:nvSpPr>
-          <p:cNvPr id="10" name="TextBox 9"/>
-          <p:cNvSpPr txBox="1"/>
-          <p:nvPr/>
-        </p:nvSpPr>
-        <p:spPr>
-          <a:xfrm>
-            <a:off x="822960" y="2770632"/>
-            <a:ext cx="1737360" cy="603504"/>
-          </a:xfrm>
-          <a:prstGeom prst="rect">
-            <a:avLst/>
-          </a:prstGeom>
-          <a:noFill/>
-        </p:spPr>
-        <p:txBody>
-          <a:bodyPr wrap="square" anchor="ctr" lIns="0" rIns="0" tIns="0" bIns="0">
-            <a:spAutoFit/>
-          </a:bodyPr>
-          <a:lstStyle/>
-          <a:p>
-            <a:pPr algn="ctr">
-              <a:spcBef>
-                <a:spcPts val="0"/>
-              </a:spcBef>
-              <a:spcAft>
-                <a:spcPts val="400"/>
-              </a:spcAft>
-            </a:pPr>
-            <a:r>
-              <a:rPr sz="1400" b="1" i="0">
-                <a:solidFill>
-                  <a:srgbClr val="2DD4BF"/>
-                </a:solidFill>
-                <a:latin typeface="Consolas"/>
-              </a:rPr>
-              <a:t>Wk 3–4</a:t>
-            </a:r>
-          </a:p>
-        </p:txBody>
-      </p:sp>
-      <p:sp>
-        <p:nvSpPr>
-          <p:cNvPr id="11" name="Rounded Rectangle 10"/>
-          <p:cNvSpPr/>
-          <p:nvPr/>
-        </p:nvSpPr>
-        <p:spPr>
-          <a:xfrm>
-            <a:off x="2743200" y="2770632"/>
-            <a:ext cx="8595360" cy="603504"/>
-          </a:xfrm>
-          <a:prstGeom prst="roundRect">
-            <a:avLst/>
-          </a:prstGeom>
-          <a:solidFill>
-            <a:srgbClr val="F1F5F9"/>
-          </a:solidFill>
-          <a:ln>
-            <a:noFill/>
-          </a:ln>
-          <a:effectLst/>
-        </p:spPr>
-        <p:style>
-          <a:lnRef idx="1">
-            <a:schemeClr val="accent1"/>
-          </a:lnRef>
-          <a:fillRef idx="3">
-            <a:schemeClr val="accent1"/>
-          </a:fillRef>
-          <a:effectRef idx="2">
-            <a:schemeClr val="accent1"/>
-          </a:effectRef>
-          <a:fontRef idx="minor">
-            <a:schemeClr val="lt1"/>
-          </a:fontRef>
-        </p:style>
-        <p:txBody>
-          <a:bodyPr rtlCol="0" anchor="ctr"/>
-          <a:lstStyle/>
-          <a:p>
-            <a:pPr algn="ctr"/>
-          </a:p>
-        </p:txBody>
-      </p:sp>
-      <p:sp>
-        <p:nvSpPr>
-          <p:cNvPr id="12" name="TextBox 11"/>
-          <p:cNvSpPr txBox="1"/>
-          <p:nvPr/>
-        </p:nvSpPr>
-        <p:spPr>
-          <a:xfrm>
-            <a:off x="3063240" y="2770632"/>
-            <a:ext cx="8138160" cy="603504"/>
-          </a:xfrm>
-          <a:prstGeom prst="rect">
-            <a:avLst/>
-          </a:prstGeom>
-          <a:noFill/>
-        </p:spPr>
-        <p:txBody>
-          <a:bodyPr wrap="square" anchor="ctr" lIns="0" rIns="0" tIns="0" bIns="0">
-            <a:spAutoFit/>
-          </a:bodyPr>
-          <a:lstStyle/>
-          <a:p>
-            <a:pPr algn="l">
-              <a:spcBef>
-                <a:spcPts val="0"/>
-              </a:spcBef>
-              <a:spcAft>
-                <a:spcPts val="400"/>
-              </a:spcAft>
-            </a:pPr>
-            <a:r>
-              <a:rPr sz="1500" b="1" i="0">
-                <a:solidFill>
-                  <a:srgbClr val="0F172A"/>
-                </a:solidFill>
-                <a:latin typeface="Calibri"/>
-              </a:rPr>
-              <a:t>Server core   </a:t>
-            </a:r>
-            <a:r>
-              <a:rPr sz="1350" b="0" i="0">
-                <a:solidFill>
-                  <a:srgbClr val="64748B"/>
-                </a:solidFill>
-                <a:latin typeface="Calibri"/>
-              </a:rPr>
-              <a:t>Auth, versioned USD storage, approved state, tests + CI</a:t>
-            </a:r>
-          </a:p>
-        </p:txBody>
-      </p:sp>
-      <p:sp>
-        <p:nvSpPr>
-          <p:cNvPr id="13" name="Rounded Rectangle 12"/>
-          <p:cNvSpPr/>
-          <p:nvPr/>
-        </p:nvSpPr>
-        <p:spPr>
-          <a:xfrm>
-            <a:off x="822960" y="3529584"/>
-            <a:ext cx="1737360" cy="603504"/>
-          </a:xfrm>
-          <a:prstGeom prst="roundRect">
-            <a:avLst/>
-          </a:prstGeom>
-          <a:solidFill>
-            <a:srgbClr val="0E1628"/>
-          </a:solidFill>
-          <a:ln>
-            <a:noFill/>
-          </a:ln>
-          <a:effectLst/>
-        </p:spPr>
-        <p:style>
-          <a:lnRef idx="1">
-            <a:schemeClr val="accent1"/>
-          </a:lnRef>
-          <a:fillRef idx="3">
-            <a:schemeClr val="accent1"/>
-          </a:fillRef>
-          <a:effectRef idx="2">
-            <a:schemeClr val="accent1"/>
-          </a:effectRef>
-          <a:fontRef idx="minor">
-            <a:schemeClr val="lt1"/>
-          </a:fontRef>
-        </p:style>
-        <p:txBody>
-          <a:bodyPr rtlCol="0" anchor="ctr"/>
-          <a:lstStyle/>
-          <a:p>
-            <a:pPr algn="ctr"/>
-          </a:p>
-        </p:txBody>
-      </p:sp>
-      <p:sp>
-        <p:nvSpPr>
-          <p:cNvPr id="14" name="TextBox 13"/>
-          <p:cNvSpPr txBox="1"/>
-          <p:nvPr/>
-        </p:nvSpPr>
-        <p:spPr>
-          <a:xfrm>
-            <a:off x="822960" y="3529584"/>
-            <a:ext cx="1737360" cy="603504"/>
-          </a:xfrm>
-          <a:prstGeom prst="rect">
-            <a:avLst/>
-          </a:prstGeom>
-          <a:noFill/>
-        </p:spPr>
-        <p:txBody>
-          <a:bodyPr wrap="square" anchor="ctr" lIns="0" rIns="0" tIns="0" bIns="0">
-            <a:spAutoFit/>
-          </a:bodyPr>
-          <a:lstStyle/>
-          <a:p>
-            <a:pPr algn="ctr">
-              <a:spcBef>
-                <a:spcPts val="0"/>
-              </a:spcBef>
-              <a:spcAft>
-                <a:spcPts val="400"/>
-              </a:spcAft>
-            </a:pPr>
-            <a:r>
-              <a:rPr sz="1400" b="1" i="0">
-                <a:solidFill>
-                  <a:srgbClr val="2DD4BF"/>
-                </a:solidFill>
-                <a:latin typeface="Consolas"/>
-              </a:rPr>
-              <a:t>Wk 5–7</a:t>
-            </a:r>
-          </a:p>
-        </p:txBody>
-      </p:sp>
-      <p:sp>
-        <p:nvSpPr>
-          <p:cNvPr id="15" name="Rounded Rectangle 14"/>
-          <p:cNvSpPr/>
-          <p:nvPr/>
-        </p:nvSpPr>
-        <p:spPr>
-          <a:xfrm>
-            <a:off x="2743200" y="3529584"/>
-            <a:ext cx="8595360" cy="603504"/>
-          </a:xfrm>
-          <a:prstGeom prst="roundRect">
-            <a:avLst/>
-          </a:prstGeom>
-          <a:solidFill>
-            <a:srgbClr val="F1F5F9"/>
-          </a:solidFill>
-          <a:ln>
-            <a:noFill/>
-          </a:ln>
-          <a:effectLst/>
-        </p:spPr>
-        <p:style>
-          <a:lnRef idx="1">
-            <a:schemeClr val="accent1"/>
-          </a:lnRef>
-          <a:fillRef idx="3">
-            <a:schemeClr val="accent1"/>
-          </a:fillRef>
-          <a:effectRef idx="2">
-            <a:schemeClr val="accent1"/>
-          </a:effectRef>
-          <a:fontRef idx="minor">
-            <a:schemeClr val="lt1"/>
-          </a:fontRef>
-        </p:style>
-        <p:txBody>
-          <a:bodyPr rtlCol="0" anchor="ctr"/>
-          <a:lstStyle/>
-          <a:p>
-            <a:pPr algn="ctr"/>
-          </a:p>
-        </p:txBody>
-      </p:sp>
-      <p:sp>
-        <p:nvSpPr>
-          <p:cNvPr id="16" name="TextBox 15"/>
-          <p:cNvSpPr txBox="1"/>
-          <p:nvPr/>
-        </p:nvSpPr>
-        <p:spPr>
-          <a:xfrm>
-            <a:off x="3063240" y="3529584"/>
-            <a:ext cx="8138160" cy="603504"/>
-          </a:xfrm>
-          <a:prstGeom prst="rect">
-            <a:avLst/>
-          </a:prstGeom>
-          <a:noFill/>
-        </p:spPr>
-        <p:txBody>
-          <a:bodyPr wrap="square" anchor="ctr" lIns="0" rIns="0" tIns="0" bIns="0">
-            <a:spAutoFit/>
-          </a:bodyPr>
-          <a:lstStyle/>
-          <a:p>
-            <a:pPr algn="l">
-              <a:spcBef>
-                <a:spcPts val="0"/>
-              </a:spcBef>
-              <a:spcAft>
-                <a:spcPts val="400"/>
-              </a:spcAft>
-            </a:pPr>
-            <a:r>
-              <a:rPr sz="1500" b="1" i="0">
-                <a:solidFill>
-                  <a:srgbClr val="0F172A"/>
-                </a:solidFill>
-                <a:latin typeface="Calibri"/>
-              </a:rPr>
-              <a:t>Maya client   </a:t>
-            </a:r>
-            <a:r>
-              <a:rPr sz="1350" b="0" i="0">
-                <a:solidFill>
-                  <a:srgbClr val="64748B"/>
-                </a:solidFill>
-                <a:latin typeface="Calibri"/>
-              </a:rPr>
-              <a:t>USD publish / consume, version selection</a:t>
-            </a:r>
-          </a:p>
-        </p:txBody>
-      </p:sp>
-      <p:sp>
-        <p:nvSpPr>
-          <p:cNvPr id="17" name="Rounded Rectangle 16"/>
-          <p:cNvSpPr/>
-          <p:nvPr/>
-        </p:nvSpPr>
-        <p:spPr>
-          <a:xfrm>
-            <a:off x="822960" y="4288536"/>
-            <a:ext cx="1737360" cy="603504"/>
-          </a:xfrm>
-          <a:prstGeom prst="roundRect">
-            <a:avLst/>
-          </a:prstGeom>
-          <a:solidFill>
-            <a:srgbClr val="0E1628"/>
-          </a:solidFill>
-          <a:ln>
-            <a:noFill/>
-          </a:ln>
-          <a:effectLst/>
-        </p:spPr>
-        <p:style>
-          <a:lnRef idx="1">
-            <a:schemeClr val="accent1"/>
-          </a:lnRef>
-          <a:fillRef idx="3">
-            <a:schemeClr val="accent1"/>
-          </a:fillRef>
-          <a:effectRef idx="2">
-            <a:schemeClr val="accent1"/>
-          </a:effectRef>
-          <a:fontRef idx="minor">
-            <a:schemeClr val="lt1"/>
-          </a:fontRef>
-        </p:style>
-        <p:txBody>
-          <a:bodyPr rtlCol="0" anchor="ctr"/>
-          <a:lstStyle/>
-          <a:p>
-            <a:pPr algn="ctr"/>
-          </a:p>
-        </p:txBody>
-      </p:sp>
-      <p:sp>
-        <p:nvSpPr>
-          <p:cNvPr id="18" name="TextBox 17"/>
-          <p:cNvSpPr txBox="1"/>
-          <p:nvPr/>
-        </p:nvSpPr>
-        <p:spPr>
-          <a:xfrm>
-            <a:off x="822960" y="4288536"/>
-            <a:ext cx="1737360" cy="603504"/>
-          </a:xfrm>
-          <a:prstGeom prst="rect">
-            <a:avLst/>
-          </a:prstGeom>
-          <a:noFill/>
-        </p:spPr>
-        <p:txBody>
-          <a:bodyPr wrap="square" anchor="ctr" lIns="0" rIns="0" tIns="0" bIns="0">
-            <a:spAutoFit/>
-          </a:bodyPr>
-          <a:lstStyle/>
-          <a:p>
-            <a:pPr algn="ctr">
-              <a:spcBef>
-                <a:spcPts val="0"/>
-              </a:spcBef>
-              <a:spcAft>
-                <a:spcPts val="400"/>
-              </a:spcAft>
-            </a:pPr>
-            <a:r>
-              <a:rPr sz="1400" b="1" i="0">
-                <a:solidFill>
-                  <a:srgbClr val="2DD4BF"/>
-                </a:solidFill>
-                <a:latin typeface="Consolas"/>
-              </a:rPr>
-              <a:t>Wk 8–9</a:t>
-            </a:r>
-          </a:p>
-        </p:txBody>
-      </p:sp>
-      <p:sp>
-        <p:nvSpPr>
-          <p:cNvPr id="19" name="Rounded Rectangle 18"/>
-          <p:cNvSpPr/>
-          <p:nvPr/>
-        </p:nvSpPr>
-        <p:spPr>
-          <a:xfrm>
-            <a:off x="2743200" y="4288536"/>
-            <a:ext cx="8595360" cy="603504"/>
-          </a:xfrm>
-          <a:prstGeom prst="roundRect">
-            <a:avLst/>
-          </a:prstGeom>
-          <a:solidFill>
-            <a:srgbClr val="F1F5F9"/>
-          </a:solidFill>
-          <a:ln>
-            <a:noFill/>
-          </a:ln>
-          <a:effectLst/>
-        </p:spPr>
-        <p:style>
-          <a:lnRef idx="1">
-            <a:schemeClr val="accent1"/>
-          </a:lnRef>
-          <a:fillRef idx="3">
-            <a:schemeClr val="accent1"/>
-          </a:fillRef>
-          <a:effectRef idx="2">
-            <a:schemeClr val="accent1"/>
-          </a:effectRef>
-          <a:fontRef idx="minor">
-            <a:schemeClr val="lt1"/>
-          </a:fontRef>
-        </p:style>
-        <p:txBody>
-          <a:bodyPr rtlCol="0" anchor="ctr"/>
-          <a:lstStyle/>
-          <a:p>
-            <a:pPr algn="ctr"/>
-          </a:p>
-        </p:txBody>
-      </p:sp>
-      <p:sp>
-        <p:nvSpPr>
-          <p:cNvPr id="20" name="TextBox 19"/>
-          <p:cNvSpPr txBox="1"/>
-          <p:nvPr/>
-        </p:nvSpPr>
-        <p:spPr>
-          <a:xfrm>
-            <a:off x="3063240" y="4288536"/>
-            <a:ext cx="8138160" cy="603504"/>
-          </a:xfrm>
-          <a:prstGeom prst="rect">
-            <a:avLst/>
-          </a:prstGeom>
-          <a:noFill/>
-        </p:spPr>
-        <p:txBody>
-          <a:bodyPr wrap="square" anchor="ctr" lIns="0" rIns="0" tIns="0" bIns="0">
-            <a:spAutoFit/>
-          </a:bodyPr>
-          <a:lstStyle/>
-          <a:p>
-            <a:pPr algn="l">
-              <a:spcBef>
-                <a:spcPts val="0"/>
-              </a:spcBef>
-              <a:spcAft>
-                <a:spcPts val="400"/>
-              </a:spcAft>
-            </a:pPr>
-            <a:r>
-              <a:rPr sz="1500" b="1" i="0">
-                <a:solidFill>
-                  <a:srgbClr val="0F172A"/>
-                </a:solidFill>
-                <a:latin typeface="Calibri"/>
-              </a:rPr>
-              <a:t>Houdini client   </a:t>
-            </a:r>
-            <a:r>
-              <a:rPr sz="1350" b="0" i="0">
-                <a:solidFill>
-                  <a:srgbClr val="64748B"/>
-                </a:solidFill>
-                <a:latin typeface="Calibri"/>
-              </a:rPr>
-              <a:t>USD publish / consume</a:t>
-            </a:r>
-          </a:p>
-        </p:txBody>
-      </p:sp>
-      <p:sp>
-        <p:nvSpPr>
-          <p:cNvPr id="21" name="Rounded Rectangle 20"/>
-          <p:cNvSpPr/>
-          <p:nvPr/>
-        </p:nvSpPr>
-        <p:spPr>
-          <a:xfrm>
-            <a:off x="822960" y="5047488"/>
-            <a:ext cx="1737360" cy="603504"/>
-          </a:xfrm>
-          <a:prstGeom prst="roundRect">
-            <a:avLst/>
-          </a:prstGeom>
-          <a:solidFill>
-            <a:srgbClr val="0E1628"/>
-          </a:solidFill>
-          <a:ln>
-            <a:noFill/>
-          </a:ln>
-          <a:effectLst/>
-        </p:spPr>
-        <p:style>
-          <a:lnRef idx="1">
-            <a:schemeClr val="accent1"/>
-          </a:lnRef>
-          <a:fillRef idx="3">
-            <a:schemeClr val="accent1"/>
-          </a:fillRef>
-          <a:effectRef idx="2">
-            <a:schemeClr val="accent1"/>
-          </a:effectRef>
-          <a:fontRef idx="minor">
-            <a:schemeClr val="lt1"/>
-          </a:fontRef>
-        </p:style>
-        <p:txBody>
-          <a:bodyPr rtlCol="0" anchor="ctr"/>
-          <a:lstStyle/>
-          <a:p>
-            <a:pPr algn="ctr"/>
-          </a:p>
-        </p:txBody>
-      </p:sp>
-      <p:sp>
-        <p:nvSpPr>
-          <p:cNvPr id="22" name="TextBox 21"/>
-          <p:cNvSpPr txBox="1"/>
-          <p:nvPr/>
-        </p:nvSpPr>
-        <p:spPr>
-          <a:xfrm>
-            <a:off x="822960" y="5047488"/>
-            <a:ext cx="1737360" cy="603504"/>
-          </a:xfrm>
-          <a:prstGeom prst="rect">
-            <a:avLst/>
-          </a:prstGeom>
-          <a:noFill/>
-        </p:spPr>
-        <p:txBody>
-          <a:bodyPr wrap="square" anchor="ctr" lIns="0" rIns="0" tIns="0" bIns="0">
-            <a:spAutoFit/>
-          </a:bodyPr>
-          <a:lstStyle/>
-          <a:p>
-            <a:pPr algn="ctr">
-              <a:spcBef>
-                <a:spcPts val="0"/>
-              </a:spcBef>
-              <a:spcAft>
-                <a:spcPts val="400"/>
-              </a:spcAft>
-            </a:pPr>
-            <a:r>
-              <a:rPr sz="1400" b="1" i="0">
-                <a:solidFill>
-                  <a:srgbClr val="2DD4BF"/>
-                </a:solidFill>
-                <a:latin typeface="Consolas"/>
-              </a:rPr>
-              <a:t>Wk 10–11</a:t>
-            </a:r>
-          </a:p>
-        </p:txBody>
-      </p:sp>
-      <p:sp>
-        <p:nvSpPr>
-          <p:cNvPr id="23" name="Rounded Rectangle 22"/>
-          <p:cNvSpPr/>
-          <p:nvPr/>
-        </p:nvSpPr>
-        <p:spPr>
-          <a:xfrm>
-            <a:off x="2743200" y="5047488"/>
-            <a:ext cx="8595360" cy="603504"/>
-          </a:xfrm>
-          <a:prstGeom prst="roundRect">
-            <a:avLst/>
-          </a:prstGeom>
-          <a:solidFill>
-            <a:srgbClr val="F1F5F9"/>
-          </a:solidFill>
-          <a:ln>
-            <a:noFill/>
-          </a:ln>
-          <a:effectLst/>
-        </p:spPr>
-        <p:style>
-          <a:lnRef idx="1">
-            <a:schemeClr val="accent1"/>
-          </a:lnRef>
-          <a:fillRef idx="3">
-            <a:schemeClr val="accent1"/>
-          </a:fillRef>
-          <a:effectRef idx="2">
-            <a:schemeClr val="accent1"/>
-          </a:effectRef>
-          <a:fontRef idx="minor">
-            <a:schemeClr val="lt1"/>
-          </a:fontRef>
-        </p:style>
-        <p:txBody>
-          <a:bodyPr rtlCol="0" anchor="ctr"/>
-          <a:lstStyle/>
-          <a:p>
-            <a:pPr algn="ctr"/>
-          </a:p>
-        </p:txBody>
-      </p:sp>
-      <p:sp>
-        <p:nvSpPr>
-          <p:cNvPr id="24" name="TextBox 23"/>
-          <p:cNvSpPr txBox="1"/>
-          <p:nvPr/>
-        </p:nvSpPr>
-        <p:spPr>
-          <a:xfrm>
-            <a:off x="3063240" y="5047488"/>
-            <a:ext cx="8138160" cy="603504"/>
-          </a:xfrm>
-          <a:prstGeom prst="rect">
-            <a:avLst/>
-          </a:prstGeom>
-          <a:noFill/>
-        </p:spPr>
-        <p:txBody>
-          <a:bodyPr wrap="square" anchor="ctr" lIns="0" rIns="0" tIns="0" bIns="0">
-            <a:spAutoFit/>
-          </a:bodyPr>
-          <a:lstStyle/>
-          <a:p>
-            <a:pPr algn="l">
-              <a:spcBef>
-                <a:spcPts val="0"/>
-              </a:spcBef>
-              <a:spcAft>
-                <a:spcPts val="400"/>
-              </a:spcAft>
-            </a:pPr>
-            <a:r>
-              <a:rPr sz="1500" b="1" i="0">
-                <a:solidFill>
-                  <a:srgbClr val="0F172A"/>
-                </a:solidFill>
-                <a:latin typeface="Calibri"/>
-              </a:rPr>
-              <a:t>Versioning + deploy   </a:t>
-            </a:r>
-            <a:r>
-              <a:rPr sz="1350" b="0" i="0">
-                <a:solidFill>
-                  <a:srgbClr val="64748B"/>
-                </a:solidFill>
-                <a:latin typeface="Calibri"/>
-              </a:rPr>
-              <a:t>Resolution layer; Docker; pilot the study</a:t>
-            </a:r>
-          </a:p>
-        </p:txBody>
-      </p:sp>
-      <p:sp>
-        <p:nvSpPr>
-          <p:cNvPr id="25" name="Rounded Rectangle 24"/>
-          <p:cNvSpPr/>
-          <p:nvPr/>
-        </p:nvSpPr>
-        <p:spPr>
-          <a:xfrm>
-            <a:off x="822960" y="5806440"/>
-            <a:ext cx="1737360" cy="603504"/>
-          </a:xfrm>
-          <a:prstGeom prst="roundRect">
-            <a:avLst/>
-          </a:prstGeom>
-          <a:solidFill>
-            <a:srgbClr val="0E1628"/>
-          </a:solidFill>
-          <a:ln>
-            <a:noFill/>
-          </a:ln>
-          <a:effectLst/>
-        </p:spPr>
-        <p:style>
-          <a:lnRef idx="1">
-            <a:schemeClr val="accent1"/>
-          </a:lnRef>
-          <a:fillRef idx="3">
-            <a:schemeClr val="accent1"/>
-          </a:fillRef>
-          <a:effectRef idx="2">
-            <a:schemeClr val="accent1"/>
-          </a:effectRef>
-          <a:fontRef idx="minor">
-            <a:schemeClr val="lt1"/>
-          </a:fontRef>
-        </p:style>
-        <p:txBody>
-          <a:bodyPr rtlCol="0" anchor="ctr"/>
-          <a:lstStyle/>
-          <a:p>
-            <a:pPr algn="ctr"/>
-          </a:p>
-        </p:txBody>
-      </p:sp>
-      <p:sp>
-        <p:nvSpPr>
-          <p:cNvPr id="26" name="TextBox 25"/>
-          <p:cNvSpPr txBox="1"/>
-          <p:nvPr/>
-        </p:nvSpPr>
-        <p:spPr>
-          <a:xfrm>
-            <a:off x="822960" y="5806440"/>
-            <a:ext cx="1737360" cy="603504"/>
-          </a:xfrm>
-          <a:prstGeom prst="rect">
-            <a:avLst/>
-          </a:prstGeom>
-          <a:noFill/>
-        </p:spPr>
-        <p:txBody>
-          <a:bodyPr wrap="square" anchor="ctr" lIns="0" rIns="0" tIns="0" bIns="0">
-            <a:spAutoFit/>
-          </a:bodyPr>
-          <a:lstStyle/>
-          <a:p>
-            <a:pPr algn="ctr">
-              <a:spcBef>
-                <a:spcPts val="0"/>
-              </a:spcBef>
-              <a:spcAft>
-                <a:spcPts val="400"/>
-              </a:spcAft>
-            </a:pPr>
-            <a:r>
-              <a:rPr sz="1400" b="1" i="0">
-                <a:solidFill>
-                  <a:srgbClr val="2DD4BF"/>
-                </a:solidFill>
-                <a:latin typeface="Consolas"/>
-              </a:rPr>
-              <a:t>Wk 12–14</a:t>
-            </a:r>
-          </a:p>
-        </p:txBody>
-      </p:sp>
-      <p:sp>
-        <p:nvSpPr>
-          <p:cNvPr id="27" name="Rounded Rectangle 26"/>
-          <p:cNvSpPr/>
-          <p:nvPr/>
-        </p:nvSpPr>
-        <p:spPr>
-          <a:xfrm>
-            <a:off x="2743200" y="5806440"/>
-            <a:ext cx="8595360" cy="603504"/>
-          </a:xfrm>
-          <a:prstGeom prst="roundRect">
-            <a:avLst/>
-          </a:prstGeom>
-          <a:solidFill>
-            <a:srgbClr val="F1F5F9"/>
-          </a:solidFill>
-          <a:ln>
-            <a:noFill/>
-          </a:ln>
-          <a:effectLst/>
-        </p:spPr>
-        <p:style>
-          <a:lnRef idx="1">
-            <a:schemeClr val="accent1"/>
-          </a:lnRef>
-          <a:fillRef idx="3">
-            <a:schemeClr val="accent1"/>
-          </a:fillRef>
-          <a:effectRef idx="2">
-            <a:schemeClr val="accent1"/>
-          </a:effectRef>
-          <a:fontRef idx="minor">
-            <a:schemeClr val="lt1"/>
-          </a:fontRef>
-        </p:style>
-        <p:txBody>
-          <a:bodyPr rtlCol="0" anchor="ctr"/>
-          <a:lstStyle/>
-          <a:p>
-            <a:pPr algn="ctr"/>
-          </a:p>
-        </p:txBody>
-      </p:sp>
-      <p:sp>
-        <p:nvSpPr>
-          <p:cNvPr id="28" name="TextBox 27"/>
-          <p:cNvSpPr txBox="1"/>
-          <p:nvPr/>
-        </p:nvSpPr>
-        <p:spPr>
-          <a:xfrm>
-            <a:off x="3063240" y="5806440"/>
-            <a:ext cx="8138160" cy="603504"/>
-          </a:xfrm>
-          <a:prstGeom prst="rect">
-            <a:avLst/>
-          </a:prstGeom>
-          <a:noFill/>
-        </p:spPr>
-        <p:txBody>
-          <a:bodyPr wrap="square" anchor="ctr" lIns="0" rIns="0" tIns="0" bIns="0">
-            <a:spAutoFit/>
-          </a:bodyPr>
-          <a:lstStyle/>
-          <a:p>
-            <a:pPr algn="l">
-              <a:spcBef>
-                <a:spcPts val="0"/>
-              </a:spcBef>
-              <a:spcAft>
-                <a:spcPts val="400"/>
-              </a:spcAft>
-            </a:pPr>
-            <a:r>
-              <a:rPr sz="1500" b="1" i="0">
-                <a:solidFill>
-                  <a:srgbClr val="0F172A"/>
-                </a:solidFill>
-                <a:latin typeface="Calibri"/>
-              </a:rPr>
-              <a:t>Study &amp; write-up   </a:t>
-            </a:r>
-            <a:r>
-              <a:rPr sz="1350" b="0" i="0">
-                <a:solidFill>
-                  <a:srgbClr val="64748B"/>
-                </a:solidFill>
-                <a:latin typeface="Calibri"/>
-              </a:rPr>
-              <a:t>Run user study, analyse, finalise thesis</a:t>
-            </a:r>
-          </a:p>
-        </p:txBody>
-      </p:sp>
-    </p:spTree>
-  </p:cSld>
-  <p:clrMapOvr>
-    <a:masterClrMapping/>
-  </p:clrMapOvr>
-</p:sld>
-</file>
-
-<file path=ppt/slides/slide9.xml><?xml version="1.0" encoding="utf-8"?>
-<p:sld xmlns:a="http://schemas.openxmlformats.org/drawingml/2006/main" xmlns:p="http://schemas.openxmlformats.org/presentationml/2006/main" xmlns:r="http://schemas.openxmlformats.org/officeDocument/2006/relationships">
-  <p:cSld>
-    <p:spTree>
-      <p:nvGrpSpPr>
-        <p:cNvPr id="1" name=""/>
-        <p:cNvGrpSpPr/>
-        <p:nvPr/>
-      </p:nvGrpSpPr>
-      <p:grpSpPr/>
-      <p:sp>
-        <p:nvSpPr>
-          <p:cNvPr id="2" name="Rectangle 1"/>
-          <p:cNvSpPr/>
-          <p:nvPr/>
-        </p:nvSpPr>
-        <p:spPr>
-          <a:xfrm>
-            <a:off x="0" y="0"/>
-            <a:ext cx="12191695" cy="6858000"/>
-          </a:xfrm>
-          <a:prstGeom prst="rect">
-            <a:avLst/>
-          </a:prstGeom>
-          <a:solidFill>
-            <a:srgbClr val="FFFFFF"/>
-          </a:solidFill>
-          <a:ln>
-            <a:noFill/>
-          </a:ln>
-          <a:effectLst/>
-        </p:spPr>
-        <p:style>
-          <a:lnRef idx="1">
-            <a:schemeClr val="accent1"/>
-          </a:lnRef>
-          <a:fillRef idx="3">
-            <a:schemeClr val="accent1"/>
-          </a:fillRef>
-          <a:effectRef idx="2">
-            <a:schemeClr val="accent1"/>
-          </a:effectRef>
-          <a:fontRef idx="minor">
-            <a:schemeClr val="lt1"/>
-          </a:fontRef>
-        </p:style>
-        <p:txBody>
-          <a:bodyPr rtlCol="0" anchor="ctr"/>
-          <a:lstStyle/>
-          <a:p>
-            <a:pPr algn="ctr"/>
-          </a:p>
-        </p:txBody>
-      </p:sp>
-      <p:sp>
-        <p:nvSpPr>
-          <p:cNvPr id="3" name="TextBox 2"/>
-          <p:cNvSpPr txBox="1"/>
-          <p:nvPr/>
-        </p:nvSpPr>
-        <p:spPr>
-          <a:xfrm>
-            <a:off x="822960" y="640080"/>
-            <a:ext cx="5486400" cy="274320"/>
-          </a:xfrm>
-          <a:prstGeom prst="rect">
-            <a:avLst/>
-          </a:prstGeom>
-          <a:noFill/>
-        </p:spPr>
-        <p:txBody>
-          <a:bodyPr wrap="square" anchor="t" lIns="0" rIns="0" tIns="0" bIns="0">
-            <a:spAutoFit/>
-          </a:bodyPr>
-          <a:lstStyle/>
-          <a:p>
-            <a:pPr algn="l">
-              <a:spcBef>
-                <a:spcPts val="0"/>
-              </a:spcBef>
-              <a:spcAft>
-                <a:spcPts val="400"/>
-              </a:spcAft>
-            </a:pPr>
-            <a:r>
-              <a:rPr sz="1200" b="1" i="0" spc="200">
-                <a:solidFill>
-                  <a:srgbClr val="14B8A6"/>
-                </a:solidFill>
-                <a:latin typeface="Consolas"/>
-              </a:rPr>
-              <a:t>SCOPE &amp; RISK</a:t>
-            </a:r>
-          </a:p>
-        </p:txBody>
-      </p:sp>
-      <p:sp>
-        <p:nvSpPr>
-          <p:cNvPr id="4" name="TextBox 3"/>
-          <p:cNvSpPr txBox="1"/>
-          <p:nvPr/>
-        </p:nvSpPr>
-        <p:spPr>
-          <a:xfrm>
-            <a:off x="822960" y="960120"/>
-            <a:ext cx="10515600" cy="731520"/>
-          </a:xfrm>
-          <a:prstGeom prst="rect">
-            <a:avLst/>
-          </a:prstGeom>
-          <a:noFill/>
-        </p:spPr>
-        <p:txBody>
-          <a:bodyPr wrap="square" anchor="t" lIns="0" rIns="0" tIns="0" bIns="0">
-            <a:spAutoFit/>
-          </a:bodyPr>
-          <a:lstStyle/>
-          <a:p>
-            <a:pPr algn="l">
-              <a:spcBef>
-                <a:spcPts val="0"/>
-              </a:spcBef>
-              <a:spcAft>
-                <a:spcPts val="400"/>
-              </a:spcAft>
-            </a:pPr>
-            <a:r>
-              <a:rPr sz="3200" b="1" i="0">
-                <a:solidFill>
-                  <a:srgbClr val="0F172A"/>
-                </a:solidFill>
-                <a:latin typeface="Georgia"/>
-              </a:rPr>
-              <a:t>Deliberately bounded</a:t>
-            </a:r>
-          </a:p>
-        </p:txBody>
-      </p:sp>
-      <p:sp>
-        <p:nvSpPr>
-          <p:cNvPr id="5" name="Rounded Rectangle 4"/>
-          <p:cNvSpPr/>
-          <p:nvPr/>
-        </p:nvSpPr>
-        <p:spPr>
-          <a:xfrm>
-            <a:off x="822960" y="1920240"/>
-            <a:ext cx="3291840" cy="3566160"/>
-          </a:xfrm>
-          <a:prstGeom prst="roundRect">
-            <a:avLst/>
-          </a:prstGeom>
-          <a:solidFill>
-            <a:srgbClr val="F1F5F9"/>
-          </a:solidFill>
-          <a:ln>
-            <a:noFill/>
-          </a:ln>
-          <a:effectLst/>
-          <a:effectLst>
-            <a:outerShdw blurRad="90000" dist="40000" dir="5400000" rotWithShape="0">
-              <a:srgbClr val="0F172A">
-                <a:alpha val="14000"/>
-              </a:srgbClr>
-            </a:outerShdw>
-          </a:effectLst>
-        </p:spPr>
-        <p:style>
-          <a:lnRef idx="1">
-            <a:schemeClr val="accent1"/>
-          </a:lnRef>
-          <a:fillRef idx="3">
-            <a:schemeClr val="accent1"/>
-          </a:fillRef>
-          <a:effectRef idx="2">
-            <a:schemeClr val="accent1"/>
-          </a:effectRef>
-          <a:fontRef idx="minor">
-            <a:schemeClr val="lt1"/>
-          </a:fontRef>
-        </p:style>
-        <p:txBody>
-          <a:bodyPr rtlCol="0" anchor="ctr"/>
-          <a:lstStyle/>
-          <a:p>
-            <a:pPr algn="ctr"/>
-          </a:p>
-        </p:txBody>
-      </p:sp>
-      <p:sp>
-        <p:nvSpPr>
-          <p:cNvPr id="6" name="TextBox 5"/>
-          <p:cNvSpPr txBox="1"/>
-          <p:nvPr/>
-        </p:nvSpPr>
-        <p:spPr>
-          <a:xfrm>
-            <a:off x="1143000" y="2240280"/>
-            <a:ext cx="2743200" cy="274320"/>
-          </a:xfrm>
-          <a:prstGeom prst="rect">
-            <a:avLst/>
-          </a:prstGeom>
-          <a:noFill/>
-        </p:spPr>
-        <p:txBody>
-          <a:bodyPr wrap="square" anchor="t" lIns="0" rIns="0" tIns="0" bIns="0">
-            <a:spAutoFit/>
-          </a:bodyPr>
-          <a:lstStyle/>
-          <a:p>
-            <a:pPr algn="l">
-              <a:spcBef>
-                <a:spcPts val="0"/>
-              </a:spcBef>
-              <a:spcAft>
-                <a:spcPts val="400"/>
-              </a:spcAft>
-            </a:pPr>
-            <a:r>
-              <a:rPr sz="1200" b="1" i="0" spc="200">
-                <a:solidFill>
-                  <a:srgbClr val="14B8A6"/>
-                </a:solidFill>
-                <a:latin typeface="Consolas"/>
-              </a:rPr>
-              <a:t>IN SCOPE</a:t>
-            </a:r>
-          </a:p>
-        </p:txBody>
-      </p:sp>
-      <p:sp>
-        <p:nvSpPr>
-          <p:cNvPr id="7" name="TextBox 6"/>
-          <p:cNvSpPr txBox="1"/>
-          <p:nvPr/>
-        </p:nvSpPr>
-        <p:spPr>
-          <a:xfrm>
-            <a:off x="1143000" y="2697480"/>
-            <a:ext cx="2743200" cy="2743200"/>
-          </a:xfrm>
-          <a:prstGeom prst="rect">
-            <a:avLst/>
-          </a:prstGeom>
-          <a:noFill/>
-        </p:spPr>
-        <p:txBody>
-          <a:bodyPr wrap="square" lIns="0" rIns="0" tIns="0" bIns="0">
-            <a:spAutoFit/>
-          </a:bodyPr>
-          <a:lstStyle/>
-          <a:p>
-            <a:pPr>
-              <a:spcBef>
-                <a:spcPts val="0"/>
-              </a:spcBef>
-              <a:spcAft>
-                <a:spcPts val="1000"/>
-              </a:spcAft>
-            </a:pPr>
-            <a:r>
-              <a:rPr sz="1400" b="1">
-                <a:solidFill>
-                  <a:srgbClr val="14B8A6"/>
-                </a:solidFill>
-                <a:latin typeface="Calibri"/>
-              </a:rPr>
-              <a:t>—  </a:t>
-            </a:r>
-            <a:r>
-              <a:rPr sz="1400">
-                <a:solidFill>
-                  <a:srgbClr val="0F172A"/>
-                </a:solidFill>
-                <a:latin typeface="Calibri"/>
-              </a:rPr>
-              <a:t>USD interchange</a:t>
-            </a:r>
-          </a:p>
-          <a:p>
-            <a:pPr>
-              <a:spcBef>
-                <a:spcPts val="0"/>
-              </a:spcBef>
-              <a:spcAft>
-                <a:spcPts val="1000"/>
-              </a:spcAft>
-            </a:pPr>
-            <a:r>
-              <a:rPr sz="1400" b="1">
-                <a:solidFill>
-                  <a:srgbClr val="14B8A6"/>
-                </a:solidFill>
-                <a:latin typeface="Calibri"/>
-              </a:rPr>
-              <a:t>—  </a:t>
-            </a:r>
-            <a:r>
-              <a:rPr sz="1400">
-                <a:solidFill>
-                  <a:srgbClr val="0F172A"/>
-                </a:solidFill>
-                <a:latin typeface="Calibri"/>
-              </a:rPr>
-              <a:t>Versioning + approved state</a:t>
-            </a:r>
-          </a:p>
-          <a:p>
-            <a:pPr>
-              <a:spcBef>
-                <a:spcPts val="0"/>
-              </a:spcBef>
-              <a:spcAft>
-                <a:spcPts val="1000"/>
-              </a:spcAft>
-            </a:pPr>
-            <a:r>
-              <a:rPr sz="1400" b="1">
-                <a:solidFill>
-                  <a:srgbClr val="14B8A6"/>
-                </a:solidFill>
-                <a:latin typeface="Calibri"/>
-              </a:rPr>
-              <a:t>—  </a:t>
-            </a:r>
-            <a:r>
-              <a:rPr sz="1400">
-                <a:solidFill>
-                  <a:srgbClr val="0F172A"/>
-                </a:solidFill>
-                <a:latin typeface="Calibri"/>
-              </a:rPr>
-              <a:t>Maya + Houdini clients</a:t>
-            </a:r>
-          </a:p>
-          <a:p>
-            <a:pPr>
-              <a:spcBef>
-                <a:spcPts val="0"/>
-              </a:spcBef>
-              <a:spcAft>
-                <a:spcPts val="1000"/>
-              </a:spcAft>
-            </a:pPr>
-            <a:r>
-              <a:rPr sz="1400" b="1">
-                <a:solidFill>
-                  <a:srgbClr val="14B8A6"/>
-                </a:solidFill>
-                <a:latin typeface="Calibri"/>
-              </a:rPr>
-              <a:t>—  </a:t>
-            </a:r>
-            <a:r>
-              <a:rPr sz="1400">
-                <a:solidFill>
-                  <a:srgbClr val="0F172A"/>
-                </a:solidFill>
-                <a:latin typeface="Calibri"/>
-              </a:rPr>
-              <a:t>Auth + Docker deploy</a:t>
-            </a:r>
-          </a:p>
-          <a:p>
-            <a:pPr>
-              <a:spcBef>
-                <a:spcPts val="0"/>
-              </a:spcBef>
-              <a:spcAft>
-                <a:spcPts val="1000"/>
-              </a:spcAft>
-            </a:pPr>
-            <a:r>
-              <a:rPr sz="1400" b="1">
-                <a:solidFill>
-                  <a:srgbClr val="14B8A6"/>
-                </a:solidFill>
-                <a:latin typeface="Calibri"/>
-              </a:rPr>
-              <a:t>—  </a:t>
-            </a:r>
-            <a:r>
-              <a:rPr sz="1400">
-                <a:solidFill>
-                  <a:srgbClr val="0F172A"/>
-                </a:solidFill>
-                <a:latin typeface="Calibri"/>
-              </a:rPr>
-              <a:t>Automated tests</a:t>
-            </a:r>
-          </a:p>
-          <a:p>
-            <a:pPr>
-              <a:spcBef>
-                <a:spcPts val="0"/>
-              </a:spcBef>
-              <a:spcAft>
-                <a:spcPts val="1000"/>
-              </a:spcAft>
-            </a:pPr>
-            <a:r>
-              <a:rPr sz="1400" b="1">
-                <a:solidFill>
-                  <a:srgbClr val="14B8A6"/>
-                </a:solidFill>
-                <a:latin typeface="Calibri"/>
-              </a:rPr>
-              <a:t>—  </a:t>
-            </a:r>
-            <a:r>
-              <a:rPr sz="1400">
-                <a:solidFill>
-                  <a:srgbClr val="0F172A"/>
-                </a:solidFill>
-                <a:latin typeface="Calibri"/>
-              </a:rPr>
-              <a:t>User evaluation</a:t>
-            </a:r>
-          </a:p>
-        </p:txBody>
-      </p:sp>
-      <p:sp>
-        <p:nvSpPr>
-          <p:cNvPr id="8" name="Rounded Rectangle 7"/>
-          <p:cNvSpPr/>
-          <p:nvPr/>
-        </p:nvSpPr>
-        <p:spPr>
-          <a:xfrm>
-            <a:off x="4343400" y="1920240"/>
-            <a:ext cx="3291840" cy="3566160"/>
-          </a:xfrm>
-          <a:prstGeom prst="roundRect">
-            <a:avLst/>
-          </a:prstGeom>
-          <a:solidFill>
-            <a:srgbClr val="F1F5F9"/>
-          </a:solidFill>
-          <a:ln>
-            <a:noFill/>
-          </a:ln>
-          <a:effectLst/>
-          <a:effectLst>
-            <a:outerShdw blurRad="90000" dist="40000" dir="5400000" rotWithShape="0">
-              <a:srgbClr val="0F172A">
-                <a:alpha val="14000"/>
-              </a:srgbClr>
-            </a:outerShdw>
-          </a:effectLst>
-        </p:spPr>
-        <p:style>
-          <a:lnRef idx="1">
-            <a:schemeClr val="accent1"/>
-          </a:lnRef>
-          <a:fillRef idx="3">
-            <a:schemeClr val="accent1"/>
-          </a:fillRef>
-          <a:effectRef idx="2">
-            <a:schemeClr val="accent1"/>
-          </a:effectRef>
-          <a:fontRef idx="minor">
-            <a:schemeClr val="lt1"/>
-          </a:fontRef>
-        </p:style>
-        <p:txBody>
-          <a:bodyPr rtlCol="0" anchor="ctr"/>
-          <a:lstStyle/>
-          <a:p>
-            <a:pPr algn="ctr"/>
-          </a:p>
-        </p:txBody>
-      </p:sp>
-      <p:sp>
-        <p:nvSpPr>
-          <p:cNvPr id="9" name="TextBox 8"/>
-          <p:cNvSpPr txBox="1"/>
-          <p:nvPr/>
-        </p:nvSpPr>
-        <p:spPr>
-          <a:xfrm>
-            <a:off x="4663440" y="2240280"/>
-            <a:ext cx="2743200" cy="274320"/>
-          </a:xfrm>
-          <a:prstGeom prst="rect">
-            <a:avLst/>
-          </a:prstGeom>
-          <a:noFill/>
-        </p:spPr>
-        <p:txBody>
-          <a:bodyPr wrap="square" anchor="t" lIns="0" rIns="0" tIns="0" bIns="0">
-            <a:spAutoFit/>
-          </a:bodyPr>
-          <a:lstStyle/>
-          <a:p>
-            <a:pPr algn="l">
-              <a:spcBef>
-                <a:spcPts val="0"/>
-              </a:spcBef>
-              <a:spcAft>
-                <a:spcPts val="400"/>
-              </a:spcAft>
-            </a:pPr>
-            <a:r>
-              <a:rPr sz="1200" b="1" i="0" spc="200">
-                <a:solidFill>
-                  <a:srgbClr val="64748B"/>
-                </a:solidFill>
-                <a:latin typeface="Consolas"/>
-              </a:rPr>
-              <a:t>FUTURE WORK</a:t>
-            </a:r>
-          </a:p>
-        </p:txBody>
-      </p:sp>
-      <p:sp>
-        <p:nvSpPr>
-          <p:cNvPr id="10" name="TextBox 9"/>
-          <p:cNvSpPr txBox="1"/>
-          <p:nvPr/>
-        </p:nvSpPr>
-        <p:spPr>
-          <a:xfrm>
-            <a:off x="4663440" y="2697480"/>
-            <a:ext cx="2743200" cy="2743200"/>
-          </a:xfrm>
-          <a:prstGeom prst="rect">
-            <a:avLst/>
-          </a:prstGeom>
-          <a:noFill/>
-        </p:spPr>
-        <p:txBody>
-          <a:bodyPr wrap="square" lIns="0" rIns="0" tIns="0" bIns="0">
-            <a:spAutoFit/>
-          </a:bodyPr>
-          <a:lstStyle/>
-          <a:p>
-            <a:pPr>
-              <a:spcBef>
-                <a:spcPts val="0"/>
-              </a:spcBef>
-              <a:spcAft>
-                <a:spcPts val="1000"/>
-              </a:spcAft>
-            </a:pPr>
-            <a:r>
-              <a:rPr sz="1400" b="1">
-                <a:solidFill>
-                  <a:srgbClr val="94A3B8"/>
-                </a:solidFill>
-                <a:latin typeface="Calibri"/>
-              </a:rPr>
-              <a:t>—  </a:t>
-            </a:r>
-            <a:r>
-              <a:rPr sz="1400">
-                <a:solidFill>
-                  <a:srgbClr val="64748B"/>
-                </a:solidFill>
-                <a:latin typeface="Calibri"/>
-              </a:rPr>
-              <a:t>Substance / texture round-trip</a:t>
-            </a:r>
-          </a:p>
-          <a:p>
-            <a:pPr>
-              <a:spcBef>
-                <a:spcPts val="0"/>
-              </a:spcBef>
-              <a:spcAft>
-                <a:spcPts val="1000"/>
-              </a:spcAft>
-            </a:pPr>
-            <a:r>
-              <a:rPr sz="1400" b="1">
-                <a:solidFill>
-                  <a:srgbClr val="94A3B8"/>
-                </a:solidFill>
-                <a:latin typeface="Calibri"/>
-              </a:rPr>
-              <a:t>—  </a:t>
-            </a:r>
-            <a:r>
-              <a:rPr sz="1400">
-                <a:solidFill>
-                  <a:srgbClr val="64748B"/>
-                </a:solidFill>
-                <a:latin typeface="Calibri"/>
-              </a:rPr>
-              <a:t>Full custom Ar 2.0 resolver</a:t>
-            </a:r>
-          </a:p>
-          <a:p>
-            <a:pPr>
-              <a:spcBef>
-                <a:spcPts val="0"/>
-              </a:spcBef>
-              <a:spcAft>
-                <a:spcPts val="1000"/>
-              </a:spcAft>
-            </a:pPr>
-            <a:r>
-              <a:rPr sz="1400" b="1">
-                <a:solidFill>
-                  <a:srgbClr val="94A3B8"/>
-                </a:solidFill>
-                <a:latin typeface="Calibri"/>
-              </a:rPr>
-              <a:t>—  </a:t>
-            </a:r>
-            <a:r>
-              <a:rPr sz="1400">
-                <a:solidFill>
-                  <a:srgbClr val="64748B"/>
-                </a:solidFill>
-                <a:latin typeface="Calibri"/>
-              </a:rPr>
-              <a:t>Shot / sequence mgmt</a:t>
-            </a:r>
-          </a:p>
-          <a:p>
-            <a:pPr>
-              <a:spcBef>
-                <a:spcPts val="0"/>
-              </a:spcBef>
-              <a:spcAft>
-                <a:spcPts val="1000"/>
-              </a:spcAft>
-            </a:pPr>
-            <a:r>
-              <a:rPr sz="1400" b="1">
-                <a:solidFill>
-                  <a:srgbClr val="94A3B8"/>
-                </a:solidFill>
-                <a:latin typeface="Calibri"/>
-              </a:rPr>
-              <a:t>—  </a:t>
-            </a:r>
-            <a:r>
-              <a:rPr sz="1400">
-                <a:solidFill>
-                  <a:srgbClr val="64748B"/>
-                </a:solidFill>
-                <a:latin typeface="Calibri"/>
-              </a:rPr>
-              <a:t>Real-time multi-user</a:t>
-            </a:r>
-          </a:p>
-          <a:p>
-            <a:pPr>
-              <a:spcBef>
-                <a:spcPts val="0"/>
-              </a:spcBef>
-              <a:spcAft>
-                <a:spcPts val="1000"/>
-              </a:spcAft>
-            </a:pPr>
-            <a:r>
-              <a:rPr sz="1400" b="1">
-                <a:solidFill>
-                  <a:srgbClr val="94A3B8"/>
-                </a:solidFill>
-                <a:latin typeface="Calibri"/>
-              </a:rPr>
-              <a:t>—  </a:t>
-            </a:r>
-            <a:r>
-              <a:rPr sz="1400">
-                <a:solidFill>
-                  <a:srgbClr val="64748B"/>
-                </a:solidFill>
-                <a:latin typeface="Calibri"/>
-              </a:rPr>
-              <a:t>Cloud-scale storage</a:t>
-            </a:r>
-          </a:p>
-        </p:txBody>
-      </p:sp>
-      <p:sp>
-        <p:nvSpPr>
-          <p:cNvPr id="11" name="Rounded Rectangle 10"/>
-          <p:cNvSpPr/>
-          <p:nvPr/>
-        </p:nvSpPr>
-        <p:spPr>
-          <a:xfrm>
-            <a:off x="7863840" y="1920240"/>
-            <a:ext cx="3474720" cy="3566160"/>
-          </a:xfrm>
-          <a:prstGeom prst="roundRect">
-            <a:avLst/>
-          </a:prstGeom>
-          <a:solidFill>
-            <a:srgbClr val="0E1628"/>
-          </a:solidFill>
-          <a:ln>
-            <a:noFill/>
-          </a:ln>
-          <a:effectLst/>
-          <a:effectLst>
-            <a:outerShdw blurRad="90000" dist="40000" dir="5400000" rotWithShape="0">
-              <a:srgbClr val="0F172A">
-                <a:alpha val="14000"/>
-              </a:srgbClr>
-            </a:outerShdw>
-          </a:effectLst>
-        </p:spPr>
-        <p:style>
-          <a:lnRef idx="1">
-            <a:schemeClr val="accent1"/>
-          </a:lnRef>
-          <a:fillRef idx="3">
-            <a:schemeClr val="accent1"/>
-          </a:fillRef>
-          <a:effectRef idx="2">
-            <a:schemeClr val="accent1"/>
-          </a:effectRef>
-          <a:fontRef idx="minor">
-            <a:schemeClr val="lt1"/>
-          </a:fontRef>
-        </p:style>
-        <p:txBody>
-          <a:bodyPr rtlCol="0" anchor="ctr"/>
-          <a:lstStyle/>
-          <a:p>
-            <a:pPr algn="ctr"/>
-          </a:p>
-        </p:txBody>
-      </p:sp>
-      <p:sp>
-        <p:nvSpPr>
-          <p:cNvPr id="12" name="TextBox 11"/>
-          <p:cNvSpPr txBox="1"/>
-          <p:nvPr/>
-        </p:nvSpPr>
-        <p:spPr>
-          <a:xfrm>
-            <a:off x="8183879" y="2240280"/>
-            <a:ext cx="2743200" cy="274320"/>
-          </a:xfrm>
-          <a:prstGeom prst="rect">
-            <a:avLst/>
-          </a:prstGeom>
-          <a:noFill/>
-        </p:spPr>
-        <p:txBody>
-          <a:bodyPr wrap="square" anchor="t" lIns="0" rIns="0" tIns="0" bIns="0">
-            <a:spAutoFit/>
-          </a:bodyPr>
-          <a:lstStyle/>
-          <a:p>
-            <a:pPr algn="l">
-              <a:spcBef>
-                <a:spcPts val="0"/>
-              </a:spcBef>
-              <a:spcAft>
-                <a:spcPts val="400"/>
-              </a:spcAft>
-            </a:pPr>
-            <a:r>
-              <a:rPr sz="1200" b="1" i="0" spc="200">
-                <a:solidFill>
-                  <a:srgbClr val="F59E0B"/>
-                </a:solidFill>
-                <a:latin typeface="Consolas"/>
-              </a:rPr>
-              <a:t>KEY RISKS</a:t>
-            </a:r>
-          </a:p>
-        </p:txBody>
-      </p:sp>
-      <p:sp>
-        <p:nvSpPr>
-          <p:cNvPr id="13" name="TextBox 12"/>
-          <p:cNvSpPr txBox="1"/>
-          <p:nvPr/>
-        </p:nvSpPr>
-        <p:spPr>
-          <a:xfrm>
-            <a:off x="8183879" y="2697480"/>
-            <a:ext cx="2880360" cy="2743200"/>
-          </a:xfrm>
-          <a:prstGeom prst="rect">
-            <a:avLst/>
-          </a:prstGeom>
-          <a:noFill/>
-        </p:spPr>
-        <p:txBody>
-          <a:bodyPr wrap="square" lIns="0" rIns="0" tIns="0" bIns="0">
-            <a:spAutoFit/>
-          </a:bodyPr>
-          <a:lstStyle/>
-          <a:p>
-            <a:pPr>
-              <a:spcBef>
-                <a:spcPts val="0"/>
-              </a:spcBef>
-              <a:spcAft>
-                <a:spcPts val="1200"/>
-              </a:spcAft>
-            </a:pPr>
-            <a:r>
-              <a:rPr sz="1350" b="1">
-                <a:solidFill>
-                  <a:srgbClr val="F59E0B"/>
-                </a:solidFill>
-                <a:latin typeface="Calibri"/>
-              </a:rPr>
-              <a:t>—  </a:t>
-            </a:r>
-            <a:r>
-              <a:rPr sz="1350" b="1">
-                <a:solidFill>
-                  <a:srgbClr val="E2E8F0"/>
-                </a:solidFill>
-                <a:latin typeface="Calibri"/>
-              </a:rPr>
-              <a:t>USD learning curve  </a:t>
-            </a:r>
-            <a:r>
-              <a:rPr sz="1350">
-                <a:solidFill>
-                  <a:srgbClr val="E2E8F0"/>
-                </a:solidFill>
-                <a:latin typeface="Calibri"/>
-              </a:rPr>
-              <a:t>use prebuilt usd-core; week-1 spike</a:t>
-            </a:r>
-          </a:p>
-          <a:p>
-            <a:pPr>
-              <a:spcBef>
-                <a:spcPts val="0"/>
-              </a:spcBef>
-              <a:spcAft>
-                <a:spcPts val="1200"/>
-              </a:spcAft>
-            </a:pPr>
-            <a:r>
-              <a:rPr sz="1350" b="1">
-                <a:solidFill>
-                  <a:srgbClr val="F59E0B"/>
-                </a:solidFill>
-                <a:latin typeface="Calibri"/>
-              </a:rPr>
-              <a:t>—  </a:t>
-            </a:r>
-            <a:r>
-              <a:rPr sz="1350" b="1">
-                <a:solidFill>
-                  <a:srgbClr val="E2E8F0"/>
-                </a:solidFill>
-                <a:latin typeface="Calibri"/>
-              </a:rPr>
-              <a:t>Resolver too big  </a:t>
-            </a:r>
-            <a:r>
-              <a:rPr sz="1350">
-                <a:solidFill>
-                  <a:srgbClr val="E2E8F0"/>
-                </a:solidFill>
-                <a:latin typeface="Calibri"/>
-              </a:rPr>
-              <a:t>fall back to server-side resolution</a:t>
-            </a:r>
-          </a:p>
-          <a:p>
-            <a:pPr>
-              <a:spcBef>
-                <a:spcPts val="0"/>
-              </a:spcBef>
-              <a:spcAft>
-                <a:spcPts val="1200"/>
-              </a:spcAft>
-            </a:pPr>
-            <a:r>
-              <a:rPr sz="1350" b="1">
-                <a:solidFill>
-                  <a:srgbClr val="F59E0B"/>
-                </a:solidFill>
-                <a:latin typeface="Calibri"/>
-              </a:rPr>
-              <a:t>—  </a:t>
-            </a:r>
-            <a:r>
-              <a:rPr sz="1350" b="1">
-                <a:solidFill>
-                  <a:srgbClr val="E2E8F0"/>
-                </a:solidFill>
-                <a:latin typeface="Calibri"/>
-              </a:rPr>
-              <a:t>Recruiting artists  </a:t>
-            </a:r>
-            <a:r>
-              <a:rPr sz="1350">
-                <a:solidFill>
-                  <a:srgbClr val="E2E8F0"/>
-                </a:solidFill>
-                <a:latin typeface="Calibri"/>
-              </a:rPr>
-              <a:t>use NCCA cohort; short tasks</a:t>
+              <a:t>Thank you — questions welcome.</a:t>
             </a:r>
           </a:p>
         </p:txBody>
